--- a/Arquitectura de Sistemas Computacionales/Clases/Clase 13 - Escalabilidad automatica/Presentacion.pptx
+++ b/Arquitectura de Sistemas Computacionales/Clases/Clase 13 - Escalabilidad automatica/Presentacion.pptx
@@ -3376,7 +3376,7 @@
                 </a:solidFill>
                 <a:latin typeface="Calibri"/>
               </a:rPr>
-              <a:t> · Teoría breve · Taller PI · Quiz/cierre.</a:t>
+              <a:t> · Teoría breve · Taller PI · cierre.</a:t>
             </a:r>
           </a:p>
           <a:p>
@@ -3946,7 +3946,7 @@
                 </a:solidFill>
                 <a:latin typeface="Calibri"/>
               </a:rPr>
-              <a:t> Quiz corto / revisión de evidencias.</a:t>
+              <a:t> Revisión de evidencias del PI.</a:t>
             </a:r>
           </a:p>
           <a:p>

--- a/Arquitectura de Sistemas Computacionales/Clases/Clase 13 - Escalabilidad automatica/Presentacion.pptx
+++ b/Arquitectura de Sistemas Computacionales/Clases/Clase 13 - Escalabilidad automatica/Presentacion.pptx
@@ -6285,7 +6285,7 @@
                 </a:solidFill>
                 <a:latin typeface="Calibri"/>
               </a:rPr>
-              <a:t>Subir evidencias al paquete CloudLite (Drive/repo) y a ExamLab domingo 23:59.</a:t>
+              <a:t>Subir evidencias al paquete CloudLite (Drive/repo) y a ExamLab (https://examlab.lovable.app/) domingo 23:59.</a:t>
             </a:r>
           </a:p>
         </p:txBody>

--- a/Arquitectura de Sistemas Computacionales/Clases/Clase 13 - Escalabilidad automatica/Presentacion.pptx
+++ b/Arquitectura de Sistemas Computacionales/Clases/Clase 13 - Escalabilidad automatica/Presentacion.pptx
@@ -5692,7 +5692,7 @@
                 </a:solidFill>
                 <a:latin typeface="Calibri"/>
               </a:rPr>
-              <a:t> Describan qué componente escala y por qué.</a:t>
+              <a:t> Paso 1: tome los 5 componentes de su C4Deployment de la Clase 7 y clasifique cada uno como escala horizontal, escala vertical o no escala, verificando que al menos uno quede en no escala con justificacion tecnica, porque una politica donde todo escala no es una politica; el resultado abre la seccion Escalabilidad del informe.</a:t>
             </a:r>
           </a:p>
           <a:p>
@@ -5726,7 +5726,7 @@
                 </a:solidFill>
                 <a:latin typeface="Calibri"/>
               </a:rPr>
-              <a:t> Definan 2 triggers + min/max + qué NO se escala.</a:t>
+              <a:t> Paso 2: complete la tabla de politica de escalado con 6 columnas y 5 filas (componente, tipo de escala, disparador de subida, disparador de bajada, minimo y maximo, tiempo de enfriamiento), verificando que cada disparador tenga metrica, umbral numerico y ventana de tiempo, y que ningun maximo quede en infinito o sin definir.</a:t>
             </a:r>
           </a:p>
           <a:p>
@@ -5760,7 +5760,7 @@
                 </a:solidFill>
                 <a:latin typeface="Calibri"/>
               </a:rPr>
-              <a:t> Anoten impacto en costos/sostenibilidad.</a:t>
+              <a:t> Paso 3: escriba en ExamLab el diagrama Mermaid de la maquina de decision del autoescalado con el nodo de observacion, los dos rombos de decision, las acciones de subida y bajada, el enfriamiento y el nodo de lo que no escala, verificando al renderizar que el ciclo se cierre sobre el nodo de observacion y que los umbrales del diagrama sean los mismos numeros de la tabla.</a:t>
             </a:r>
           </a:p>
           <a:p>
@@ -5794,7 +5794,7 @@
                 </a:solidFill>
                 <a:latin typeface="Calibri"/>
               </a:rPr>
-              <a:t> Opcional: marca «ASG/replicas» en diagrama Deployment.</a:t>
+              <a:t> Paso 4: escriba los 3 componentes que NO escalan con su justificacion tecnica y su plan alterno, y la tabla de impacto en costos que enlaza con la Clase 10, verificando que cada plan alterno sea ejecutable sin cloud de pago y que el impacto de costo use los mismos niveles bajo, medio o alto de la seccion de costos.</a:t>
             </a:r>
           </a:p>
           <a:p>
@@ -5828,7 +5828,7 @@
                 </a:solidFill>
                 <a:latin typeface="Calibri"/>
               </a:rPr>
-              <a:t> Entrega domingo 23:59 (sección Escalabilidad).</a:t>
+              <a:t> Paso 5: integre la politica en la seccion Escalabilidad del informe, anote la marca de replicas en el diagrama de despliegue si aplica y suba las 5 preguntas a ExamLab (modulo Talleres) antes del domingo 23:59, verificando que la politica no prometa nada que la arquitectura dibujada no pueda cumplir.</a:t>
             </a:r>
           </a:p>
         </p:txBody>

--- a/Arquitectura de Sistemas Computacionales/Clases/Clase 13 - Escalabilidad automatica/Presentacion.pptx
+++ b/Arquitectura de Sistemas Computacionales/Clases/Clase 13 - Escalabilidad automatica/Presentacion.pptx
@@ -3921,7 +3921,7 @@
                 </a:solidFill>
                 <a:latin typeface="Calibri"/>
               </a:rPr>
-              <a:t> Taller guiado PI (demo en vivo + trabajo de equipo).</a:t>
+              <a:t> Taller guiado PI (demo en vivo + avance individual).</a:t>
             </a:r>
           </a:p>
           <a:p>
@@ -4536,7 +4536,7 @@
                 </a:solidFill>
                 <a:latin typeface="Calibri"/>
               </a:rPr>
-              <a:t>–   Equipos 2–3 · todos deben poder explicar el artefacto.</a:t>
+              <a:t>–   Individual por defecto · el docente puede autorizar equipos de 2–3; la entrega en ExamLab siempre es individual.</a:t>
             </a:r>
           </a:p>
         </p:txBody>

--- a/Arquitectura de Sistemas Computacionales/Clases/Clase 13 - Escalabilidad automatica/Presentacion.pptx
+++ b/Arquitectura de Sistemas Computacionales/Clases/Clase 13 - Escalabilidad automatica/Presentacion.pptx
@@ -6285,7 +6285,7 @@
                 </a:solidFill>
                 <a:latin typeface="Calibri"/>
               </a:rPr>
-              <a:t>Subir evidencias al paquete CloudLite (Drive/repo) y a ExamLab (https://examlab.lovable.app/) domingo 23:59.</a:t>
+              <a:t>Subir evidencias al paquete CloudLite (Drive/repo) y a ExamLab (https://uniaj.examlab.workers.dev/) domingo 23:59.</a:t>
             </a:r>
           </a:p>
         </p:txBody>

--- a/Arquitectura de Sistemas Computacionales/Clases/Clase 13 - Escalabilidad automatica/Presentacion.pptx
+++ b/Arquitectura de Sistemas Computacionales/Clases/Clase 13 - Escalabilidad automatica/Presentacion.pptx
@@ -15,6 +15,8 @@
     <p:sldId id="263" r:id="rId14"/>
     <p:sldId id="264" r:id="rId15"/>
     <p:sldId id="265" r:id="rId16"/>
+    <p:sldId id="266" r:id="rId17"/>
+    <p:sldId id="267" r:id="rId18"/>
   </p:sldIdLst>
   <p:sldSz cx="12191695" cy="6858000" type="screen4x3"/>
   <p:notesSz cx="6858000" cy="9144000"/>
@@ -3467,6 +3469,966 @@
         <p:spPr>
           <a:xfrm>
             <a:off x="0" y="0"/>
+            <a:ext cx="12191695" cy="960120"/>
+          </a:xfrm>
+          <a:prstGeom prst="rect">
+            <a:avLst/>
+          </a:prstGeom>
+          <a:solidFill>
+            <a:srgbClr val="095292"/>
+          </a:solidFill>
+          <a:ln>
+            <a:noFill/>
+          </a:ln>
+        </p:spPr>
+        <p:style>
+          <a:lnRef idx="1">
+            <a:schemeClr val="accent1"/>
+          </a:lnRef>
+          <a:fillRef idx="3">
+            <a:schemeClr val="accent1"/>
+          </a:fillRef>
+          <a:effectRef idx="2">
+            <a:schemeClr val="accent1"/>
+          </a:effectRef>
+          <a:fontRef idx="minor">
+            <a:schemeClr val="lt1"/>
+          </a:fontRef>
+        </p:style>
+        <p:txBody>
+          <a:bodyPr rtlCol="0" anchor="ctr"/>
+          <a:lstStyle/>
+          <a:p>
+            <a:pPr algn="ctr"/>
+          </a:p>
+        </p:txBody>
+      </p:sp>
+      <p:sp>
+        <p:nvSpPr>
+          <p:cNvPr id="3" name="Rectangle 2"/>
+          <p:cNvSpPr/>
+          <p:nvPr/>
+        </p:nvSpPr>
+        <p:spPr>
+          <a:xfrm>
+            <a:off x="0" y="960120"/>
+            <a:ext cx="12191695" cy="41148"/>
+          </a:xfrm>
+          <a:prstGeom prst="rect">
+            <a:avLst/>
+          </a:prstGeom>
+          <a:solidFill>
+            <a:srgbClr val="FFD000"/>
+          </a:solidFill>
+          <a:ln>
+            <a:noFill/>
+          </a:ln>
+        </p:spPr>
+        <p:style>
+          <a:lnRef idx="1">
+            <a:schemeClr val="accent1"/>
+          </a:lnRef>
+          <a:fillRef idx="3">
+            <a:schemeClr val="accent1"/>
+          </a:fillRef>
+          <a:effectRef idx="2">
+            <a:schemeClr val="accent1"/>
+          </a:effectRef>
+          <a:fontRef idx="minor">
+            <a:schemeClr val="lt1"/>
+          </a:fontRef>
+        </p:style>
+        <p:txBody>
+          <a:bodyPr rtlCol="0" anchor="ctr"/>
+          <a:lstStyle/>
+          <a:p>
+            <a:pPr algn="ctr"/>
+          </a:p>
+        </p:txBody>
+      </p:sp>
+      <p:sp>
+        <p:nvSpPr>
+          <p:cNvPr id="4" name="TextBox 3"/>
+          <p:cNvSpPr txBox="1"/>
+          <p:nvPr/>
+        </p:nvSpPr>
+        <p:spPr>
+          <a:xfrm>
+            <a:off x="457200" y="164592"/>
+            <a:ext cx="11277295" cy="502920"/>
+          </a:xfrm>
+          <a:prstGeom prst="rect">
+            <a:avLst/>
+          </a:prstGeom>
+          <a:noFill/>
+        </p:spPr>
+        <p:txBody>
+          <a:bodyPr wrap="square">
+            <a:spAutoFit/>
+          </a:bodyPr>
+          <a:lstStyle/>
+          <a:p>
+            <a:r>
+              <a:rPr sz="2600" b="1" i="0">
+                <a:solidFill>
+                  <a:srgbClr val="FFFFFF"/>
+                </a:solidFill>
+                <a:latin typeface="Calibri"/>
+              </a:rPr>
+              <a:t>Taller PI (paso a paso)</a:t>
+            </a:r>
+          </a:p>
+        </p:txBody>
+      </p:sp>
+      <p:sp>
+        <p:nvSpPr>
+          <p:cNvPr id="5" name="TextBox 4"/>
+          <p:cNvSpPr txBox="1"/>
+          <p:nvPr/>
+        </p:nvSpPr>
+        <p:spPr>
+          <a:xfrm>
+            <a:off x="457200" y="1170432"/>
+            <a:ext cx="11277295" cy="5230368"/>
+          </a:xfrm>
+          <a:prstGeom prst="rect">
+            <a:avLst/>
+          </a:prstGeom>
+          <a:noFill/>
+        </p:spPr>
+        <p:txBody>
+          <a:bodyPr wrap="square">
+            <a:spAutoFit/>
+          </a:bodyPr>
+          <a:lstStyle/>
+          <a:p>
+            <a:pPr>
+              <a:spcAft>
+                <a:spcPts val="800"/>
+              </a:spcAft>
+            </a:pPr>
+            <a:r>
+              <a:rPr sz="1600" b="1" i="0">
+                <a:solidFill>
+                  <a:srgbClr val="333333"/>
+                </a:solidFill>
+                <a:latin typeface="Calibri"/>
+              </a:rPr>
+              <a:t>1.</a:t>
+            </a:r>
+            <a:r>
+              <a:rPr sz="1600" b="0" i="0">
+                <a:solidFill>
+                  <a:srgbClr val="333333"/>
+                </a:solidFill>
+                <a:latin typeface="Calibri"/>
+              </a:rPr>
+              <a:t> Paso 1: tome los 5 componentes de su C4Deployment de la Clase 7 y clasifique cada uno como escala horizontal, escala vertical o no escala, verificando que al menos uno quede en no escala con justificacion tecnica, porque una politica donde todo escala no es una politica; el resultado abre la seccion Escalabilidad del informe.</a:t>
+            </a:r>
+          </a:p>
+          <a:p>
+            <a:pPr>
+              <a:spcAft>
+                <a:spcPts val="800"/>
+              </a:spcAft>
+            </a:pPr>
+            <a:r>
+              <a:rPr sz="1600" b="0" i="0">
+                <a:solidFill>
+                  <a:srgbClr val="333333"/>
+                </a:solidFill>
+                <a:latin typeface="Calibri"/>
+              </a:rPr>
+              <a:t>–   </a:t>
+            </a:r>
+            <a:r>
+              <a:rPr sz="1600" b="1" i="0">
+                <a:solidFill>
+                  <a:srgbClr val="333333"/>
+                </a:solidFill>
+                <a:latin typeface="Calibri"/>
+              </a:rPr>
+              <a:t>2.</a:t>
+            </a:r>
+            <a:r>
+              <a:rPr sz="1600" b="0" i="0">
+                <a:solidFill>
+                  <a:srgbClr val="333333"/>
+                </a:solidFill>
+                <a:latin typeface="Calibri"/>
+              </a:rPr>
+              <a:t> Paso 2: complete la tabla de politica de escalado con 6 columnas y 5 filas (componente, tipo de escala, disparador de subida, disparador de bajada, minimo y maximo, tiempo de enfriamiento), verificando que cada disparador tenga metrica, umbral numerico y ventana de tiempo, y que ningun maximo quede en infinito o sin definir.</a:t>
+            </a:r>
+          </a:p>
+          <a:p>
+            <a:pPr>
+              <a:spcAft>
+                <a:spcPts val="800"/>
+              </a:spcAft>
+            </a:pPr>
+            <a:r>
+              <a:rPr sz="1600" b="0" i="0">
+                <a:solidFill>
+                  <a:srgbClr val="333333"/>
+                </a:solidFill>
+                <a:latin typeface="Calibri"/>
+              </a:rPr>
+              <a:t>–   </a:t>
+            </a:r>
+            <a:r>
+              <a:rPr sz="1600" b="1" i="0">
+                <a:solidFill>
+                  <a:srgbClr val="333333"/>
+                </a:solidFill>
+                <a:latin typeface="Calibri"/>
+              </a:rPr>
+              <a:t>3.</a:t>
+            </a:r>
+            <a:r>
+              <a:rPr sz="1600" b="0" i="0">
+                <a:solidFill>
+                  <a:srgbClr val="333333"/>
+                </a:solidFill>
+                <a:latin typeface="Calibri"/>
+              </a:rPr>
+              <a:t> Paso 3: escriba en ExamLab el diagrama Mermaid de la maquina de decision del autoescalado con el nodo de observacion, los dos rombos de decision, las acciones de subida y bajada, el enfriamiento y el nodo de lo que no escala, verificando al renderizar que el ciclo se cierre sobre el nodo de observacion y que los umbrales del diagrama sean los mismos numeros de la tabla.</a:t>
+            </a:r>
+          </a:p>
+          <a:p>
+            <a:pPr>
+              <a:spcAft>
+                <a:spcPts val="800"/>
+              </a:spcAft>
+            </a:pPr>
+            <a:r>
+              <a:rPr sz="1600" b="0" i="0">
+                <a:solidFill>
+                  <a:srgbClr val="333333"/>
+                </a:solidFill>
+                <a:latin typeface="Calibri"/>
+              </a:rPr>
+              <a:t>–   </a:t>
+            </a:r>
+            <a:r>
+              <a:rPr sz="1600" b="1" i="0">
+                <a:solidFill>
+                  <a:srgbClr val="333333"/>
+                </a:solidFill>
+                <a:latin typeface="Calibri"/>
+              </a:rPr>
+              <a:t>4.</a:t>
+            </a:r>
+            <a:r>
+              <a:rPr sz="1600" b="0" i="0">
+                <a:solidFill>
+                  <a:srgbClr val="333333"/>
+                </a:solidFill>
+                <a:latin typeface="Calibri"/>
+              </a:rPr>
+              <a:t> Paso 4: escriba los 3 componentes que NO escalan con su justificacion tecnica y su plan alterno, y la tabla de impacto en costos que enlaza con la Clase 10, verificando que cada plan alterno sea ejecutable sin cloud de pago y que el impacto de costo use los mismos niveles bajo, medio o alto de la seccion de costos.</a:t>
+            </a:r>
+          </a:p>
+          <a:p>
+            <a:pPr>
+              <a:spcAft>
+                <a:spcPts val="800"/>
+              </a:spcAft>
+            </a:pPr>
+            <a:r>
+              <a:rPr sz="1600" b="0" i="0">
+                <a:solidFill>
+                  <a:srgbClr val="333333"/>
+                </a:solidFill>
+                <a:latin typeface="Calibri"/>
+              </a:rPr>
+              <a:t>–   </a:t>
+            </a:r>
+            <a:r>
+              <a:rPr sz="1600" b="1" i="0">
+                <a:solidFill>
+                  <a:srgbClr val="333333"/>
+                </a:solidFill>
+                <a:latin typeface="Calibri"/>
+              </a:rPr>
+              <a:t>5.</a:t>
+            </a:r>
+            <a:r>
+              <a:rPr sz="1600" b="0" i="0">
+                <a:solidFill>
+                  <a:srgbClr val="333333"/>
+                </a:solidFill>
+                <a:latin typeface="Calibri"/>
+              </a:rPr>
+              <a:t> Paso 5: integre la politica en la seccion Escalabilidad del informe, anote la marca de replicas en el diagrama de despliegue si aplica y suba las 5 preguntas a ExamLab (modulo Talleres) antes del domingo 23:59, verificando que la politica no prometa nada que la arquitectura dibujada no pueda cumplir.</a:t>
+            </a:r>
+          </a:p>
+        </p:txBody>
+      </p:sp>
+      <p:sp>
+        <p:nvSpPr>
+          <p:cNvPr id="6" name="TextBox 5"/>
+          <p:cNvSpPr txBox="1"/>
+          <p:nvPr/>
+        </p:nvSpPr>
+        <p:spPr>
+          <a:xfrm>
+            <a:off x="11185855" y="6473952"/>
+            <a:ext cx="640080" cy="274320"/>
+          </a:xfrm>
+          <a:prstGeom prst="rect">
+            <a:avLst/>
+          </a:prstGeom>
+          <a:noFill/>
+        </p:spPr>
+        <p:txBody>
+          <a:bodyPr wrap="square">
+            <a:spAutoFit/>
+          </a:bodyPr>
+          <a:lstStyle/>
+          <a:p>
+            <a:pPr algn="r"/>
+            <a:r>
+              <a:rPr sz="1100" b="0" i="0">
+                <a:solidFill>
+                  <a:srgbClr val="666666"/>
+                </a:solidFill>
+                <a:latin typeface="Calibri"/>
+              </a:rPr>
+              <a:t>10</a:t>
+            </a:r>
+          </a:p>
+        </p:txBody>
+      </p:sp>
+    </p:spTree>
+  </p:cSld>
+  <p:clrMapOvr>
+    <a:masterClrMapping/>
+  </p:clrMapOvr>
+</p:sld>
+</file>
+
+<file path=ppt/slides/slide11.xml><?xml version="1.0" encoding="utf-8"?>
+<p:sld xmlns:a="http://schemas.openxmlformats.org/drawingml/2006/main" xmlns:p="http://schemas.openxmlformats.org/presentationml/2006/main" xmlns:r="http://schemas.openxmlformats.org/officeDocument/2006/relationships">
+  <p:cSld>
+    <p:bg>
+      <p:bgPr>
+        <a:solidFill>
+          <a:srgbClr val="FFFFFF"/>
+        </a:solidFill>
+        <a:effectLst/>
+      </p:bgPr>
+    </p:bg>
+    <p:spTree>
+      <p:nvGrpSpPr>
+        <p:cNvPr id="1" name=""/>
+        <p:cNvGrpSpPr/>
+        <p:nvPr/>
+      </p:nvGrpSpPr>
+      <p:grpSpPr/>
+      <p:sp>
+        <p:nvSpPr>
+          <p:cNvPr id="2" name="Rectangle 1"/>
+          <p:cNvSpPr/>
+          <p:nvPr/>
+        </p:nvSpPr>
+        <p:spPr>
+          <a:xfrm>
+            <a:off x="0" y="0"/>
+            <a:ext cx="12191695" cy="960120"/>
+          </a:xfrm>
+          <a:prstGeom prst="rect">
+            <a:avLst/>
+          </a:prstGeom>
+          <a:solidFill>
+            <a:srgbClr val="095292"/>
+          </a:solidFill>
+          <a:ln>
+            <a:noFill/>
+          </a:ln>
+        </p:spPr>
+        <p:style>
+          <a:lnRef idx="1">
+            <a:schemeClr val="accent1"/>
+          </a:lnRef>
+          <a:fillRef idx="3">
+            <a:schemeClr val="accent1"/>
+          </a:fillRef>
+          <a:effectRef idx="2">
+            <a:schemeClr val="accent1"/>
+          </a:effectRef>
+          <a:fontRef idx="minor">
+            <a:schemeClr val="lt1"/>
+          </a:fontRef>
+        </p:style>
+        <p:txBody>
+          <a:bodyPr rtlCol="0" anchor="ctr"/>
+          <a:lstStyle/>
+          <a:p>
+            <a:pPr algn="ctr"/>
+          </a:p>
+        </p:txBody>
+      </p:sp>
+      <p:sp>
+        <p:nvSpPr>
+          <p:cNvPr id="3" name="Rectangle 2"/>
+          <p:cNvSpPr/>
+          <p:nvPr/>
+        </p:nvSpPr>
+        <p:spPr>
+          <a:xfrm>
+            <a:off x="0" y="960120"/>
+            <a:ext cx="12191695" cy="41148"/>
+          </a:xfrm>
+          <a:prstGeom prst="rect">
+            <a:avLst/>
+          </a:prstGeom>
+          <a:solidFill>
+            <a:srgbClr val="FFD000"/>
+          </a:solidFill>
+          <a:ln>
+            <a:noFill/>
+          </a:ln>
+        </p:spPr>
+        <p:style>
+          <a:lnRef idx="1">
+            <a:schemeClr val="accent1"/>
+          </a:lnRef>
+          <a:fillRef idx="3">
+            <a:schemeClr val="accent1"/>
+          </a:fillRef>
+          <a:effectRef idx="2">
+            <a:schemeClr val="accent1"/>
+          </a:effectRef>
+          <a:fontRef idx="minor">
+            <a:schemeClr val="lt1"/>
+          </a:fontRef>
+        </p:style>
+        <p:txBody>
+          <a:bodyPr rtlCol="0" anchor="ctr"/>
+          <a:lstStyle/>
+          <a:p>
+            <a:pPr algn="ctr"/>
+          </a:p>
+        </p:txBody>
+      </p:sp>
+      <p:sp>
+        <p:nvSpPr>
+          <p:cNvPr id="4" name="TextBox 3"/>
+          <p:cNvSpPr txBox="1"/>
+          <p:nvPr/>
+        </p:nvSpPr>
+        <p:spPr>
+          <a:xfrm>
+            <a:off x="457200" y="164592"/>
+            <a:ext cx="11277295" cy="502920"/>
+          </a:xfrm>
+          <a:prstGeom prst="rect">
+            <a:avLst/>
+          </a:prstGeom>
+          <a:noFill/>
+        </p:spPr>
+        <p:txBody>
+          <a:bodyPr wrap="square">
+            <a:spAutoFit/>
+          </a:bodyPr>
+          <a:lstStyle/>
+          <a:p>
+            <a:r>
+              <a:rPr sz="2600" b="1" i="0">
+                <a:solidFill>
+                  <a:srgbClr val="FFFFFF"/>
+                </a:solidFill>
+                <a:latin typeface="Calibri"/>
+              </a:rPr>
+              <a:t>Para continuar (PI)</a:t>
+            </a:r>
+          </a:p>
+        </p:txBody>
+      </p:sp>
+      <p:sp>
+        <p:nvSpPr>
+          <p:cNvPr id="5" name="Rounded Rectangle 4"/>
+          <p:cNvSpPr/>
+          <p:nvPr/>
+        </p:nvSpPr>
+        <p:spPr>
+          <a:xfrm>
+            <a:off x="457200" y="1261872"/>
+            <a:ext cx="11277295" cy="1051560"/>
+          </a:xfrm>
+          <a:prstGeom prst="roundRect">
+            <a:avLst>
+              <a:gd name="adj" fmla="val 12000"/>
+            </a:avLst>
+          </a:prstGeom>
+          <a:solidFill>
+            <a:srgbClr val="E8F4FA"/>
+          </a:solidFill>
+          <a:ln>
+            <a:noFill/>
+          </a:ln>
+        </p:spPr>
+        <p:style>
+          <a:lnRef idx="1">
+            <a:schemeClr val="accent1"/>
+          </a:lnRef>
+          <a:fillRef idx="3">
+            <a:schemeClr val="accent1"/>
+          </a:fillRef>
+          <a:effectRef idx="2">
+            <a:schemeClr val="accent1"/>
+          </a:effectRef>
+          <a:fontRef idx="minor">
+            <a:schemeClr val="lt1"/>
+          </a:fontRef>
+        </p:style>
+        <p:txBody>
+          <a:bodyPr rtlCol="0" anchor="ctr"/>
+          <a:lstStyle/>
+          <a:p>
+            <a:pPr algn="ctr"/>
+          </a:p>
+        </p:txBody>
+      </p:sp>
+      <p:sp>
+        <p:nvSpPr>
+          <p:cNvPr id="6" name="Rectangle 5"/>
+          <p:cNvSpPr/>
+          <p:nvPr/>
+        </p:nvSpPr>
+        <p:spPr>
+          <a:xfrm>
+            <a:off x="457200" y="1261872"/>
+            <a:ext cx="128016" cy="1051560"/>
+          </a:xfrm>
+          <a:prstGeom prst="rect">
+            <a:avLst/>
+          </a:prstGeom>
+          <a:solidFill>
+            <a:srgbClr val="269CCB"/>
+          </a:solidFill>
+          <a:ln>
+            <a:noFill/>
+          </a:ln>
+        </p:spPr>
+        <p:style>
+          <a:lnRef idx="1">
+            <a:schemeClr val="accent1"/>
+          </a:lnRef>
+          <a:fillRef idx="3">
+            <a:schemeClr val="accent1"/>
+          </a:fillRef>
+          <a:effectRef idx="2">
+            <a:schemeClr val="accent1"/>
+          </a:effectRef>
+          <a:fontRef idx="minor">
+            <a:schemeClr val="lt1"/>
+          </a:fontRef>
+        </p:style>
+        <p:txBody>
+          <a:bodyPr rtlCol="0" anchor="ctr"/>
+          <a:lstStyle/>
+          <a:p>
+            <a:pPr algn="ctr"/>
+          </a:p>
+        </p:txBody>
+      </p:sp>
+      <p:sp>
+        <p:nvSpPr>
+          <p:cNvPr id="7" name="TextBox 6"/>
+          <p:cNvSpPr txBox="1"/>
+          <p:nvPr/>
+        </p:nvSpPr>
+        <p:spPr>
+          <a:xfrm>
+            <a:off x="777240" y="1399031"/>
+            <a:ext cx="10774375" cy="822959"/>
+          </a:xfrm>
+          <a:prstGeom prst="rect">
+            <a:avLst/>
+          </a:prstGeom>
+          <a:noFill/>
+        </p:spPr>
+        <p:txBody>
+          <a:bodyPr wrap="square">
+            <a:spAutoFit/>
+          </a:bodyPr>
+          <a:lstStyle/>
+          <a:p>
+            <a:r>
+              <a:rPr sz="1200" b="1" i="0">
+                <a:solidFill>
+                  <a:srgbClr val="269CCB"/>
+                </a:solidFill>
+                <a:latin typeface="Calibri"/>
+              </a:rPr>
+              <a:t>Info</a:t>
+            </a:r>
+          </a:p>
+          <a:p>
+            <a:pPr>
+              <a:spcBef>
+                <a:spcPts val="400"/>
+              </a:spcBef>
+            </a:pPr>
+            <a:r>
+              <a:rPr sz="1400" b="0" i="0">
+                <a:solidFill>
+                  <a:srgbClr val="333333"/>
+                </a:solidFill>
+                <a:latin typeface="Calibri"/>
+              </a:rPr>
+              <a:t>Entregable: Sección Escalabilidad: triggers, límites, qué escala y qué no</a:t>
+            </a:r>
+          </a:p>
+        </p:txBody>
+      </p:sp>
+      <p:sp>
+        <p:nvSpPr>
+          <p:cNvPr id="8" name="Rounded Rectangle 7"/>
+          <p:cNvSpPr/>
+          <p:nvPr/>
+        </p:nvSpPr>
+        <p:spPr>
+          <a:xfrm>
+            <a:off x="457200" y="2478024"/>
+            <a:ext cx="11277295" cy="1051560"/>
+          </a:xfrm>
+          <a:prstGeom prst="roundRect">
+            <a:avLst>
+              <a:gd name="adj" fmla="val 12000"/>
+            </a:avLst>
+          </a:prstGeom>
+          <a:solidFill>
+            <a:srgbClr val="FFF8E1"/>
+          </a:solidFill>
+          <a:ln>
+            <a:noFill/>
+          </a:ln>
+        </p:spPr>
+        <p:style>
+          <a:lnRef idx="1">
+            <a:schemeClr val="accent1"/>
+          </a:lnRef>
+          <a:fillRef idx="3">
+            <a:schemeClr val="accent1"/>
+          </a:fillRef>
+          <a:effectRef idx="2">
+            <a:schemeClr val="accent1"/>
+          </a:effectRef>
+          <a:fontRef idx="minor">
+            <a:schemeClr val="lt1"/>
+          </a:fontRef>
+        </p:style>
+        <p:txBody>
+          <a:bodyPr rtlCol="0" anchor="ctr"/>
+          <a:lstStyle/>
+          <a:p>
+            <a:pPr algn="ctr"/>
+          </a:p>
+        </p:txBody>
+      </p:sp>
+      <p:sp>
+        <p:nvSpPr>
+          <p:cNvPr id="9" name="Rectangle 8"/>
+          <p:cNvSpPr/>
+          <p:nvPr/>
+        </p:nvSpPr>
+        <p:spPr>
+          <a:xfrm>
+            <a:off x="457200" y="2478024"/>
+            <a:ext cx="128016" cy="1051560"/>
+          </a:xfrm>
+          <a:prstGeom prst="rect">
+            <a:avLst/>
+          </a:prstGeom>
+          <a:solidFill>
+            <a:srgbClr val="FFD000"/>
+          </a:solidFill>
+          <a:ln>
+            <a:noFill/>
+          </a:ln>
+        </p:spPr>
+        <p:style>
+          <a:lnRef idx="1">
+            <a:schemeClr val="accent1"/>
+          </a:lnRef>
+          <a:fillRef idx="3">
+            <a:schemeClr val="accent1"/>
+          </a:fillRef>
+          <a:effectRef idx="2">
+            <a:schemeClr val="accent1"/>
+          </a:effectRef>
+          <a:fontRef idx="minor">
+            <a:schemeClr val="lt1"/>
+          </a:fontRef>
+        </p:style>
+        <p:txBody>
+          <a:bodyPr rtlCol="0" anchor="ctr"/>
+          <a:lstStyle/>
+          <a:p>
+            <a:pPr algn="ctr"/>
+          </a:p>
+        </p:txBody>
+      </p:sp>
+      <p:sp>
+        <p:nvSpPr>
+          <p:cNvPr id="10" name="TextBox 9"/>
+          <p:cNvSpPr txBox="1"/>
+          <p:nvPr/>
+        </p:nvSpPr>
+        <p:spPr>
+          <a:xfrm>
+            <a:off x="777240" y="2615184"/>
+            <a:ext cx="10774375" cy="822959"/>
+          </a:xfrm>
+          <a:prstGeom prst="rect">
+            <a:avLst/>
+          </a:prstGeom>
+          <a:noFill/>
+        </p:spPr>
+        <p:txBody>
+          <a:bodyPr wrap="square">
+            <a:spAutoFit/>
+          </a:bodyPr>
+          <a:lstStyle/>
+          <a:p>
+            <a:r>
+              <a:rPr sz="1200" b="1" i="0">
+                <a:solidFill>
+                  <a:srgbClr val="FFD000"/>
+                </a:solidFill>
+                <a:latin typeface="Calibri"/>
+              </a:rPr>
+              <a:t>Aclaración</a:t>
+            </a:r>
+          </a:p>
+          <a:p>
+            <a:pPr>
+              <a:spcBef>
+                <a:spcPts val="400"/>
+              </a:spcBef>
+            </a:pPr>
+            <a:r>
+              <a:rPr sz="1400" b="0" i="0">
+                <a:solidFill>
+                  <a:srgbClr val="333333"/>
+                </a:solidFill>
+                <a:latin typeface="Calibri"/>
+              </a:rPr>
+              <a:t>Subir evidencias al paquete CloudLite (Drive/repo) y a ExamLab (https://uniaj.examlab.workers.dev/) domingo 23:59.</a:t>
+            </a:r>
+          </a:p>
+        </p:txBody>
+      </p:sp>
+      <p:sp>
+        <p:nvSpPr>
+          <p:cNvPr id="11" name="Rounded Rectangle 10"/>
+          <p:cNvSpPr/>
+          <p:nvPr/>
+        </p:nvSpPr>
+        <p:spPr>
+          <a:xfrm>
+            <a:off x="457200" y="3694176"/>
+            <a:ext cx="11277295" cy="1051560"/>
+          </a:xfrm>
+          <a:prstGeom prst="roundRect">
+            <a:avLst>
+              <a:gd name="adj" fmla="val 12000"/>
+            </a:avLst>
+          </a:prstGeom>
+          <a:solidFill>
+            <a:srgbClr val="FBE4E4"/>
+          </a:solidFill>
+          <a:ln>
+            <a:noFill/>
+          </a:ln>
+        </p:spPr>
+        <p:style>
+          <a:lnRef idx="1">
+            <a:schemeClr val="accent1"/>
+          </a:lnRef>
+          <a:fillRef idx="3">
+            <a:schemeClr val="accent1"/>
+          </a:fillRef>
+          <a:effectRef idx="2">
+            <a:schemeClr val="accent1"/>
+          </a:effectRef>
+          <a:fontRef idx="minor">
+            <a:schemeClr val="lt1"/>
+          </a:fontRef>
+        </p:style>
+        <p:txBody>
+          <a:bodyPr rtlCol="0" anchor="ctr"/>
+          <a:lstStyle/>
+          <a:p>
+            <a:pPr algn="ctr"/>
+          </a:p>
+        </p:txBody>
+      </p:sp>
+      <p:sp>
+        <p:nvSpPr>
+          <p:cNvPr id="12" name="Rectangle 11"/>
+          <p:cNvSpPr/>
+          <p:nvPr/>
+        </p:nvSpPr>
+        <p:spPr>
+          <a:xfrm>
+            <a:off x="457200" y="3694176"/>
+            <a:ext cx="128016" cy="1051560"/>
+          </a:xfrm>
+          <a:prstGeom prst="rect">
+            <a:avLst/>
+          </a:prstGeom>
+          <a:solidFill>
+            <a:srgbClr val="A02030"/>
+          </a:solidFill>
+          <a:ln>
+            <a:noFill/>
+          </a:ln>
+        </p:spPr>
+        <p:style>
+          <a:lnRef idx="1">
+            <a:schemeClr val="accent1"/>
+          </a:lnRef>
+          <a:fillRef idx="3">
+            <a:schemeClr val="accent1"/>
+          </a:fillRef>
+          <a:effectRef idx="2">
+            <a:schemeClr val="accent1"/>
+          </a:effectRef>
+          <a:fontRef idx="minor">
+            <a:schemeClr val="lt1"/>
+          </a:fontRef>
+        </p:style>
+        <p:txBody>
+          <a:bodyPr rtlCol="0" anchor="ctr"/>
+          <a:lstStyle/>
+          <a:p>
+            <a:pPr algn="ctr"/>
+          </a:p>
+        </p:txBody>
+      </p:sp>
+      <p:sp>
+        <p:nvSpPr>
+          <p:cNvPr id="13" name="TextBox 12"/>
+          <p:cNvSpPr txBox="1"/>
+          <p:nvPr/>
+        </p:nvSpPr>
+        <p:spPr>
+          <a:xfrm>
+            <a:off x="777240" y="3831336"/>
+            <a:ext cx="10774375" cy="822959"/>
+          </a:xfrm>
+          <a:prstGeom prst="rect">
+            <a:avLst/>
+          </a:prstGeom>
+          <a:noFill/>
+        </p:spPr>
+        <p:txBody>
+          <a:bodyPr wrap="square">
+            <a:spAutoFit/>
+          </a:bodyPr>
+          <a:lstStyle/>
+          <a:p>
+            <a:r>
+              <a:rPr sz="1200" b="1" i="0">
+                <a:solidFill>
+                  <a:srgbClr val="A02030"/>
+                </a:solidFill>
+                <a:latin typeface="Calibri"/>
+              </a:rPr>
+              <a:t>Atención</a:t>
+            </a:r>
+          </a:p>
+          <a:p>
+            <a:pPr>
+              <a:spcBef>
+                <a:spcPts val="400"/>
+              </a:spcBef>
+            </a:pPr>
+            <a:r>
+              <a:rPr sz="1400" b="0" i="0">
+                <a:solidFill>
+                  <a:srgbClr val="333333"/>
+                </a:solidFill>
+                <a:latin typeface="Calibri"/>
+              </a:rPr>
+              <a:t>Sin cloud de pago ni instalaciones obligatorias de hipervisores/Docker Desktop.</a:t>
+            </a:r>
+          </a:p>
+        </p:txBody>
+      </p:sp>
+      <p:sp>
+        <p:nvSpPr>
+          <p:cNvPr id="14" name="TextBox 13"/>
+          <p:cNvSpPr txBox="1"/>
+          <p:nvPr/>
+        </p:nvSpPr>
+        <p:spPr>
+          <a:xfrm>
+            <a:off x="11185855" y="6473952"/>
+            <a:ext cx="640080" cy="274320"/>
+          </a:xfrm>
+          <a:prstGeom prst="rect">
+            <a:avLst/>
+          </a:prstGeom>
+          <a:noFill/>
+        </p:spPr>
+        <p:txBody>
+          <a:bodyPr wrap="square">
+            <a:spAutoFit/>
+          </a:bodyPr>
+          <a:lstStyle/>
+          <a:p>
+            <a:pPr algn="r"/>
+            <a:r>
+              <a:rPr sz="1100" b="0" i="0">
+                <a:solidFill>
+                  <a:srgbClr val="666666"/>
+                </a:solidFill>
+                <a:latin typeface="Calibri"/>
+              </a:rPr>
+              <a:t>11</a:t>
+            </a:r>
+          </a:p>
+        </p:txBody>
+      </p:sp>
+    </p:spTree>
+  </p:cSld>
+  <p:clrMapOvr>
+    <a:masterClrMapping/>
+  </p:clrMapOvr>
+</p:sld>
+</file>
+
+<file path=ppt/slides/slide12.xml><?xml version="1.0" encoding="utf-8"?>
+<p:sld xmlns:a="http://schemas.openxmlformats.org/drawingml/2006/main" xmlns:p="http://schemas.openxmlformats.org/presentationml/2006/main" xmlns:r="http://schemas.openxmlformats.org/officeDocument/2006/relationships">
+  <p:cSld>
+    <p:bg>
+      <p:bgPr>
+        <a:solidFill>
+          <a:srgbClr val="FFFFFF"/>
+        </a:solidFill>
+        <a:effectLst/>
+      </p:bgPr>
+    </p:bg>
+    <p:spTree>
+      <p:nvGrpSpPr>
+        <p:cNvPr id="1" name=""/>
+        <p:cNvGrpSpPr/>
+        <p:nvPr/>
+      </p:nvGrpSpPr>
+      <p:grpSpPr/>
+      <p:sp>
+        <p:nvSpPr>
+          <p:cNvPr id="2" name="Rectangle 1"/>
+          <p:cNvSpPr/>
+          <p:nvPr/>
+        </p:nvSpPr>
+        <p:spPr>
+          <a:xfrm>
+            <a:off x="0" y="0"/>
             <a:ext cx="12191695" cy="164592"/>
           </a:xfrm>
           <a:prstGeom prst="rect">
@@ -5538,7 +6500,7 @@
         <p:spPr>
           <a:xfrm>
             <a:off x="0" y="0"/>
-            <a:ext cx="12191695" cy="960120"/>
+            <a:ext cx="12191695" cy="1170432"/>
           </a:xfrm>
           <a:prstGeom prst="rect">
             <a:avLst/>
@@ -5580,7 +6542,7 @@
         </p:nvSpPr>
         <p:spPr>
           <a:xfrm>
-            <a:off x="0" y="960120"/>
+            <a:off x="0" y="1170432"/>
             <a:ext cx="12191695" cy="41148"/>
           </a:xfrm>
           <a:prstGeom prst="rect">
@@ -5624,7 +6586,7 @@
         <p:spPr>
           <a:xfrm>
             <a:off x="457200" y="164592"/>
-            <a:ext cx="11277295" cy="502920"/>
+            <a:ext cx="11277295" cy="384048"/>
           </a:xfrm>
           <a:prstGeom prst="rect">
             <a:avLst/>
@@ -5644,7 +6606,7 @@
                 </a:solidFill>
                 <a:latin typeface="Calibri"/>
               </a:rPr>
-              <a:t>Taller PI (paso a paso)</a:t>
+              <a:t>Herramientas de hoy</a:t>
             </a:r>
           </a:p>
         </p:txBody>
@@ -5657,8 +6619,8 @@
         </p:nvSpPr>
         <p:spPr>
           <a:xfrm>
-            <a:off x="457200" y="1170432"/>
-            <a:ext cx="11277295" cy="5230368"/>
+            <a:off x="457200" y="566928"/>
+            <a:ext cx="11277295" cy="411480"/>
           </a:xfrm>
           <a:prstGeom prst="rect">
             <a:avLst/>
@@ -5671,171 +6633,837 @@
           </a:bodyPr>
           <a:lstStyle/>
           <a:p>
-            <a:pPr>
-              <a:spcAft>
-                <a:spcPts val="800"/>
-              </a:spcAft>
+            <a:r>
+              <a:rPr sz="1400" b="0" i="0">
+                <a:solidFill>
+                  <a:srgbClr val="B8D8EE"/>
+                </a:solidFill>
+                <a:latin typeface="Calibri"/>
+              </a:rPr>
+              <a:t>Gratis · navegador o free tier · sin cuenta de pago</a:t>
+            </a:r>
+          </a:p>
+        </p:txBody>
+      </p:sp>
+      <p:sp>
+        <p:nvSpPr>
+          <p:cNvPr id="6" name="Rounded Rectangle 5"/>
+          <p:cNvSpPr/>
+          <p:nvPr/>
+        </p:nvSpPr>
+        <p:spPr>
+          <a:xfrm>
+            <a:off x="457200" y="1591056"/>
+            <a:ext cx="3624986" cy="2299716"/>
+          </a:xfrm>
+          <a:prstGeom prst="roundRect">
+            <a:avLst>
+              <a:gd name="adj" fmla="val 12000"/>
+            </a:avLst>
+          </a:prstGeom>
+          <a:solidFill>
+            <a:srgbClr val="F2F2F2"/>
+          </a:solidFill>
+          <a:ln>
+            <a:noFill/>
+          </a:ln>
+        </p:spPr>
+        <p:style>
+          <a:lnRef idx="1">
+            <a:schemeClr val="accent1"/>
+          </a:lnRef>
+          <a:fillRef idx="3">
+            <a:schemeClr val="accent1"/>
+          </a:fillRef>
+          <a:effectRef idx="2">
+            <a:schemeClr val="accent1"/>
+          </a:effectRef>
+          <a:fontRef idx="minor">
+            <a:schemeClr val="lt1"/>
+          </a:fontRef>
+        </p:style>
+        <p:txBody>
+          <a:bodyPr rtlCol="0" anchor="ctr"/>
+          <a:lstStyle/>
+          <a:p>
+            <a:pPr algn="ctr"/>
+          </a:p>
+        </p:txBody>
+      </p:sp>
+      <p:sp>
+        <p:nvSpPr>
+          <p:cNvPr id="7" name="Rectangle 6"/>
+          <p:cNvSpPr/>
+          <p:nvPr/>
+        </p:nvSpPr>
+        <p:spPr>
+          <a:xfrm>
+            <a:off x="457200" y="1591056"/>
+            <a:ext cx="3624986" cy="64008"/>
+          </a:xfrm>
+          <a:prstGeom prst="rect">
+            <a:avLst/>
+          </a:prstGeom>
+          <a:solidFill>
+            <a:srgbClr val="095292"/>
+          </a:solidFill>
+          <a:ln>
+            <a:noFill/>
+          </a:ln>
+        </p:spPr>
+        <p:style>
+          <a:lnRef idx="1">
+            <a:schemeClr val="accent1"/>
+          </a:lnRef>
+          <a:fillRef idx="3">
+            <a:schemeClr val="accent1"/>
+          </a:fillRef>
+          <a:effectRef idx="2">
+            <a:schemeClr val="accent1"/>
+          </a:effectRef>
+          <a:fontRef idx="minor">
+            <a:schemeClr val="lt1"/>
+          </a:fontRef>
+        </p:style>
+        <p:txBody>
+          <a:bodyPr rtlCol="0" anchor="ctr"/>
+          <a:lstStyle/>
+          <a:p>
+            <a:pPr algn="ctr"/>
+          </a:p>
+        </p:txBody>
+      </p:sp>
+      <p:sp>
+        <p:nvSpPr>
+          <p:cNvPr id="8" name="Rectangle 7"/>
+          <p:cNvSpPr/>
+          <p:nvPr/>
+        </p:nvSpPr>
+        <p:spPr>
+          <a:xfrm>
+            <a:off x="457200" y="1655064"/>
+            <a:ext cx="3624986" cy="27432"/>
+          </a:xfrm>
+          <a:prstGeom prst="rect">
+            <a:avLst/>
+          </a:prstGeom>
+          <a:solidFill>
+            <a:srgbClr val="FFD000"/>
+          </a:solidFill>
+          <a:ln>
+            <a:noFill/>
+          </a:ln>
+        </p:spPr>
+        <p:style>
+          <a:lnRef idx="1">
+            <a:schemeClr val="accent1"/>
+          </a:lnRef>
+          <a:fillRef idx="3">
+            <a:schemeClr val="accent1"/>
+          </a:fillRef>
+          <a:effectRef idx="2">
+            <a:schemeClr val="accent1"/>
+          </a:effectRef>
+          <a:fontRef idx="minor">
+            <a:schemeClr val="lt1"/>
+          </a:fontRef>
+        </p:style>
+        <p:txBody>
+          <a:bodyPr rtlCol="0" anchor="ctr"/>
+          <a:lstStyle/>
+          <a:p>
+            <a:pPr algn="ctr"/>
+          </a:p>
+        </p:txBody>
+      </p:sp>
+      <p:pic>
+        <p:nvPicPr>
+          <p:cNvPr id="9" name="Picture 8" descr="google_docs.png"/>
+          <p:cNvPicPr>
+            <a:picLocks noChangeAspect="1"/>
+          </p:cNvPicPr>
+          <p:nvPr/>
+        </p:nvPicPr>
+        <p:blipFill>
+          <a:blip r:embed="rId2"/>
+          <a:stretch>
+            <a:fillRect/>
+          </a:stretch>
+        </p:blipFill>
+        <p:spPr>
+          <a:xfrm>
+            <a:off x="1659331" y="1847087"/>
+            <a:ext cx="1220724" cy="1220724"/>
+          </a:xfrm>
+          <a:prstGeom prst="rect">
+            <a:avLst/>
+          </a:prstGeom>
+        </p:spPr>
+      </p:pic>
+      <p:sp>
+        <p:nvSpPr>
+          <p:cNvPr id="10" name="TextBox 9"/>
+          <p:cNvSpPr txBox="1"/>
+          <p:nvPr/>
+        </p:nvSpPr>
+        <p:spPr>
+          <a:xfrm>
+            <a:off x="530352" y="3159251"/>
+            <a:ext cx="3478682" cy="621792"/>
+          </a:xfrm>
+          <a:prstGeom prst="rect">
+            <a:avLst/>
+          </a:prstGeom>
+          <a:noFill/>
+        </p:spPr>
+        <p:txBody>
+          <a:bodyPr wrap="square" anchor="t"/>
+          <a:lstStyle/>
+          <a:p>
+            <a:pPr algn="ctr"/>
+            <a:r>
+              <a:rPr sz="1300" b="1" i="0">
+                <a:solidFill>
+                  <a:srgbClr val="095292"/>
+                </a:solidFill>
+                <a:latin typeface="Calibri"/>
+              </a:rPr>
+              <a:t>Google Docs</a:t>
+            </a:r>
+          </a:p>
+          <a:p>
+            <a:pPr algn="ctr">
+              <a:spcBef>
+                <a:spcPts val="200"/>
+              </a:spcBef>
             </a:pPr>
             <a:r>
-              <a:rPr sz="1600" b="1" i="0">
-                <a:solidFill>
-                  <a:srgbClr val="333333"/>
-                </a:solidFill>
-                <a:latin typeface="Calibri"/>
-              </a:rPr>
-              <a:t>1.</a:t>
-            </a:r>
-            <a:r>
-              <a:rPr sz="1600" b="0" i="0">
-                <a:solidFill>
-                  <a:srgbClr val="333333"/>
-                </a:solidFill>
-                <a:latin typeface="Calibri"/>
-              </a:rPr>
-              <a:t> Paso 1: tome los 5 componentes de su C4Deployment de la Clase 7 y clasifique cada uno como escala horizontal, escala vertical o no escala, verificando que al menos uno quede en no escala con justificacion tecnica, porque una politica donde todo escala no es una politica; el resultado abre la seccion Escalabilidad del informe.</a:t>
-            </a:r>
-          </a:p>
-          <a:p>
-            <a:pPr>
-              <a:spcAft>
-                <a:spcPts val="800"/>
-              </a:spcAft>
+              <a:rPr sz="1000" b="0" i="0">
+                <a:solidFill>
+                  <a:srgbClr val="666666"/>
+                </a:solidFill>
+                <a:latin typeface="Calibri"/>
+              </a:rPr>
+              <a:t>Politica de escalado</a:t>
+            </a:r>
+          </a:p>
+        </p:txBody>
+      </p:sp>
+      <p:sp>
+        <p:nvSpPr>
+          <p:cNvPr id="11" name="Rounded Rectangle 10"/>
+          <p:cNvSpPr/>
+          <p:nvPr/>
+        </p:nvSpPr>
+        <p:spPr>
+          <a:xfrm>
+            <a:off x="4283354" y="1591056"/>
+            <a:ext cx="3624986" cy="2299716"/>
+          </a:xfrm>
+          <a:prstGeom prst="roundRect">
+            <a:avLst>
+              <a:gd name="adj" fmla="val 12000"/>
+            </a:avLst>
+          </a:prstGeom>
+          <a:solidFill>
+            <a:srgbClr val="F2F2F2"/>
+          </a:solidFill>
+          <a:ln>
+            <a:noFill/>
+          </a:ln>
+        </p:spPr>
+        <p:style>
+          <a:lnRef idx="1">
+            <a:schemeClr val="accent1"/>
+          </a:lnRef>
+          <a:fillRef idx="3">
+            <a:schemeClr val="accent1"/>
+          </a:fillRef>
+          <a:effectRef idx="2">
+            <a:schemeClr val="accent1"/>
+          </a:effectRef>
+          <a:fontRef idx="minor">
+            <a:schemeClr val="lt1"/>
+          </a:fontRef>
+        </p:style>
+        <p:txBody>
+          <a:bodyPr rtlCol="0" anchor="ctr"/>
+          <a:lstStyle/>
+          <a:p>
+            <a:pPr algn="ctr"/>
+          </a:p>
+        </p:txBody>
+      </p:sp>
+      <p:sp>
+        <p:nvSpPr>
+          <p:cNvPr id="12" name="Rectangle 11"/>
+          <p:cNvSpPr/>
+          <p:nvPr/>
+        </p:nvSpPr>
+        <p:spPr>
+          <a:xfrm>
+            <a:off x="4283354" y="1591056"/>
+            <a:ext cx="3624986" cy="64008"/>
+          </a:xfrm>
+          <a:prstGeom prst="rect">
+            <a:avLst/>
+          </a:prstGeom>
+          <a:solidFill>
+            <a:srgbClr val="095292"/>
+          </a:solidFill>
+          <a:ln>
+            <a:noFill/>
+          </a:ln>
+        </p:spPr>
+        <p:style>
+          <a:lnRef idx="1">
+            <a:schemeClr val="accent1"/>
+          </a:lnRef>
+          <a:fillRef idx="3">
+            <a:schemeClr val="accent1"/>
+          </a:fillRef>
+          <a:effectRef idx="2">
+            <a:schemeClr val="accent1"/>
+          </a:effectRef>
+          <a:fontRef idx="minor">
+            <a:schemeClr val="lt1"/>
+          </a:fontRef>
+        </p:style>
+        <p:txBody>
+          <a:bodyPr rtlCol="0" anchor="ctr"/>
+          <a:lstStyle/>
+          <a:p>
+            <a:pPr algn="ctr"/>
+          </a:p>
+        </p:txBody>
+      </p:sp>
+      <p:sp>
+        <p:nvSpPr>
+          <p:cNvPr id="13" name="Rectangle 12"/>
+          <p:cNvSpPr/>
+          <p:nvPr/>
+        </p:nvSpPr>
+        <p:spPr>
+          <a:xfrm>
+            <a:off x="4283354" y="1655064"/>
+            <a:ext cx="3624986" cy="27432"/>
+          </a:xfrm>
+          <a:prstGeom prst="rect">
+            <a:avLst/>
+          </a:prstGeom>
+          <a:solidFill>
+            <a:srgbClr val="FFD000"/>
+          </a:solidFill>
+          <a:ln>
+            <a:noFill/>
+          </a:ln>
+        </p:spPr>
+        <p:style>
+          <a:lnRef idx="1">
+            <a:schemeClr val="accent1"/>
+          </a:lnRef>
+          <a:fillRef idx="3">
+            <a:schemeClr val="accent1"/>
+          </a:fillRef>
+          <a:effectRef idx="2">
+            <a:schemeClr val="accent1"/>
+          </a:effectRef>
+          <a:fontRef idx="minor">
+            <a:schemeClr val="lt1"/>
+          </a:fontRef>
+        </p:style>
+        <p:txBody>
+          <a:bodyPr rtlCol="0" anchor="ctr"/>
+          <a:lstStyle/>
+          <a:p>
+            <a:pPr algn="ctr"/>
+          </a:p>
+        </p:txBody>
+      </p:sp>
+      <p:pic>
+        <p:nvPicPr>
+          <p:cNvPr id="14" name="Picture 13" descr="drawio.png"/>
+          <p:cNvPicPr>
+            <a:picLocks noChangeAspect="1"/>
+          </p:cNvPicPr>
+          <p:nvPr/>
+        </p:nvPicPr>
+        <p:blipFill>
+          <a:blip r:embed="rId3"/>
+          <a:stretch>
+            <a:fillRect/>
+          </a:stretch>
+        </p:blipFill>
+        <p:spPr>
+          <a:xfrm>
+            <a:off x="5485485" y="1847087"/>
+            <a:ext cx="1220724" cy="1220724"/>
+          </a:xfrm>
+          <a:prstGeom prst="rect">
+            <a:avLst/>
+          </a:prstGeom>
+        </p:spPr>
+      </p:pic>
+      <p:sp>
+        <p:nvSpPr>
+          <p:cNvPr id="15" name="TextBox 14"/>
+          <p:cNvSpPr txBox="1"/>
+          <p:nvPr/>
+        </p:nvSpPr>
+        <p:spPr>
+          <a:xfrm>
+            <a:off x="4356506" y="3159251"/>
+            <a:ext cx="3478682" cy="621792"/>
+          </a:xfrm>
+          <a:prstGeom prst="rect">
+            <a:avLst/>
+          </a:prstGeom>
+          <a:noFill/>
+        </p:spPr>
+        <p:txBody>
+          <a:bodyPr wrap="square" anchor="t"/>
+          <a:lstStyle/>
+          <a:p>
+            <a:pPr algn="ctr"/>
+            <a:r>
+              <a:rPr sz="1300" b="1" i="0">
+                <a:solidFill>
+                  <a:srgbClr val="095292"/>
+                </a:solidFill>
+                <a:latin typeface="Calibri"/>
+              </a:rPr>
+              <a:t>draw.io</a:t>
+            </a:r>
+          </a:p>
+          <a:p>
+            <a:pPr algn="ctr">
+              <a:spcBef>
+                <a:spcPts val="200"/>
+              </a:spcBef>
             </a:pPr>
             <a:r>
-              <a:rPr sz="1600" b="0" i="0">
-                <a:solidFill>
-                  <a:srgbClr val="333333"/>
-                </a:solidFill>
-                <a:latin typeface="Calibri"/>
-              </a:rPr>
-              <a:t>–   </a:t>
-            </a:r>
-            <a:r>
-              <a:rPr sz="1600" b="1" i="0">
-                <a:solidFill>
-                  <a:srgbClr val="333333"/>
-                </a:solidFill>
-                <a:latin typeface="Calibri"/>
-              </a:rPr>
-              <a:t>2.</a:t>
-            </a:r>
-            <a:r>
-              <a:rPr sz="1600" b="0" i="0">
-                <a:solidFill>
-                  <a:srgbClr val="333333"/>
-                </a:solidFill>
-                <a:latin typeface="Calibri"/>
-              </a:rPr>
-              <a:t> Paso 2: complete la tabla de politica de escalado con 6 columnas y 5 filas (componente, tipo de escala, disparador de subida, disparador de bajada, minimo y maximo, tiempo de enfriamiento), verificando que cada disparador tenga metrica, umbral numerico y ventana de tiempo, y que ningun maximo quede en infinito o sin definir.</a:t>
-            </a:r>
-          </a:p>
-          <a:p>
-            <a:pPr>
-              <a:spcAft>
-                <a:spcPts val="800"/>
-              </a:spcAft>
+              <a:rPr sz="1000" b="0" i="0">
+                <a:solidFill>
+                  <a:srgbClr val="666666"/>
+                </a:solidFill>
+                <a:latin typeface="Calibri"/>
+              </a:rPr>
+              <a:t>Nota en Deployment</a:t>
+            </a:r>
+          </a:p>
+        </p:txBody>
+      </p:sp>
+      <p:sp>
+        <p:nvSpPr>
+          <p:cNvPr id="16" name="Rounded Rectangle 15"/>
+          <p:cNvSpPr/>
+          <p:nvPr/>
+        </p:nvSpPr>
+        <p:spPr>
+          <a:xfrm>
+            <a:off x="8109508" y="1591056"/>
+            <a:ext cx="3624986" cy="2299716"/>
+          </a:xfrm>
+          <a:prstGeom prst="roundRect">
+            <a:avLst>
+              <a:gd name="adj" fmla="val 12000"/>
+            </a:avLst>
+          </a:prstGeom>
+          <a:solidFill>
+            <a:srgbClr val="F2F2F2"/>
+          </a:solidFill>
+          <a:ln>
+            <a:noFill/>
+          </a:ln>
+        </p:spPr>
+        <p:style>
+          <a:lnRef idx="1">
+            <a:schemeClr val="accent1"/>
+          </a:lnRef>
+          <a:fillRef idx="3">
+            <a:schemeClr val="accent1"/>
+          </a:fillRef>
+          <a:effectRef idx="2">
+            <a:schemeClr val="accent1"/>
+          </a:effectRef>
+          <a:fontRef idx="minor">
+            <a:schemeClr val="lt1"/>
+          </a:fontRef>
+        </p:style>
+        <p:txBody>
+          <a:bodyPr rtlCol="0" anchor="ctr"/>
+          <a:lstStyle/>
+          <a:p>
+            <a:pPr algn="ctr"/>
+          </a:p>
+        </p:txBody>
+      </p:sp>
+      <p:sp>
+        <p:nvSpPr>
+          <p:cNvPr id="17" name="Rectangle 16"/>
+          <p:cNvSpPr/>
+          <p:nvPr/>
+        </p:nvSpPr>
+        <p:spPr>
+          <a:xfrm>
+            <a:off x="8109508" y="1591056"/>
+            <a:ext cx="3624986" cy="64008"/>
+          </a:xfrm>
+          <a:prstGeom prst="rect">
+            <a:avLst/>
+          </a:prstGeom>
+          <a:solidFill>
+            <a:srgbClr val="095292"/>
+          </a:solidFill>
+          <a:ln>
+            <a:noFill/>
+          </a:ln>
+        </p:spPr>
+        <p:style>
+          <a:lnRef idx="1">
+            <a:schemeClr val="accent1"/>
+          </a:lnRef>
+          <a:fillRef idx="3">
+            <a:schemeClr val="accent1"/>
+          </a:fillRef>
+          <a:effectRef idx="2">
+            <a:schemeClr val="accent1"/>
+          </a:effectRef>
+          <a:fontRef idx="minor">
+            <a:schemeClr val="lt1"/>
+          </a:fontRef>
+        </p:style>
+        <p:txBody>
+          <a:bodyPr rtlCol="0" anchor="ctr"/>
+          <a:lstStyle/>
+          <a:p>
+            <a:pPr algn="ctr"/>
+          </a:p>
+        </p:txBody>
+      </p:sp>
+      <p:sp>
+        <p:nvSpPr>
+          <p:cNvPr id="18" name="Rectangle 17"/>
+          <p:cNvSpPr/>
+          <p:nvPr/>
+        </p:nvSpPr>
+        <p:spPr>
+          <a:xfrm>
+            <a:off x="8109508" y="1655064"/>
+            <a:ext cx="3624986" cy="27432"/>
+          </a:xfrm>
+          <a:prstGeom prst="rect">
+            <a:avLst/>
+          </a:prstGeom>
+          <a:solidFill>
+            <a:srgbClr val="FFD000"/>
+          </a:solidFill>
+          <a:ln>
+            <a:noFill/>
+          </a:ln>
+        </p:spPr>
+        <p:style>
+          <a:lnRef idx="1">
+            <a:schemeClr val="accent1"/>
+          </a:lnRef>
+          <a:fillRef idx="3">
+            <a:schemeClr val="accent1"/>
+          </a:fillRef>
+          <a:effectRef idx="2">
+            <a:schemeClr val="accent1"/>
+          </a:effectRef>
+          <a:fontRef idx="minor">
+            <a:schemeClr val="lt1"/>
+          </a:fontRef>
+        </p:style>
+        <p:txBody>
+          <a:bodyPr rtlCol="0" anchor="ctr"/>
+          <a:lstStyle/>
+          <a:p>
+            <a:pPr algn="ctr"/>
+          </a:p>
+        </p:txBody>
+      </p:sp>
+      <p:pic>
+        <p:nvPicPr>
+          <p:cNvPr id="19" name="Picture 18" descr="mermaid.png"/>
+          <p:cNvPicPr>
+            <a:picLocks noChangeAspect="1"/>
+          </p:cNvPicPr>
+          <p:nvPr/>
+        </p:nvPicPr>
+        <p:blipFill>
+          <a:blip r:embed="rId4"/>
+          <a:stretch>
+            <a:fillRect/>
+          </a:stretch>
+        </p:blipFill>
+        <p:spPr>
+          <a:xfrm>
+            <a:off x="9311640" y="1847087"/>
+            <a:ext cx="1220724" cy="1220724"/>
+          </a:xfrm>
+          <a:prstGeom prst="rect">
+            <a:avLst/>
+          </a:prstGeom>
+        </p:spPr>
+      </p:pic>
+      <p:sp>
+        <p:nvSpPr>
+          <p:cNvPr id="20" name="TextBox 19"/>
+          <p:cNvSpPr txBox="1"/>
+          <p:nvPr/>
+        </p:nvSpPr>
+        <p:spPr>
+          <a:xfrm>
+            <a:off x="8182660" y="3159251"/>
+            <a:ext cx="3478682" cy="621792"/>
+          </a:xfrm>
+          <a:prstGeom prst="rect">
+            <a:avLst/>
+          </a:prstGeom>
+          <a:noFill/>
+        </p:spPr>
+        <p:txBody>
+          <a:bodyPr wrap="square" anchor="t"/>
+          <a:lstStyle/>
+          <a:p>
+            <a:pPr algn="ctr"/>
+            <a:r>
+              <a:rPr sz="1300" b="1" i="0">
+                <a:solidFill>
+                  <a:srgbClr val="095292"/>
+                </a:solidFill>
+                <a:latin typeface="Calibri"/>
+              </a:rPr>
+              <a:t>Mermaid</a:t>
+            </a:r>
+          </a:p>
+          <a:p>
+            <a:pPr algn="ctr">
+              <a:spcBef>
+                <a:spcPts val="200"/>
+              </a:spcBef>
             </a:pPr>
             <a:r>
-              <a:rPr sz="1600" b="0" i="0">
-                <a:solidFill>
-                  <a:srgbClr val="333333"/>
-                </a:solidFill>
-                <a:latin typeface="Calibri"/>
-              </a:rPr>
-              <a:t>–   </a:t>
-            </a:r>
-            <a:r>
-              <a:rPr sz="1600" b="1" i="0">
-                <a:solidFill>
-                  <a:srgbClr val="333333"/>
-                </a:solidFill>
-                <a:latin typeface="Calibri"/>
-              </a:rPr>
-              <a:t>3.</a:t>
-            </a:r>
-            <a:r>
-              <a:rPr sz="1600" b="0" i="0">
-                <a:solidFill>
-                  <a:srgbClr val="333333"/>
-                </a:solidFill>
-                <a:latin typeface="Calibri"/>
-              </a:rPr>
-              <a:t> Paso 3: escriba en ExamLab el diagrama Mermaid de la maquina de decision del autoescalado con el nodo de observacion, los dos rombos de decision, las acciones de subida y bajada, el enfriamiento y el nodo de lo que no escala, verificando al renderizar que el ciclo se cierre sobre el nodo de observacion y que los umbrales del diagrama sean los mismos numeros de la tabla.</a:t>
-            </a:r>
-          </a:p>
-          <a:p>
-            <a:pPr>
-              <a:spcAft>
-                <a:spcPts val="800"/>
-              </a:spcAft>
+              <a:rPr sz="1000" b="0" i="0">
+                <a:solidFill>
+                  <a:srgbClr val="666666"/>
+                </a:solidFill>
+                <a:latin typeface="Calibri"/>
+              </a:rPr>
+              <a:t>Codigo del diagrama</a:t>
+            </a:r>
+          </a:p>
+        </p:txBody>
+      </p:sp>
+      <p:sp>
+        <p:nvSpPr>
+          <p:cNvPr id="21" name="Rounded Rectangle 20"/>
+          <p:cNvSpPr/>
+          <p:nvPr/>
+        </p:nvSpPr>
+        <p:spPr>
+          <a:xfrm>
+            <a:off x="4283354" y="4055364"/>
+            <a:ext cx="3624986" cy="2299716"/>
+          </a:xfrm>
+          <a:prstGeom prst="roundRect">
+            <a:avLst>
+              <a:gd name="adj" fmla="val 12000"/>
+            </a:avLst>
+          </a:prstGeom>
+          <a:solidFill>
+            <a:srgbClr val="F2F2F2"/>
+          </a:solidFill>
+          <a:ln>
+            <a:noFill/>
+          </a:ln>
+        </p:spPr>
+        <p:style>
+          <a:lnRef idx="1">
+            <a:schemeClr val="accent1"/>
+          </a:lnRef>
+          <a:fillRef idx="3">
+            <a:schemeClr val="accent1"/>
+          </a:fillRef>
+          <a:effectRef idx="2">
+            <a:schemeClr val="accent1"/>
+          </a:effectRef>
+          <a:fontRef idx="minor">
+            <a:schemeClr val="lt1"/>
+          </a:fontRef>
+        </p:style>
+        <p:txBody>
+          <a:bodyPr rtlCol="0" anchor="ctr"/>
+          <a:lstStyle/>
+          <a:p>
+            <a:pPr algn="ctr"/>
+          </a:p>
+        </p:txBody>
+      </p:sp>
+      <p:sp>
+        <p:nvSpPr>
+          <p:cNvPr id="22" name="Rectangle 21"/>
+          <p:cNvSpPr/>
+          <p:nvPr/>
+        </p:nvSpPr>
+        <p:spPr>
+          <a:xfrm>
+            <a:off x="4283354" y="4055364"/>
+            <a:ext cx="3624986" cy="64008"/>
+          </a:xfrm>
+          <a:prstGeom prst="rect">
+            <a:avLst/>
+          </a:prstGeom>
+          <a:solidFill>
+            <a:srgbClr val="095292"/>
+          </a:solidFill>
+          <a:ln>
+            <a:noFill/>
+          </a:ln>
+        </p:spPr>
+        <p:style>
+          <a:lnRef idx="1">
+            <a:schemeClr val="accent1"/>
+          </a:lnRef>
+          <a:fillRef idx="3">
+            <a:schemeClr val="accent1"/>
+          </a:fillRef>
+          <a:effectRef idx="2">
+            <a:schemeClr val="accent1"/>
+          </a:effectRef>
+          <a:fontRef idx="minor">
+            <a:schemeClr val="lt1"/>
+          </a:fontRef>
+        </p:style>
+        <p:txBody>
+          <a:bodyPr rtlCol="0" anchor="ctr"/>
+          <a:lstStyle/>
+          <a:p>
+            <a:pPr algn="ctr"/>
+          </a:p>
+        </p:txBody>
+      </p:sp>
+      <p:sp>
+        <p:nvSpPr>
+          <p:cNvPr id="23" name="Rectangle 22"/>
+          <p:cNvSpPr/>
+          <p:nvPr/>
+        </p:nvSpPr>
+        <p:spPr>
+          <a:xfrm>
+            <a:off x="4283354" y="4119372"/>
+            <a:ext cx="3624986" cy="27432"/>
+          </a:xfrm>
+          <a:prstGeom prst="rect">
+            <a:avLst/>
+          </a:prstGeom>
+          <a:solidFill>
+            <a:srgbClr val="FFD000"/>
+          </a:solidFill>
+          <a:ln>
+            <a:noFill/>
+          </a:ln>
+        </p:spPr>
+        <p:style>
+          <a:lnRef idx="1">
+            <a:schemeClr val="accent1"/>
+          </a:lnRef>
+          <a:fillRef idx="3">
+            <a:schemeClr val="accent1"/>
+          </a:fillRef>
+          <a:effectRef idx="2">
+            <a:schemeClr val="accent1"/>
+          </a:effectRef>
+          <a:fontRef idx="minor">
+            <a:schemeClr val="lt1"/>
+          </a:fontRef>
+        </p:style>
+        <p:txBody>
+          <a:bodyPr rtlCol="0" anchor="ctr"/>
+          <a:lstStyle/>
+          <a:p>
+            <a:pPr algn="ctr"/>
+          </a:p>
+        </p:txBody>
+      </p:sp>
+      <p:pic>
+        <p:nvPicPr>
+          <p:cNvPr id="24" name="Picture 23" descr="examlab.png"/>
+          <p:cNvPicPr>
+            <a:picLocks noChangeAspect="1"/>
+          </p:cNvPicPr>
+          <p:nvPr/>
+        </p:nvPicPr>
+        <p:blipFill>
+          <a:blip r:embed="rId5"/>
+          <a:stretch>
+            <a:fillRect/>
+          </a:stretch>
+        </p:blipFill>
+        <p:spPr>
+          <a:xfrm>
+            <a:off x="5485485" y="4311396"/>
+            <a:ext cx="1220724" cy="1220724"/>
+          </a:xfrm>
+          <a:prstGeom prst="rect">
+            <a:avLst/>
+          </a:prstGeom>
+        </p:spPr>
+      </p:pic>
+      <p:sp>
+        <p:nvSpPr>
+          <p:cNvPr id="25" name="TextBox 24"/>
+          <p:cNvSpPr txBox="1"/>
+          <p:nvPr/>
+        </p:nvSpPr>
+        <p:spPr>
+          <a:xfrm>
+            <a:off x="4356506" y="5623560"/>
+            <a:ext cx="3478682" cy="621792"/>
+          </a:xfrm>
+          <a:prstGeom prst="rect">
+            <a:avLst/>
+          </a:prstGeom>
+          <a:noFill/>
+        </p:spPr>
+        <p:txBody>
+          <a:bodyPr wrap="square" anchor="t"/>
+          <a:lstStyle/>
+          <a:p>
+            <a:pPr algn="ctr"/>
+            <a:r>
+              <a:rPr sz="1300" b="1" i="0">
+                <a:solidFill>
+                  <a:srgbClr val="095292"/>
+                </a:solidFill>
+                <a:latin typeface="Calibri"/>
+              </a:rPr>
+              <a:t>ExamLab</a:t>
+            </a:r>
+          </a:p>
+          <a:p>
+            <a:pPr algn="ctr">
+              <a:spcBef>
+                <a:spcPts val="200"/>
+              </a:spcBef>
             </a:pPr>
             <a:r>
-              <a:rPr sz="1600" b="0" i="0">
-                <a:solidFill>
-                  <a:srgbClr val="333333"/>
-                </a:solidFill>
-                <a:latin typeface="Calibri"/>
-              </a:rPr>
-              <a:t>–   </a:t>
-            </a:r>
-            <a:r>
-              <a:rPr sz="1600" b="1" i="0">
-                <a:solidFill>
-                  <a:srgbClr val="333333"/>
-                </a:solidFill>
-                <a:latin typeface="Calibri"/>
-              </a:rPr>
-              <a:t>4.</a:t>
-            </a:r>
-            <a:r>
-              <a:rPr sz="1600" b="0" i="0">
-                <a:solidFill>
-                  <a:srgbClr val="333333"/>
-                </a:solidFill>
-                <a:latin typeface="Calibri"/>
-              </a:rPr>
-              <a:t> Paso 4: escriba los 3 componentes que NO escalan con su justificacion tecnica y su plan alterno, y la tabla de impacto en costos que enlaza con la Clase 10, verificando que cada plan alterno sea ejecutable sin cloud de pago y que el impacto de costo use los mismos niveles bajo, medio o alto de la seccion de costos.</a:t>
-            </a:r>
-          </a:p>
-          <a:p>
-            <a:pPr>
-              <a:spcAft>
-                <a:spcPts val="800"/>
-              </a:spcAft>
-            </a:pPr>
-            <a:r>
-              <a:rPr sz="1600" b="0" i="0">
-                <a:solidFill>
-                  <a:srgbClr val="333333"/>
-                </a:solidFill>
-                <a:latin typeface="Calibri"/>
-              </a:rPr>
-              <a:t>–   </a:t>
-            </a:r>
-            <a:r>
-              <a:rPr sz="1600" b="1" i="0">
-                <a:solidFill>
-                  <a:srgbClr val="333333"/>
-                </a:solidFill>
-                <a:latin typeface="Calibri"/>
-              </a:rPr>
-              <a:t>5.</a:t>
-            </a:r>
-            <a:r>
-              <a:rPr sz="1600" b="0" i="0">
-                <a:solidFill>
-                  <a:srgbClr val="333333"/>
-                </a:solidFill>
-                <a:latin typeface="Calibri"/>
-              </a:rPr>
-              <a:t> Paso 5: integre la politica en la seccion Escalabilidad del informe, anote la marca de replicas en el diagrama de despliegue si aplica y suba las 5 preguntas a ExamLab (modulo Talleres) antes del domingo 23:59, verificando que la politica no prometa nada que la arquitectura dibujada no pueda cumplir.</a:t>
-            </a:r>
-          </a:p>
-        </p:txBody>
-      </p:sp>
-      <p:sp>
-        <p:nvSpPr>
-          <p:cNvPr id="6" name="TextBox 5"/>
+              <a:rPr sz="1000" b="0" i="0">
+                <a:solidFill>
+                  <a:srgbClr val="666666"/>
+                </a:solidFill>
+                <a:latin typeface="Calibri"/>
+              </a:rPr>
+              <a:t>Donde se entrega</a:t>
+            </a:r>
+          </a:p>
+        </p:txBody>
+      </p:sp>
+      <p:sp>
+        <p:nvSpPr>
+          <p:cNvPr id="26" name="TextBox 25"/>
           <p:cNvSpPr txBox="1"/>
           <p:nvPr/>
         </p:nvSpPr>
@@ -5903,7 +7531,7 @@
         <p:spPr>
           <a:xfrm>
             <a:off x="0" y="0"/>
-            <a:ext cx="12191695" cy="960120"/>
+            <a:ext cx="12191695" cy="1170432"/>
           </a:xfrm>
           <a:prstGeom prst="rect">
             <a:avLst/>
@@ -5945,7 +7573,7 @@
         </p:nvSpPr>
         <p:spPr>
           <a:xfrm>
-            <a:off x="0" y="960120"/>
+            <a:off x="0" y="1170432"/>
             <a:ext cx="12191695" cy="41148"/>
           </a:xfrm>
           <a:prstGeom prst="rect">
@@ -5989,7 +7617,7 @@
         <p:spPr>
           <a:xfrm>
             <a:off x="457200" y="164592"/>
-            <a:ext cx="11277295" cy="502920"/>
+            <a:ext cx="11277295" cy="384048"/>
           </a:xfrm>
           <a:prstGeom prst="rect">
             <a:avLst/>
@@ -6009,20 +7637,225 @@
                 </a:solidFill>
                 <a:latin typeface="Calibri"/>
               </a:rPr>
-              <a:t>Para continuar (PI)</a:t>
-            </a:r>
-          </a:p>
-        </p:txBody>
-      </p:sp>
-      <p:sp>
-        <p:nvSpPr>
-          <p:cNvPr id="5" name="Rounded Rectangle 4"/>
+              <a:t>Del boceto a ExamLab (diagrama)</a:t>
+            </a:r>
+          </a:p>
+        </p:txBody>
+      </p:sp>
+      <p:sp>
+        <p:nvSpPr>
+          <p:cNvPr id="5" name="TextBox 4"/>
+          <p:cNvSpPr txBox="1"/>
+          <p:nvPr/>
+        </p:nvSpPr>
+        <p:spPr>
+          <a:xfrm>
+            <a:off x="457200" y="566928"/>
+            <a:ext cx="11277295" cy="411480"/>
+          </a:xfrm>
+          <a:prstGeom prst="rect">
+            <a:avLst/>
+          </a:prstGeom>
+          <a:noFill/>
+        </p:spPr>
+        <p:txBody>
+          <a:bodyPr wrap="square">
+            <a:spAutoFit/>
+          </a:bodyPr>
+          <a:lstStyle/>
+          <a:p>
+            <a:r>
+              <a:rPr sz="1400" b="0" i="0">
+                <a:solidFill>
+                  <a:srgbClr val="B8D8EE"/>
+                </a:solidFill>
+                <a:latin typeface="Calibri"/>
+              </a:rPr>
+              <a:t>El diagrama se entrega como código Mermaid dentro de ExamLab, no como imagen</a:t>
+            </a:r>
+          </a:p>
+        </p:txBody>
+      </p:sp>
+      <p:sp>
+        <p:nvSpPr>
+          <p:cNvPr id="6" name="Rounded Rectangle 5"/>
           <p:cNvSpPr/>
           <p:nvPr/>
         </p:nvSpPr>
         <p:spPr>
           <a:xfrm>
-            <a:off x="457200" y="1261872"/>
+            <a:off x="457200" y="1659636"/>
+            <a:ext cx="11277295" cy="1051560"/>
+          </a:xfrm>
+          <a:prstGeom prst="roundRect">
+            <a:avLst>
+              <a:gd name="adj" fmla="val 12000"/>
+            </a:avLst>
+          </a:prstGeom>
+          <a:solidFill>
+            <a:srgbClr val="F2F2F2"/>
+          </a:solidFill>
+          <a:ln>
+            <a:noFill/>
+          </a:ln>
+        </p:spPr>
+        <p:style>
+          <a:lnRef idx="1">
+            <a:schemeClr val="accent1"/>
+          </a:lnRef>
+          <a:fillRef idx="3">
+            <a:schemeClr val="accent1"/>
+          </a:fillRef>
+          <a:effectRef idx="2">
+            <a:schemeClr val="accent1"/>
+          </a:effectRef>
+          <a:fontRef idx="minor">
+            <a:schemeClr val="lt1"/>
+          </a:fontRef>
+        </p:style>
+        <p:txBody>
+          <a:bodyPr rtlCol="0" anchor="ctr"/>
+          <a:lstStyle/>
+          <a:p>
+            <a:pPr algn="ctr"/>
+          </a:p>
+        </p:txBody>
+      </p:sp>
+      <p:sp>
+        <p:nvSpPr>
+          <p:cNvPr id="7" name="Rounded Rectangle 6"/>
+          <p:cNvSpPr/>
+          <p:nvPr/>
+        </p:nvSpPr>
+        <p:spPr>
+          <a:xfrm>
+            <a:off x="594360" y="1965960"/>
+            <a:ext cx="438912" cy="438912"/>
+          </a:xfrm>
+          <a:prstGeom prst="roundRect">
+            <a:avLst>
+              <a:gd name="adj" fmla="val 12000"/>
+            </a:avLst>
+          </a:prstGeom>
+          <a:solidFill>
+            <a:srgbClr val="095292"/>
+          </a:solidFill>
+          <a:ln>
+            <a:noFill/>
+          </a:ln>
+        </p:spPr>
+        <p:style>
+          <a:lnRef idx="1">
+            <a:schemeClr val="accent1"/>
+          </a:lnRef>
+          <a:fillRef idx="3">
+            <a:schemeClr val="accent1"/>
+          </a:fillRef>
+          <a:effectRef idx="2">
+            <a:schemeClr val="accent1"/>
+          </a:effectRef>
+          <a:fontRef idx="minor">
+            <a:schemeClr val="lt1"/>
+          </a:fontRef>
+        </p:style>
+        <p:txBody>
+          <a:bodyPr rtlCol="0" anchor="ctr"/>
+          <a:lstStyle/>
+          <a:p>
+            <a:pPr algn="ctr"/>
+          </a:p>
+        </p:txBody>
+      </p:sp>
+      <p:sp>
+        <p:nvSpPr>
+          <p:cNvPr id="8" name="TextBox 7"/>
+          <p:cNvSpPr txBox="1"/>
+          <p:nvPr/>
+        </p:nvSpPr>
+        <p:spPr>
+          <a:xfrm>
+            <a:off x="594360" y="1965960"/>
+            <a:ext cx="438912" cy="438912"/>
+          </a:xfrm>
+          <a:prstGeom prst="rect">
+            <a:avLst/>
+          </a:prstGeom>
+          <a:noFill/>
+        </p:spPr>
+        <p:txBody>
+          <a:bodyPr wrap="square" anchor="ctr"/>
+          <a:lstStyle/>
+          <a:p>
+            <a:pPr algn="ctr"/>
+            <a:r>
+              <a:rPr sz="1600" b="1" i="0">
+                <a:solidFill>
+                  <a:srgbClr val="FFFFFF"/>
+                </a:solidFill>
+                <a:latin typeface="Calibri"/>
+              </a:rPr>
+              <a:t>1</a:t>
+            </a:r>
+          </a:p>
+        </p:txBody>
+      </p:sp>
+      <p:sp>
+        <p:nvSpPr>
+          <p:cNvPr id="9" name="TextBox 8"/>
+          <p:cNvSpPr txBox="1"/>
+          <p:nvPr/>
+        </p:nvSpPr>
+        <p:spPr>
+          <a:xfrm>
+            <a:off x="1188720" y="1751076"/>
+            <a:ext cx="10271455" cy="886968"/>
+          </a:xfrm>
+          <a:prstGeom prst="rect">
+            <a:avLst/>
+          </a:prstGeom>
+          <a:noFill/>
+        </p:spPr>
+        <p:txBody>
+          <a:bodyPr wrap="square" anchor="ctr"/>
+          <a:lstStyle/>
+          <a:p>
+            <a:r>
+              <a:rPr sz="1500" b="1" i="0">
+                <a:solidFill>
+                  <a:srgbClr val="095292"/>
+                </a:solidFill>
+                <a:latin typeface="Calibri"/>
+              </a:rPr>
+              <a:t>Disena visual</a:t>
+            </a:r>
+          </a:p>
+          <a:p>
+            <a:pPr>
+              <a:spcBef>
+                <a:spcPts val="200"/>
+              </a:spcBef>
+            </a:pPr>
+            <a:r>
+              <a:rPr sz="1300" b="0" i="0">
+                <a:solidFill>
+                  <a:srgbClr val="333333"/>
+                </a:solidFill>
+                <a:latin typeface="Calibri"/>
+              </a:rPr>
+              <a:t>Dibuja el diagrama como quieras en Excalidraw o draw.io: es mas rapido arrastrar cajas que escribir codigo, y ahi es donde piensas el modelo.</a:t>
+            </a:r>
+          </a:p>
+        </p:txBody>
+      </p:sp>
+      <p:sp>
+        <p:nvSpPr>
+          <p:cNvPr id="10" name="Rounded Rectangle 9"/>
+          <p:cNvSpPr/>
+          <p:nvPr/>
+        </p:nvSpPr>
+        <p:spPr>
+          <a:xfrm>
+            <a:off x="457200" y="2802636"/>
             <a:ext cx="11277295" cy="1051560"/>
           </a:xfrm>
           <a:prstGeom prst="roundRect">
@@ -6061,20 +7894,22 @@
       </p:sp>
       <p:sp>
         <p:nvSpPr>
-          <p:cNvPr id="6" name="Rectangle 5"/>
+          <p:cNvPr id="11" name="Rounded Rectangle 10"/>
           <p:cNvSpPr/>
           <p:nvPr/>
         </p:nvSpPr>
         <p:spPr>
           <a:xfrm>
-            <a:off x="457200" y="1261872"/>
-            <a:ext cx="128016" cy="1051560"/>
-          </a:xfrm>
-          <a:prstGeom prst="rect">
-            <a:avLst/>
+            <a:off x="594360" y="3108960"/>
+            <a:ext cx="438912" cy="438912"/>
+          </a:xfrm>
+          <a:prstGeom prst="roundRect">
+            <a:avLst>
+              <a:gd name="adj" fmla="val 12000"/>
+            </a:avLst>
           </a:prstGeom>
           <a:solidFill>
-            <a:srgbClr val="269CCB"/>
+            <a:srgbClr val="095292"/>
           </a:solidFill>
           <a:ln>
             <a:noFill/>
@@ -6104,14 +7939,14 @@
       </p:sp>
       <p:sp>
         <p:nvSpPr>
-          <p:cNvPr id="7" name="TextBox 6"/>
+          <p:cNvPr id="12" name="TextBox 11"/>
           <p:cNvSpPr txBox="1"/>
           <p:nvPr/>
         </p:nvSpPr>
         <p:spPr>
           <a:xfrm>
-            <a:off x="777240" y="1399031"/>
-            <a:ext cx="10774375" cy="822959"/>
+            <a:off x="594360" y="3108960"/>
+            <a:ext cx="438912" cy="438912"/>
           </a:xfrm>
           <a:prstGeom prst="rect">
             <a:avLst/>
@@ -6119,48 +7954,79 @@
           <a:noFill/>
         </p:spPr>
         <p:txBody>
-          <a:bodyPr wrap="square">
-            <a:spAutoFit/>
-          </a:bodyPr>
-          <a:lstStyle/>
-          <a:p>
-            <a:r>
-              <a:rPr sz="1200" b="1" i="0">
-                <a:solidFill>
-                  <a:srgbClr val="269CCB"/>
-                </a:solidFill>
-                <a:latin typeface="Calibri"/>
-              </a:rPr>
-              <a:t>Info</a:t>
+          <a:bodyPr wrap="square" anchor="ctr"/>
+          <a:lstStyle/>
+          <a:p>
+            <a:pPr algn="ctr"/>
+            <a:r>
+              <a:rPr sz="1600" b="1" i="0">
+                <a:solidFill>
+                  <a:srgbClr val="FFFFFF"/>
+                </a:solidFill>
+                <a:latin typeface="Calibri"/>
+              </a:rPr>
+              <a:t>2</a:t>
+            </a:r>
+          </a:p>
+        </p:txBody>
+      </p:sp>
+      <p:sp>
+        <p:nvSpPr>
+          <p:cNvPr id="13" name="TextBox 12"/>
+          <p:cNvSpPr txBox="1"/>
+          <p:nvPr/>
+        </p:nvSpPr>
+        <p:spPr>
+          <a:xfrm>
+            <a:off x="1188720" y="2894076"/>
+            <a:ext cx="10271455" cy="886968"/>
+          </a:xfrm>
+          <a:prstGeom prst="rect">
+            <a:avLst/>
+          </a:prstGeom>
+          <a:noFill/>
+        </p:spPr>
+        <p:txBody>
+          <a:bodyPr wrap="square" anchor="ctr"/>
+          <a:lstStyle/>
+          <a:p>
+            <a:r>
+              <a:rPr sz="1500" b="1" i="0">
+                <a:solidFill>
+                  <a:srgbClr val="095292"/>
+                </a:solidFill>
+                <a:latin typeface="Calibri"/>
+              </a:rPr>
+              <a:t>Traduce con IA</a:t>
             </a:r>
           </a:p>
           <a:p>
             <a:pPr>
               <a:spcBef>
-                <a:spcPts val="400"/>
+                <a:spcPts val="200"/>
               </a:spcBef>
             </a:pPr>
             <a:r>
-              <a:rPr sz="1400" b="0" i="0">
+              <a:rPr sz="1300" b="0" i="0">
                 <a:solidFill>
                   <a:srgbClr val="333333"/>
                 </a:solidFill>
                 <a:latin typeface="Calibri"/>
               </a:rPr>
-              <a:t>Entregable: Sección Escalabilidad: triggers, límites, qué escala y qué no</a:t>
-            </a:r>
-          </a:p>
-        </p:txBody>
-      </p:sp>
-      <p:sp>
-        <p:nvSpPr>
-          <p:cNvPr id="8" name="Rounded Rectangle 7"/>
+              <a:t>Copia o describe tu boceto a una IA y pidele el codigo Mermaid: «convierte este diagrama a Mermaid usando flowchart». Revisa el resultado: la IA acierta la sintaxis, no tu modelo.</a:t>
+            </a:r>
+          </a:p>
+        </p:txBody>
+      </p:sp>
+      <p:sp>
+        <p:nvSpPr>
+          <p:cNvPr id="14" name="Rounded Rectangle 13"/>
           <p:cNvSpPr/>
           <p:nvPr/>
         </p:nvSpPr>
         <p:spPr>
           <a:xfrm>
-            <a:off x="457200" y="2478024"/>
+            <a:off x="457200" y="3945636"/>
             <a:ext cx="11277295" cy="1051560"/>
           </a:xfrm>
           <a:prstGeom prst="roundRect">
@@ -6169,7 +8035,7 @@
             </a:avLst>
           </a:prstGeom>
           <a:solidFill>
-            <a:srgbClr val="FFF8E1"/>
+            <a:srgbClr val="F2F2F2"/>
           </a:solidFill>
           <a:ln>
             <a:noFill/>
@@ -6199,20 +8065,22 @@
       </p:sp>
       <p:sp>
         <p:nvSpPr>
-          <p:cNvPr id="9" name="Rectangle 8"/>
+          <p:cNvPr id="15" name="Rounded Rectangle 14"/>
           <p:cNvSpPr/>
           <p:nvPr/>
         </p:nvSpPr>
         <p:spPr>
           <a:xfrm>
-            <a:off x="457200" y="2478024"/>
-            <a:ext cx="128016" cy="1051560"/>
-          </a:xfrm>
-          <a:prstGeom prst="rect">
-            <a:avLst/>
+            <a:off x="594360" y="4251960"/>
+            <a:ext cx="438912" cy="438912"/>
+          </a:xfrm>
+          <a:prstGeom prst="roundRect">
+            <a:avLst>
+              <a:gd name="adj" fmla="val 12000"/>
+            </a:avLst>
           </a:prstGeom>
           <a:solidFill>
-            <a:srgbClr val="FFD000"/>
+            <a:srgbClr val="095292"/>
           </a:solidFill>
           <a:ln>
             <a:noFill/>
@@ -6242,14 +8110,14 @@
       </p:sp>
       <p:sp>
         <p:nvSpPr>
-          <p:cNvPr id="10" name="TextBox 9"/>
+          <p:cNvPr id="16" name="TextBox 15"/>
           <p:cNvSpPr txBox="1"/>
           <p:nvPr/>
         </p:nvSpPr>
         <p:spPr>
           <a:xfrm>
-            <a:off x="777240" y="2615184"/>
-            <a:ext cx="10774375" cy="822959"/>
+            <a:off x="594360" y="4251960"/>
+            <a:ext cx="438912" cy="438912"/>
           </a:xfrm>
           <a:prstGeom prst="rect">
             <a:avLst/>
@@ -6257,48 +8125,79 @@
           <a:noFill/>
         </p:spPr>
         <p:txBody>
-          <a:bodyPr wrap="square">
-            <a:spAutoFit/>
-          </a:bodyPr>
-          <a:lstStyle/>
-          <a:p>
-            <a:r>
-              <a:rPr sz="1200" b="1" i="0">
-                <a:solidFill>
-                  <a:srgbClr val="FFD000"/>
-                </a:solidFill>
-                <a:latin typeface="Calibri"/>
-              </a:rPr>
-              <a:t>Aclaración</a:t>
+          <a:bodyPr wrap="square" anchor="ctr"/>
+          <a:lstStyle/>
+          <a:p>
+            <a:pPr algn="ctr"/>
+            <a:r>
+              <a:rPr sz="1600" b="1" i="0">
+                <a:solidFill>
+                  <a:srgbClr val="FFFFFF"/>
+                </a:solidFill>
+                <a:latin typeface="Calibri"/>
+              </a:rPr>
+              <a:t>3</a:t>
+            </a:r>
+          </a:p>
+        </p:txBody>
+      </p:sp>
+      <p:sp>
+        <p:nvSpPr>
+          <p:cNvPr id="17" name="TextBox 16"/>
+          <p:cNvSpPr txBox="1"/>
+          <p:nvPr/>
+        </p:nvSpPr>
+        <p:spPr>
+          <a:xfrm>
+            <a:off x="1188720" y="4037076"/>
+            <a:ext cx="10271455" cy="886968"/>
+          </a:xfrm>
+          <a:prstGeom prst="rect">
+            <a:avLst/>
+          </a:prstGeom>
+          <a:noFill/>
+        </p:spPr>
+        <p:txBody>
+          <a:bodyPr wrap="square" anchor="ctr"/>
+          <a:lstStyle/>
+          <a:p>
+            <a:r>
+              <a:rPr sz="1500" b="1" i="0">
+                <a:solidFill>
+                  <a:srgbClr val="095292"/>
+                </a:solidFill>
+                <a:latin typeface="Calibri"/>
+              </a:rPr>
+              <a:t>Pega y renderiza en ExamLab</a:t>
             </a:r>
           </a:p>
           <a:p>
             <a:pPr>
               <a:spcBef>
-                <a:spcPts val="400"/>
+                <a:spcPts val="200"/>
               </a:spcBef>
             </a:pPr>
             <a:r>
-              <a:rPr sz="1400" b="0" i="0">
+              <a:rPr sz="1300" b="0" i="0">
                 <a:solidFill>
                   <a:srgbClr val="333333"/>
                 </a:solidFill>
                 <a:latin typeface="Calibri"/>
               </a:rPr>
-              <a:t>Subir evidencias al paquete CloudLite (Drive/repo) y a ExamLab (https://uniaj.examlab.workers.dev/) domingo 23:59.</a:t>
-            </a:r>
-          </a:p>
-        </p:txBody>
-      </p:sp>
-      <p:sp>
-        <p:nvSpPr>
-          <p:cNvPr id="11" name="Rounded Rectangle 10"/>
+              <a:t>Pega ese codigo en la caja de texto de la pregunta y mira como lo dibuja la plataforma. Si no renderiza, corrige ahi mismo: lo que se califica es el diagrama renderizado dentro de ExamLab.</a:t>
+            </a:r>
+          </a:p>
+        </p:txBody>
+      </p:sp>
+      <p:sp>
+        <p:nvSpPr>
+          <p:cNvPr id="18" name="Rounded Rectangle 17"/>
           <p:cNvSpPr/>
           <p:nvPr/>
         </p:nvSpPr>
         <p:spPr>
           <a:xfrm>
-            <a:off x="457200" y="3694176"/>
+            <a:off x="457200" y="5088636"/>
             <a:ext cx="11277295" cy="1051560"/>
           </a:xfrm>
           <a:prstGeom prst="roundRect">
@@ -6307,7 +8206,7 @@
             </a:avLst>
           </a:prstGeom>
           <a:solidFill>
-            <a:srgbClr val="FBE4E4"/>
+            <a:srgbClr val="E8F4FA"/>
           </a:solidFill>
           <a:ln>
             <a:noFill/>
@@ -6337,20 +8236,22 @@
       </p:sp>
       <p:sp>
         <p:nvSpPr>
-          <p:cNvPr id="12" name="Rectangle 11"/>
+          <p:cNvPr id="19" name="Rounded Rectangle 18"/>
           <p:cNvSpPr/>
           <p:nvPr/>
         </p:nvSpPr>
         <p:spPr>
           <a:xfrm>
-            <a:off x="457200" y="3694176"/>
-            <a:ext cx="128016" cy="1051560"/>
-          </a:xfrm>
-          <a:prstGeom prst="rect">
-            <a:avLst/>
+            <a:off x="594360" y="5394960"/>
+            <a:ext cx="438912" cy="438912"/>
+          </a:xfrm>
+          <a:prstGeom prst="roundRect">
+            <a:avLst>
+              <a:gd name="adj" fmla="val 12000"/>
+            </a:avLst>
           </a:prstGeom>
           <a:solidFill>
-            <a:srgbClr val="A02030"/>
+            <a:srgbClr val="095292"/>
           </a:solidFill>
           <a:ln>
             <a:noFill/>
@@ -6380,14 +8281,14 @@
       </p:sp>
       <p:sp>
         <p:nvSpPr>
-          <p:cNvPr id="13" name="TextBox 12"/>
+          <p:cNvPr id="20" name="TextBox 19"/>
           <p:cNvSpPr txBox="1"/>
           <p:nvPr/>
         </p:nvSpPr>
         <p:spPr>
           <a:xfrm>
-            <a:off x="777240" y="3831336"/>
-            <a:ext cx="10774375" cy="822959"/>
+            <a:off x="594360" y="5394960"/>
+            <a:ext cx="438912" cy="438912"/>
           </a:xfrm>
           <a:prstGeom prst="rect">
             <a:avLst/>
@@ -6395,42 +8296,73 @@
           <a:noFill/>
         </p:spPr>
         <p:txBody>
-          <a:bodyPr wrap="square">
-            <a:spAutoFit/>
-          </a:bodyPr>
-          <a:lstStyle/>
-          <a:p>
-            <a:r>
-              <a:rPr sz="1200" b="1" i="0">
-                <a:solidFill>
-                  <a:srgbClr val="A02030"/>
-                </a:solidFill>
-                <a:latin typeface="Calibri"/>
-              </a:rPr>
-              <a:t>Atención</a:t>
+          <a:bodyPr wrap="square" anchor="ctr"/>
+          <a:lstStyle/>
+          <a:p>
+            <a:pPr algn="ctr"/>
+            <a:r>
+              <a:rPr sz="1600" b="1" i="0">
+                <a:solidFill>
+                  <a:srgbClr val="FFFFFF"/>
+                </a:solidFill>
+                <a:latin typeface="Calibri"/>
+              </a:rPr>
+              <a:t>4</a:t>
+            </a:r>
+          </a:p>
+        </p:txBody>
+      </p:sp>
+      <p:sp>
+        <p:nvSpPr>
+          <p:cNvPr id="21" name="TextBox 20"/>
+          <p:cNvSpPr txBox="1"/>
+          <p:nvPr/>
+        </p:nvSpPr>
+        <p:spPr>
+          <a:xfrm>
+            <a:off x="1188720" y="5180076"/>
+            <a:ext cx="10271455" cy="886968"/>
+          </a:xfrm>
+          <a:prstGeom prst="rect">
+            <a:avLst/>
+          </a:prstGeom>
+          <a:noFill/>
+        </p:spPr>
+        <p:txBody>
+          <a:bodyPr wrap="square" anchor="ctr"/>
+          <a:lstStyle/>
+          <a:p>
+            <a:r>
+              <a:rPr sz="1500" b="1" i="0">
+                <a:solidFill>
+                  <a:srgbClr val="095292"/>
+                </a:solidFill>
+                <a:latin typeface="Calibri"/>
+              </a:rPr>
+              <a:t>Guarda el PNG para tu PI</a:t>
             </a:r>
           </a:p>
           <a:p>
             <a:pPr>
               <a:spcBef>
-                <a:spcPts val="400"/>
+                <a:spcPts val="200"/>
               </a:spcBef>
             </a:pPr>
             <a:r>
-              <a:rPr sz="1400" b="0" i="0">
+              <a:rPr sz="1300" b="0" i="0">
                 <a:solidFill>
                   <a:srgbClr val="333333"/>
                 </a:solidFill>
                 <a:latin typeface="Calibri"/>
               </a:rPr>
-              <a:t>Sin cloud de pago ni instalaciones obligatorias de hipervisores/Docker Desktop.</a:t>
-            </a:r>
-          </a:p>
-        </p:txBody>
-      </p:sp>
-      <p:sp>
-        <p:nvSpPr>
-          <p:cNvPr id="14" name="TextBox 13"/>
+              <a:t>Exporta tambien la imagen a la carpeta de tu Proyecto Integrador. Esa copia es para tu informe; no reemplaza la respuesta en la plataforma.</a:t>
+            </a:r>
+          </a:p>
+        </p:txBody>
+      </p:sp>
+      <p:sp>
+        <p:nvSpPr>
+          <p:cNvPr id="22" name="TextBox 21"/>
           <p:cNvSpPr txBox="1"/>
           <p:nvPr/>
         </p:nvSpPr>

--- a/Arquitectura de Sistemas Computacionales/Clases/Clase 13 - Escalabilidad automatica/Presentacion.pptx
+++ b/Arquitectura de Sistemas Computacionales/Clases/Clase 13 - Escalabilidad automatica/Presentacion.pptx
@@ -3608,7 +3608,7 @@
               </a:spcAft>
             </a:pPr>
             <a:r>
-              <a:rPr sz="1600" b="1" i="0">
+              <a:rPr sz="1800" b="1" i="0">
                 <a:solidFill>
                   <a:srgbClr val="333333"/>
                 </a:solidFill>
@@ -3617,7 +3617,7 @@
               <a:t>1.</a:t>
             </a:r>
             <a:r>
-              <a:rPr sz="1600" b="0" i="0">
+              <a:rPr sz="1800" b="0" i="0">
                 <a:solidFill>
                   <a:srgbClr val="333333"/>
                 </a:solidFill>
@@ -3633,7 +3633,7 @@
               </a:spcAft>
             </a:pPr>
             <a:r>
-              <a:rPr sz="1600" b="0" i="0">
+              <a:rPr sz="1800" b="0" i="0">
                 <a:solidFill>
                   <a:srgbClr val="333333"/>
                 </a:solidFill>
@@ -3642,7 +3642,7 @@
               <a:t>–   </a:t>
             </a:r>
             <a:r>
-              <a:rPr sz="1600" b="1" i="0">
+              <a:rPr sz="1800" b="1" i="0">
                 <a:solidFill>
                   <a:srgbClr val="333333"/>
                 </a:solidFill>
@@ -3651,7 +3651,7 @@
               <a:t>2.</a:t>
             </a:r>
             <a:r>
-              <a:rPr sz="1600" b="0" i="0">
+              <a:rPr sz="1800" b="0" i="0">
                 <a:solidFill>
                   <a:srgbClr val="333333"/>
                 </a:solidFill>
@@ -3667,7 +3667,7 @@
               </a:spcAft>
             </a:pPr>
             <a:r>
-              <a:rPr sz="1600" b="0" i="0">
+              <a:rPr sz="1800" b="0" i="0">
                 <a:solidFill>
                   <a:srgbClr val="333333"/>
                 </a:solidFill>
@@ -3676,7 +3676,7 @@
               <a:t>–   </a:t>
             </a:r>
             <a:r>
-              <a:rPr sz="1600" b="1" i="0">
+              <a:rPr sz="1800" b="1" i="0">
                 <a:solidFill>
                   <a:srgbClr val="333333"/>
                 </a:solidFill>
@@ -3685,7 +3685,7 @@
               <a:t>3.</a:t>
             </a:r>
             <a:r>
-              <a:rPr sz="1600" b="0" i="0">
+              <a:rPr sz="1800" b="0" i="0">
                 <a:solidFill>
                   <a:srgbClr val="333333"/>
                 </a:solidFill>
@@ -3701,7 +3701,7 @@
               </a:spcAft>
             </a:pPr>
             <a:r>
-              <a:rPr sz="1600" b="0" i="0">
+              <a:rPr sz="1800" b="0" i="0">
                 <a:solidFill>
                   <a:srgbClr val="333333"/>
                 </a:solidFill>
@@ -3710,7 +3710,7 @@
               <a:t>–   </a:t>
             </a:r>
             <a:r>
-              <a:rPr sz="1600" b="1" i="0">
+              <a:rPr sz="1800" b="1" i="0">
                 <a:solidFill>
                   <a:srgbClr val="333333"/>
                 </a:solidFill>
@@ -3719,7 +3719,7 @@
               <a:t>4.</a:t>
             </a:r>
             <a:r>
-              <a:rPr sz="1600" b="0" i="0">
+              <a:rPr sz="1800" b="0" i="0">
                 <a:solidFill>
                   <a:srgbClr val="333333"/>
                 </a:solidFill>
@@ -3735,7 +3735,7 @@
               </a:spcAft>
             </a:pPr>
             <a:r>
-              <a:rPr sz="1600" b="0" i="0">
+              <a:rPr sz="1800" b="0" i="0">
                 <a:solidFill>
                   <a:srgbClr val="333333"/>
                 </a:solidFill>
@@ -3744,7 +3744,7 @@
               <a:t>–   </a:t>
             </a:r>
             <a:r>
-              <a:rPr sz="1600" b="1" i="0">
+              <a:rPr sz="1800" b="1" i="0">
                 <a:solidFill>
                   <a:srgbClr val="333333"/>
                 </a:solidFill>
@@ -3753,7 +3753,7 @@
               <a:t>5.</a:t>
             </a:r>
             <a:r>
-              <a:rPr sz="1600" b="0" i="0">
+              <a:rPr sz="1800" b="0" i="0">
                 <a:solidFill>
                   <a:srgbClr val="333333"/>
                 </a:solidFill>
@@ -4800,7 +4800,7 @@
               </a:spcAft>
             </a:pPr>
             <a:r>
-              <a:rPr sz="1600" b="0" i="0">
+              <a:rPr sz="2000" b="0" i="0">
                 <a:solidFill>
                   <a:srgbClr val="333333"/>
                 </a:solidFill>
@@ -4809,7 +4809,7 @@
               <a:t>–   </a:t>
             </a:r>
             <a:r>
-              <a:rPr sz="1600" b="1" i="0">
+              <a:rPr sz="2000" b="1" i="0">
                 <a:solidFill>
                   <a:srgbClr val="333333"/>
                 </a:solidFill>
@@ -4818,7 +4818,7 @@
               <a:t>0–10</a:t>
             </a:r>
             <a:r>
-              <a:rPr sz="1600" b="0" i="0">
+              <a:rPr sz="2000" b="0" i="0">
                 <a:solidFill>
                   <a:srgbClr val="333333"/>
                 </a:solidFill>
@@ -4834,7 +4834,7 @@
               </a:spcAft>
             </a:pPr>
             <a:r>
-              <a:rPr sz="1600" b="1" i="0">
+              <a:rPr sz="2000" b="1" i="0">
                 <a:solidFill>
                   <a:srgbClr val="333333"/>
                 </a:solidFill>
@@ -4843,7 +4843,7 @@
               <a:t>10–40</a:t>
             </a:r>
             <a:r>
-              <a:rPr sz="1600" b="0" i="0">
+              <a:rPr sz="2000" b="0" i="0">
                 <a:solidFill>
                   <a:srgbClr val="333333"/>
                 </a:solidFill>
@@ -4859,7 +4859,7 @@
               </a:spcAft>
             </a:pPr>
             <a:r>
-              <a:rPr sz="1600" b="0" i="0">
+              <a:rPr sz="2000" b="0" i="0">
                 <a:solidFill>
                   <a:srgbClr val="333333"/>
                 </a:solidFill>
@@ -4868,7 +4868,7 @@
               <a:t>–   </a:t>
             </a:r>
             <a:r>
-              <a:rPr sz="1600" b="1" i="0">
+              <a:rPr sz="2000" b="1" i="0">
                 <a:solidFill>
                   <a:srgbClr val="333333"/>
                 </a:solidFill>
@@ -4877,7 +4877,7 @@
               <a:t>40–100</a:t>
             </a:r>
             <a:r>
-              <a:rPr sz="1600" b="0" i="0">
+              <a:rPr sz="2000" b="0" i="0">
                 <a:solidFill>
                   <a:srgbClr val="333333"/>
                 </a:solidFill>
@@ -4893,7 +4893,7 @@
               </a:spcAft>
             </a:pPr>
             <a:r>
-              <a:rPr sz="1600" b="1" i="0">
+              <a:rPr sz="2000" b="1" i="0">
                 <a:solidFill>
                   <a:srgbClr val="333333"/>
                 </a:solidFill>
@@ -4902,7 +4902,7 @@
               <a:t>100–115</a:t>
             </a:r>
             <a:r>
-              <a:rPr sz="1600" b="0" i="0">
+              <a:rPr sz="2000" b="0" i="0">
                 <a:solidFill>
                   <a:srgbClr val="333333"/>
                 </a:solidFill>
@@ -4918,7 +4918,7 @@
               </a:spcAft>
             </a:pPr>
             <a:r>
-              <a:rPr sz="1600" b="1" i="0">
+              <a:rPr sz="2000" b="1" i="0">
                 <a:solidFill>
                   <a:srgbClr val="333333"/>
                 </a:solidFill>
@@ -4927,7 +4927,7 @@
               <a:t>115–120</a:t>
             </a:r>
             <a:r>
-              <a:rPr sz="1600" b="0" i="0">
+              <a:rPr sz="2000" b="0" i="0">
                 <a:solidFill>
                   <a:srgbClr val="333333"/>
                 </a:solidFill>
@@ -5147,7 +5147,7 @@
               </a:spcAft>
             </a:pPr>
             <a:r>
-              <a:rPr sz="1600" b="0" i="0">
+              <a:rPr sz="2000" b="0" i="0">
                 <a:solidFill>
                   <a:srgbClr val="333333"/>
                 </a:solidFill>
@@ -5163,7 +5163,7 @@
               </a:spcAft>
             </a:pPr>
             <a:r>
-              <a:rPr sz="1600" b="0" i="0">
+              <a:rPr sz="2000" b="0" i="0">
                 <a:solidFill>
                   <a:srgbClr val="333333"/>
                 </a:solidFill>
@@ -5179,7 +5179,7 @@
               </a:spcAft>
             </a:pPr>
             <a:r>
-              <a:rPr sz="1600" b="0" i="0">
+              <a:rPr sz="2000" b="0" i="0">
                 <a:solidFill>
                   <a:srgbClr val="333333"/>
                 </a:solidFill>
@@ -5399,7 +5399,7 @@
               </a:spcAft>
             </a:pPr>
             <a:r>
-              <a:rPr sz="1600" b="0" i="0">
+              <a:rPr sz="2000" b="0" i="0">
                 <a:solidFill>
                   <a:srgbClr val="333333"/>
                 </a:solidFill>
@@ -5408,7 +5408,7 @@
               <a:t>–   </a:t>
             </a:r>
             <a:r>
-              <a:rPr sz="1600" b="1" i="0">
+              <a:rPr sz="2000" b="1" i="0">
                 <a:solidFill>
                   <a:srgbClr val="333333"/>
                 </a:solidFill>
@@ -5417,7 +5417,7 @@
               <a:t>Entregable:</a:t>
             </a:r>
             <a:r>
-              <a:rPr sz="1600" b="0" i="0">
+              <a:rPr sz="2000" b="0" i="0">
                 <a:solidFill>
                   <a:srgbClr val="333333"/>
                 </a:solidFill>
@@ -5433,7 +5433,7 @@
               </a:spcAft>
             </a:pPr>
             <a:r>
-              <a:rPr sz="1600" b="0" i="0">
+              <a:rPr sz="2000" b="0" i="0">
                 <a:solidFill>
                   <a:srgbClr val="333333"/>
                 </a:solidFill>
@@ -5442,7 +5442,7 @@
               <a:t>–   Herramienta: </a:t>
             </a:r>
             <a:r>
-              <a:rPr sz="1600" b="1" i="0">
+              <a:rPr sz="2000" b="1" i="0">
                 <a:solidFill>
                   <a:srgbClr val="333333"/>
                 </a:solidFill>
@@ -5458,7 +5458,7 @@
               </a:spcAft>
             </a:pPr>
             <a:r>
-              <a:rPr sz="1600" b="0" i="0">
+              <a:rPr sz="2000" b="0" i="0">
                 <a:solidFill>
                   <a:srgbClr val="333333"/>
                 </a:solidFill>
@@ -5467,7 +5467,7 @@
               <a:t>–   Todo lo que construyan hoy entra al </a:t>
             </a:r>
             <a:r>
-              <a:rPr sz="1600" b="1" i="0">
+              <a:rPr sz="2000" b="1" i="0">
                 <a:solidFill>
                   <a:srgbClr val="333333"/>
                 </a:solidFill>
@@ -5476,7 +5476,7 @@
               <a:t>informe/repo del PI</a:t>
             </a:r>
             <a:r>
-              <a:rPr sz="1600" b="0" i="0">
+              <a:rPr sz="2000" b="0" i="0">
                 <a:solidFill>
                   <a:srgbClr val="333333"/>
                 </a:solidFill>
@@ -5492,7 +5492,7 @@
               </a:spcAft>
             </a:pPr>
             <a:r>
-              <a:rPr sz="1600" b="0" i="0">
+              <a:rPr sz="2000" b="0" i="0">
                 <a:solidFill>
                   <a:srgbClr val="333333"/>
                 </a:solidFill>
@@ -5712,7 +5712,7 @@
               </a:spcAft>
             </a:pPr>
             <a:r>
-              <a:rPr sz="1600" b="0" i="0">
+              <a:rPr sz="2000" b="0" i="0">
                 <a:solidFill>
                   <a:srgbClr val="333333"/>
                 </a:solidFill>
@@ -5728,7 +5728,7 @@
               </a:spcAft>
             </a:pPr>
             <a:r>
-              <a:rPr sz="1600" b="0" i="0">
+              <a:rPr sz="2000" b="0" i="0">
                 <a:solidFill>
                   <a:srgbClr val="333333"/>
                 </a:solidFill>
@@ -5744,7 +5744,7 @@
               </a:spcAft>
             </a:pPr>
             <a:r>
-              <a:rPr sz="1600" b="0" i="0">
+              <a:rPr sz="2000" b="0" i="0">
                 <a:solidFill>
                   <a:srgbClr val="333333"/>
                 </a:solidFill>
@@ -5964,7 +5964,7 @@
               </a:spcAft>
             </a:pPr>
             <a:r>
-              <a:rPr sz="1600" b="0" i="0">
+              <a:rPr sz="2000" b="0" i="0">
                 <a:solidFill>
                   <a:srgbClr val="333333"/>
                 </a:solidFill>
@@ -5980,7 +5980,7 @@
               </a:spcAft>
             </a:pPr>
             <a:r>
-              <a:rPr sz="1600" b="0" i="0">
+              <a:rPr sz="2000" b="0" i="0">
                 <a:solidFill>
                   <a:srgbClr val="333333"/>
                 </a:solidFill>

--- a/Arquitectura de Sistemas Computacionales/Clases/Clase 13 - Escalabilidad automatica/Presentacion.pptx
+++ b/Arquitectura de Sistemas Computacionales/Clases/Clase 13 - Escalabilidad automatica/Presentacion.pptx
@@ -3691,7 +3691,7 @@
                 </a:solidFill>
                 <a:latin typeface="Calibri"/>
               </a:rPr>
-              <a:t> Paso 3: escriba en ExamLab el diagrama Mermaid de la maquina de decision del autoescalado con el nodo de observacion, los dos rombos de decision, las acciones de subida y bajada, el enfriamiento y el nodo de lo que no escala, verificando al renderizar que el ciclo se cierre sobre el nodo de observacion y que los umbrales del diagrama sean los mismos numeros de la tabla.</a:t>
+              <a:t> Paso 3: escriba en la plataforma del curso el diagrama Mermaid de la maquina de decision del autoescalado con el nodo de observacion, los dos rombos de decision, las acciones de subida y bajada, el enfriamiento y el nodo de lo que no escala, verificando al renderizar que el ciclo se cierre sobre el nodo de observacion y que los umbrales del diagrama sean los mismos numeros de la tabla.</a:t>
             </a:r>
           </a:p>
           <a:p>
@@ -3759,7 +3759,7 @@
                 </a:solidFill>
                 <a:latin typeface="Calibri"/>
               </a:rPr>
-              <a:t> Paso 5: integre la politica en la seccion Escalabilidad del informe, anote la marca de replicas en el diagrama de despliegue si aplica y suba las 5 preguntas a ExamLab (modulo Talleres) antes del domingo 23:59, verificando que la politica no prometa nada que la arquitectura dibujada no pueda cumplir.</a:t>
+              <a:t> Paso 5: integre la politica en la seccion Escalabilidad del informe, anote la marca de replicas en el diagrama de despliegue si aplica y suba las 5 preguntas a la plataforma del curso (modulo Talleres) antes del en la fecha que indique el docente, verificando que la politica no prometa nada que la arquitectura dibujada no pueda cumplir.</a:t>
             </a:r>
           </a:p>
         </p:txBody>
@@ -4216,7 +4216,7 @@
                 </a:solidFill>
                 <a:latin typeface="Calibri"/>
               </a:rPr>
-              <a:t>Subir evidencias al paquete CloudLite (Drive/repo) y a ExamLab (https://uniaj.examlab.workers.dev/) domingo 23:59.</a:t>
+              <a:t>Subir evidencias al paquete CloudLite (Drive/repo) y a la plataforma del curso en la fecha que indique el docente.</a:t>
             </a:r>
           </a:p>
         </p:txBody>
@@ -4933,7 +4933,7 @@
                 </a:solidFill>
                 <a:latin typeface="Calibri"/>
               </a:rPr>
-              <a:t> Cierre: criterio de éxito + plazo domingo 23:59.</a:t>
+              <a:t> Cierre: criterio de éxito + plazo en la fecha que indique el docente.</a:t>
             </a:r>
           </a:p>
         </p:txBody>
@@ -5498,7 +5498,7 @@
                 </a:solidFill>
                 <a:latin typeface="Calibri"/>
               </a:rPr>
-              <a:t>–   Individual por defecto · el docente puede autorizar equipos de 2–3; la entrega en ExamLab siempre es individual.</a:t>
+              <a:t>–   Individual por defecto · el docente puede autorizar equipos de 2–3; la entrega en la plataforma del curso siempre es individual.</a:t>
             </a:r>
           </a:p>
         </p:txBody>
@@ -7440,7 +7440,7 @@
                 </a:solidFill>
                 <a:latin typeface="Calibri"/>
               </a:rPr>
-              <a:t>ExamLab</a:t>
+              <a:t>la plataforma del curso</a:t>
             </a:r>
           </a:p>
           <a:p>
@@ -7637,7 +7637,7 @@
                 </a:solidFill>
                 <a:latin typeface="Calibri"/>
               </a:rPr>
-              <a:t>Del boceto a ExamLab (diagrama)</a:t>
+              <a:t>Del boceto a la plataforma del curso (diagrama)</a:t>
             </a:r>
           </a:p>
         </p:txBody>
@@ -7671,7 +7671,7 @@
                 </a:solidFill>
                 <a:latin typeface="Calibri"/>
               </a:rPr>
-              <a:t>El diagrama se entrega como código Mermaid dentro de ExamLab, no como imagen</a:t>
+              <a:t>El diagrama se entrega como código Mermaid dentro de la plataforma del curso, no como imagen</a:t>
             </a:r>
           </a:p>
         </p:txBody>
@@ -8168,7 +8168,7 @@
                 </a:solidFill>
                 <a:latin typeface="Calibri"/>
               </a:rPr>
-              <a:t>Pega y renderiza en ExamLab</a:t>
+              <a:t>Pega y renderiza en la plataforma del curso</a:t>
             </a:r>
           </a:p>
           <a:p>
@@ -8184,7 +8184,7 @@
                 </a:solidFill>
                 <a:latin typeface="Calibri"/>
               </a:rPr>
-              <a:t>Pega ese codigo en la caja de texto de la pregunta y mira como lo dibuja la plataforma. Si no renderiza, corrige ahi mismo: lo que se califica es el diagrama renderizado dentro de ExamLab.</a:t>
+              <a:t>Pega ese codigo en la caja de texto de la pregunta y mira como lo dibuja la plataforma. Si no renderiza, corrige ahi mismo: lo que se califica es el diagrama renderizado dentro de la plataforma del curso.</a:t>
             </a:r>
           </a:p>
         </p:txBody>

--- a/Arquitectura de Sistemas Computacionales/Clases/Clase 13 - Escalabilidad automatica/Presentacion.pptx
+++ b/Arquitectura de Sistemas Computacionales/Clases/Clase 13 - Escalabilidad automatica/Presentacion.pptx
@@ -3575,7 +3575,7 @@
                 </a:solidFill>
                 <a:latin typeface="Calibri"/>
               </a:rPr>
-              <a:t>Taller PI (paso a paso)</a:t>
+              <a:t>Manos a la obra (paso a paso)</a:t>
             </a:r>
           </a:p>
         </p:txBody>
@@ -4883,7 +4883,7 @@
                 </a:solidFill>
                 <a:latin typeface="Calibri"/>
               </a:rPr>
-              <a:t> Taller guiado PI (demo en vivo + avance individual).</a:t>
+              <a:t> Trabajo guiado del PI (demo en vivo + avance individual).</a:t>
             </a:r>
           </a:p>
           <a:p>
@@ -5366,7 +5366,7 @@
                 </a:solidFill>
                 <a:latin typeface="Calibri"/>
               </a:rPr>
-              <a:t>PI CloudLite — entregable de hoy</a:t>
+              <a:t>Escala para CloudLite</a:t>
             </a:r>
           </a:p>
         </p:txBody>
@@ -5405,25 +5405,7 @@
                 </a:solidFill>
                 <a:latin typeface="Calibri"/>
               </a:rPr>
-              <a:t>–   </a:t>
-            </a:r>
-            <a:r>
-              <a:rPr sz="2000" b="1" i="0">
-                <a:solidFill>
-                  <a:srgbClr val="333333"/>
-                </a:solidFill>
-                <a:latin typeface="Calibri"/>
-              </a:rPr>
-              <a:t>Entregable:</a:t>
-            </a:r>
-            <a:r>
-              <a:rPr sz="2000" b="0" i="0">
-                <a:solidFill>
-                  <a:srgbClr val="333333"/>
-                </a:solidFill>
-                <a:latin typeface="Calibri"/>
-              </a:rPr>
-              <a:t> Sección Escalabilidad: triggers, límites, qué escala y qué no</a:t>
+              <a:t>–   Horizontal: más réplicas del API. Vertical: más CPU/RAM a un nodo.</a:t>
             </a:r>
           </a:p>
           <a:p>
@@ -5439,16 +5421,7 @@
                 </a:solidFill>
                 <a:latin typeface="Calibri"/>
               </a:rPr>
-              <a:t>–   Herramienta: </a:t>
-            </a:r>
-            <a:r>
-              <a:rPr sz="2000" b="1" i="0">
-                <a:solidFill>
-                  <a:srgbClr val="333333"/>
-                </a:solidFill>
-                <a:latin typeface="Calibri"/>
-              </a:rPr>
-              <a:t>Google Docs · draw.io (opcional nota en Deployment)</a:t>
+              <a:t>–   Datos: escala distinta (read replicas conceptuales / partición — solo si aplica).</a:t>
             </a:r>
           </a:p>
           <a:p>
@@ -5464,41 +5437,7 @@
                 </a:solidFill>
                 <a:latin typeface="Calibri"/>
               </a:rPr>
-              <a:t>–   Todo lo que construyan hoy entra al </a:t>
-            </a:r>
-            <a:r>
-              <a:rPr sz="2000" b="1" i="0">
-                <a:solidFill>
-                  <a:srgbClr val="333333"/>
-                </a:solidFill>
-                <a:latin typeface="Calibri"/>
-              </a:rPr>
-              <a:t>informe/repo del PI</a:t>
-            </a:r>
-            <a:r>
-              <a:rPr sz="2000" b="0" i="0">
-                <a:solidFill>
-                  <a:srgbClr val="333333"/>
-                </a:solidFill>
-                <a:latin typeface="Calibri"/>
-              </a:rPr>
-              <a:t> (no es lab suelto).</a:t>
-            </a:r>
-          </a:p>
-          <a:p>
-            <a:pPr>
-              <a:spcAft>
-                <a:spcPts val="800"/>
-              </a:spcAft>
-            </a:pPr>
-            <a:r>
-              <a:rPr sz="2000" b="0" i="0">
-                <a:solidFill>
-                  <a:srgbClr val="333333"/>
-                </a:solidFill>
-                <a:latin typeface="Calibri"/>
-              </a:rPr>
-              <a:t>–   Individual por defecto · el docente puede autorizar equipos de 2–3; la entrega en la plataforma del curso siempre es individual.</a:t>
+              <a:t>–   Triggers: RPS, latencia p95, profundidad de cola, CPU.</a:t>
             </a:r>
           </a:p>
         </p:txBody>
@@ -5679,7 +5618,7 @@
                 </a:solidFill>
                 <a:latin typeface="Calibri"/>
               </a:rPr>
-              <a:t>Escala para CloudLite</a:t>
+              <a:t>Límites y costos</a:t>
             </a:r>
           </a:p>
         </p:txBody>
@@ -5718,7 +5657,7 @@
                 </a:solidFill>
                 <a:latin typeface="Calibri"/>
               </a:rPr>
-              <a:t>–   Horizontal: más réplicas del API. Vertical: más CPU/RAM a un nodo.</a:t>
+              <a:t>–   max replicas · min replicas · cooldown — anótenlos aunque sean hipotéticos.</a:t>
             </a:r>
           </a:p>
           <a:p>
@@ -5734,23 +5673,7 @@
                 </a:solidFill>
                 <a:latin typeface="Calibri"/>
               </a:rPr>
-              <a:t>–   Datos: escala distinta (read replicas conceptuales / partición — solo si aplica).</a:t>
-            </a:r>
-          </a:p>
-          <a:p>
-            <a:pPr>
-              <a:spcAft>
-                <a:spcPts val="800"/>
-              </a:spcAft>
-            </a:pPr>
-            <a:r>
-              <a:rPr sz="2000" b="0" i="0">
-                <a:solidFill>
-                  <a:srgbClr val="333333"/>
-                </a:solidFill>
-                <a:latin typeface="Calibri"/>
-              </a:rPr>
-              <a:t>–   Triggers: RPS, latencia p95, profundidad de cola, CPU.</a:t>
+              <a:t>–   Escalar mal = costo (enlace con Clase 10).</a:t>
             </a:r>
           </a:p>
         </p:txBody>
@@ -5931,21 +5854,141 @@
                 </a:solidFill>
                 <a:latin typeface="Calibri"/>
               </a:rPr>
-              <a:t>Límites y costos</a:t>
-            </a:r>
-          </a:p>
-        </p:txBody>
-      </p:sp>
-      <p:sp>
-        <p:nvSpPr>
-          <p:cNvPr id="5" name="TextBox 4"/>
+              <a:t>Politica de autoescalado (tabla, no prosa)</a:t>
+            </a:r>
+          </a:p>
+        </p:txBody>
+      </p:sp>
+      <p:sp>
+        <p:nvSpPr>
+          <p:cNvPr id="5" name="Rounded Rectangle 4"/>
+          <p:cNvSpPr/>
+          <p:nvPr/>
+        </p:nvSpPr>
+        <p:spPr>
+          <a:xfrm>
+            <a:off x="457200" y="1261872"/>
+            <a:ext cx="11277295" cy="4773168"/>
+          </a:xfrm>
+          <a:prstGeom prst="roundRect">
+            <a:avLst>
+              <a:gd name="adj" fmla="val 12000"/>
+            </a:avLst>
+          </a:prstGeom>
+          <a:solidFill>
+            <a:srgbClr val="1E2A38"/>
+          </a:solidFill>
+          <a:ln>
+            <a:noFill/>
+          </a:ln>
+        </p:spPr>
+        <p:style>
+          <a:lnRef idx="1">
+            <a:schemeClr val="accent1"/>
+          </a:lnRef>
+          <a:fillRef idx="3">
+            <a:schemeClr val="accent1"/>
+          </a:fillRef>
+          <a:effectRef idx="2">
+            <a:schemeClr val="accent1"/>
+          </a:effectRef>
+          <a:fontRef idx="minor">
+            <a:schemeClr val="lt1"/>
+          </a:fontRef>
+        </p:style>
+        <p:txBody>
+          <a:bodyPr rtlCol="0" anchor="ctr"/>
+          <a:lstStyle/>
+          <a:p>
+            <a:pPr algn="ctr"/>
+          </a:p>
+        </p:txBody>
+      </p:sp>
+      <p:sp>
+        <p:nvSpPr>
+          <p:cNvPr id="6" name="Rectangle 5"/>
+          <p:cNvSpPr/>
+          <p:nvPr/>
+        </p:nvSpPr>
+        <p:spPr>
+          <a:xfrm>
+            <a:off x="457200" y="1261872"/>
+            <a:ext cx="11277295" cy="320040"/>
+          </a:xfrm>
+          <a:prstGeom prst="rect">
+            <a:avLst/>
+          </a:prstGeom>
+          <a:solidFill>
+            <a:srgbClr val="095292"/>
+          </a:solidFill>
+          <a:ln>
+            <a:noFill/>
+          </a:ln>
+        </p:spPr>
+        <p:style>
+          <a:lnRef idx="1">
+            <a:schemeClr val="accent1"/>
+          </a:lnRef>
+          <a:fillRef idx="3">
+            <a:schemeClr val="accent1"/>
+          </a:fillRef>
+          <a:effectRef idx="2">
+            <a:schemeClr val="accent1"/>
+          </a:effectRef>
+          <a:fontRef idx="minor">
+            <a:schemeClr val="lt1"/>
+          </a:fontRef>
+        </p:style>
+        <p:txBody>
+          <a:bodyPr rtlCol="0" anchor="ctr"/>
+          <a:lstStyle/>
+          <a:p>
+            <a:pPr algn="ctr"/>
+          </a:p>
+        </p:txBody>
+      </p:sp>
+      <p:sp>
+        <p:nvSpPr>
+          <p:cNvPr id="7" name="TextBox 6"/>
           <p:cNvSpPr txBox="1"/>
           <p:nvPr/>
         </p:nvSpPr>
         <p:spPr>
           <a:xfrm>
-            <a:off x="457200" y="1170432"/>
-            <a:ext cx="11277295" cy="5230368"/>
+            <a:off x="685800" y="1307592"/>
+            <a:ext cx="10820095" cy="256032"/>
+          </a:xfrm>
+          <a:prstGeom prst="rect">
+            <a:avLst/>
+          </a:prstGeom>
+          <a:noFill/>
+        </p:spPr>
+        <p:txBody>
+          <a:bodyPr wrap="square" anchor="ctr"/>
+          <a:lstStyle/>
+          <a:p>
+            <a:r>
+              <a:rPr sz="1000" b="1" i="0">
+                <a:solidFill>
+                  <a:srgbClr val="269CCB"/>
+                </a:solidFill>
+                <a:latin typeface="Calibri"/>
+              </a:rPr>
+              <a:t>● ● ●</a:t>
+            </a:r>
+          </a:p>
+        </p:txBody>
+      </p:sp>
+      <p:sp>
+        <p:nvSpPr>
+          <p:cNvPr id="8" name="TextBox 7"/>
+          <p:cNvSpPr txBox="1"/>
+          <p:nvPr/>
+        </p:nvSpPr>
+        <p:spPr>
+          <a:xfrm>
+            <a:off x="777240" y="1719072"/>
+            <a:ext cx="10637215" cy="4133087"/>
           </a:xfrm>
           <a:prstGeom prst="rect">
             <a:avLst/>
@@ -5960,40 +6003,123 @@
           <a:p>
             <a:pPr>
               <a:spcAft>
-                <a:spcPts val="800"/>
+                <a:spcPts val="400"/>
               </a:spcAft>
             </a:pPr>
             <a:r>
-              <a:rPr sz="2000" b="0" i="0">
-                <a:solidFill>
-                  <a:srgbClr val="333333"/>
-                </a:solidFill>
-                <a:latin typeface="Calibri"/>
-              </a:rPr>
-              <a:t>–   max replicas · min replicas · cooldown — anótenlos aunque sean hipotéticos.</a:t>
+              <a:rPr sz="1400" b="0" i="0">
+                <a:solidFill>
+                  <a:srgbClr val="FFFFFF"/>
+                </a:solidFill>
+                <a:latin typeface="Calibri"/>
+              </a:rPr>
+              <a:t>Componente   | Tipo        | Trigger up      | Min | Max | Cooldown</a:t>
             </a:r>
           </a:p>
           <a:p>
             <a:pPr>
               <a:spcAft>
-                <a:spcPts val="800"/>
+                <a:spcPts val="400"/>
               </a:spcAft>
             </a:pPr>
             <a:r>
-              <a:rPr sz="2000" b="0" i="0">
-                <a:solidFill>
-                  <a:srgbClr val="333333"/>
-                </a:solidFill>
-                <a:latin typeface="Calibri"/>
-              </a:rPr>
-              <a:t>–   Escalar mal = costo (enlace con Clase 10).</a:t>
-            </a:r>
-          </a:p>
-        </p:txBody>
-      </p:sp>
-      <p:sp>
-        <p:nvSpPr>
-          <p:cNvPr id="6" name="TextBox 5"/>
+              <a:rPr sz="1400" b="0" i="0">
+                <a:solidFill>
+                  <a:srgbClr val="FFFFFF"/>
+                </a:solidFill>
+                <a:latin typeface="Calibri"/>
+              </a:rPr>
+              <a:t>-------------|-------------|-----------------|-----|-----|---------</a:t>
+            </a:r>
+          </a:p>
+          <a:p>
+            <a:pPr>
+              <a:spcAft>
+                <a:spcPts val="400"/>
+              </a:spcAft>
+            </a:pPr>
+            <a:r>
+              <a:rPr sz="1400" b="0" i="0">
+                <a:solidFill>
+                  <a:srgbClr val="FFFFFF"/>
+                </a:solidFill>
+                <a:latin typeface="Calibri"/>
+              </a:rPr>
+              <a:t>API          | Horizontal  | CPU &gt; 70% / 5m  |  2  |  6  | 5 min</a:t>
+            </a:r>
+          </a:p>
+          <a:p>
+            <a:pPr>
+              <a:spcAft>
+                <a:spcPts val="400"/>
+              </a:spcAft>
+            </a:pPr>
+            <a:r>
+              <a:rPr sz="1400" b="0" i="0">
+                <a:solidFill>
+                  <a:srgbClr val="FFFFFF"/>
+                </a:solidFill>
+                <a:latin typeface="Calibri"/>
+              </a:rPr>
+              <a:t>Worker cola  | Horizontal  | cola &gt; 100 msg  |  1  |  4  | 3 min</a:t>
+            </a:r>
+          </a:p>
+          <a:p>
+            <a:pPr>
+              <a:spcAft>
+                <a:spcPts val="400"/>
+              </a:spcAft>
+            </a:pPr>
+            <a:r>
+              <a:rPr sz="1400" b="0" i="0">
+                <a:solidFill>
+                  <a:srgbClr val="FFFFFF"/>
+                </a:solidFill>
+                <a:latin typeface="Calibri"/>
+              </a:rPr>
+              <a:t>BD primaria  | NO escala   | -               |  1  |  1  | -</a:t>
+            </a:r>
+          </a:p>
+        </p:txBody>
+      </p:sp>
+      <p:sp>
+        <p:nvSpPr>
+          <p:cNvPr id="9" name="TextBox 8"/>
+          <p:cNvSpPr txBox="1"/>
+          <p:nvPr/>
+        </p:nvSpPr>
+        <p:spPr>
+          <a:xfrm>
+            <a:off x="457200" y="6080760"/>
+            <a:ext cx="11277295" cy="320040"/>
+          </a:xfrm>
+          <a:prstGeom prst="rect">
+            <a:avLst/>
+          </a:prstGeom>
+          <a:noFill/>
+        </p:spPr>
+        <p:txBody>
+          <a:bodyPr wrap="square">
+            <a:spAutoFit/>
+          </a:bodyPr>
+          <a:lstStyle/>
+          <a:p>
+            <a:pPr algn="ctr"/>
+            <a:r>
+              <a:rPr sz="1200" b="0" i="1">
+                <a:solidFill>
+                  <a:srgbClr val="666666"/>
+                </a:solidFill>
+                <a:latin typeface="Calibri"/>
+              </a:rPr>
+              <a:t>El 'max' es lo que evita que la factura escale sola. La BD primaria casi nunca escala horizontal.</a:t>
+            </a:r>
+          </a:p>
+        </p:txBody>
+      </p:sp>
+      <p:sp>
+        <p:nvSpPr>
+          <p:cNvPr id="10" name="TextBox 9"/>
           <p:cNvSpPr txBox="1"/>
           <p:nvPr/>
         </p:nvSpPr>
@@ -6061,7 +6187,7 @@
         <p:spPr>
           <a:xfrm>
             <a:off x="0" y="0"/>
-            <a:ext cx="12191695" cy="960120"/>
+            <a:ext cx="12191695" cy="1170432"/>
           </a:xfrm>
           <a:prstGeom prst="rect">
             <a:avLst/>
@@ -6103,7 +6229,7 @@
         </p:nvSpPr>
         <p:spPr>
           <a:xfrm>
-            <a:off x="0" y="960120"/>
+            <a:off x="0" y="1170432"/>
             <a:ext cx="12191695" cy="41148"/>
           </a:xfrm>
           <a:prstGeom prst="rect">
@@ -6147,7 +6273,7 @@
         <p:spPr>
           <a:xfrm>
             <a:off x="457200" y="164592"/>
-            <a:ext cx="11277295" cy="502920"/>
+            <a:ext cx="11277295" cy="384048"/>
           </a:xfrm>
           <a:prstGeom prst="rect">
             <a:avLst/>
@@ -6167,21 +6293,55 @@
                 </a:solidFill>
                 <a:latin typeface="Calibri"/>
               </a:rPr>
-              <a:t>Politica de autoescalado (tabla, no prosa)</a:t>
-            </a:r>
-          </a:p>
-        </p:txBody>
-      </p:sp>
-      <p:sp>
-        <p:nvSpPr>
-          <p:cNvPr id="5" name="Rounded Rectangle 4"/>
+              <a:t>Herramientas de hoy</a:t>
+            </a:r>
+          </a:p>
+        </p:txBody>
+      </p:sp>
+      <p:sp>
+        <p:nvSpPr>
+          <p:cNvPr id="5" name="TextBox 4"/>
+          <p:cNvSpPr txBox="1"/>
+          <p:nvPr/>
+        </p:nvSpPr>
+        <p:spPr>
+          <a:xfrm>
+            <a:off x="457200" y="566928"/>
+            <a:ext cx="11277295" cy="411480"/>
+          </a:xfrm>
+          <a:prstGeom prst="rect">
+            <a:avLst/>
+          </a:prstGeom>
+          <a:noFill/>
+        </p:spPr>
+        <p:txBody>
+          <a:bodyPr wrap="square">
+            <a:spAutoFit/>
+          </a:bodyPr>
+          <a:lstStyle/>
+          <a:p>
+            <a:r>
+              <a:rPr sz="1400" b="0" i="0">
+                <a:solidFill>
+                  <a:srgbClr val="B8D8EE"/>
+                </a:solidFill>
+                <a:latin typeface="Calibri"/>
+              </a:rPr>
+              <a:t>Gratis · navegador o free tier · sin cuenta de pago</a:t>
+            </a:r>
+          </a:p>
+        </p:txBody>
+      </p:sp>
+      <p:sp>
+        <p:nvSpPr>
+          <p:cNvPr id="6" name="Rounded Rectangle 5"/>
           <p:cNvSpPr/>
           <p:nvPr/>
         </p:nvSpPr>
         <p:spPr>
           <a:xfrm>
-            <a:off x="457200" y="1261872"/>
-            <a:ext cx="11277295" cy="4773168"/>
+            <a:off x="457200" y="1591056"/>
+            <a:ext cx="3624986" cy="2299716"/>
           </a:xfrm>
           <a:prstGeom prst="roundRect">
             <a:avLst>
@@ -6189,7 +6349,7 @@
             </a:avLst>
           </a:prstGeom>
           <a:solidFill>
-            <a:srgbClr val="1E2A38"/>
+            <a:srgbClr val="F2F2F2"/>
           </a:solidFill>
           <a:ln>
             <a:noFill/>
@@ -6219,14 +6379,14 @@
       </p:sp>
       <p:sp>
         <p:nvSpPr>
-          <p:cNvPr id="6" name="Rectangle 5"/>
+          <p:cNvPr id="7" name="Rectangle 6"/>
           <p:cNvSpPr/>
           <p:nvPr/>
         </p:nvSpPr>
         <p:spPr>
           <a:xfrm>
-            <a:off x="457200" y="1261872"/>
-            <a:ext cx="11277295" cy="320040"/>
+            <a:off x="457200" y="1591056"/>
+            <a:ext cx="3624986" cy="64008"/>
           </a:xfrm>
           <a:prstGeom prst="rect">
             <a:avLst/>
@@ -6262,14 +6422,81 @@
       </p:sp>
       <p:sp>
         <p:nvSpPr>
-          <p:cNvPr id="7" name="TextBox 6"/>
+          <p:cNvPr id="8" name="Rectangle 7"/>
+          <p:cNvSpPr/>
+          <p:nvPr/>
+        </p:nvSpPr>
+        <p:spPr>
+          <a:xfrm>
+            <a:off x="457200" y="1655064"/>
+            <a:ext cx="3624986" cy="27432"/>
+          </a:xfrm>
+          <a:prstGeom prst="rect">
+            <a:avLst/>
+          </a:prstGeom>
+          <a:solidFill>
+            <a:srgbClr val="FFD000"/>
+          </a:solidFill>
+          <a:ln>
+            <a:noFill/>
+          </a:ln>
+        </p:spPr>
+        <p:style>
+          <a:lnRef idx="1">
+            <a:schemeClr val="accent1"/>
+          </a:lnRef>
+          <a:fillRef idx="3">
+            <a:schemeClr val="accent1"/>
+          </a:fillRef>
+          <a:effectRef idx="2">
+            <a:schemeClr val="accent1"/>
+          </a:effectRef>
+          <a:fontRef idx="minor">
+            <a:schemeClr val="lt1"/>
+          </a:fontRef>
+        </p:style>
+        <p:txBody>
+          <a:bodyPr rtlCol="0" anchor="ctr"/>
+          <a:lstStyle/>
+          <a:p>
+            <a:pPr algn="ctr"/>
+          </a:p>
+        </p:txBody>
+      </p:sp>
+      <p:pic>
+        <p:nvPicPr>
+          <p:cNvPr id="9" name="Picture 8" descr="google_docs.png"/>
+          <p:cNvPicPr>
+            <a:picLocks noChangeAspect="1"/>
+          </p:cNvPicPr>
+          <p:nvPr/>
+        </p:nvPicPr>
+        <p:blipFill>
+          <a:blip r:embed="rId2"/>
+          <a:stretch>
+            <a:fillRect/>
+          </a:stretch>
+        </p:blipFill>
+        <p:spPr>
+          <a:xfrm>
+            <a:off x="1659331" y="1847087"/>
+            <a:ext cx="1220724" cy="1220724"/>
+          </a:xfrm>
+          <a:prstGeom prst="rect">
+            <a:avLst/>
+          </a:prstGeom>
+        </p:spPr>
+      </p:pic>
+      <p:sp>
+        <p:nvSpPr>
+          <p:cNvPr id="10" name="TextBox 9"/>
           <p:cNvSpPr txBox="1"/>
           <p:nvPr/>
         </p:nvSpPr>
         <p:spPr>
           <a:xfrm>
-            <a:off x="685800" y="1307592"/>
-            <a:ext cx="10820095" cy="256032"/>
+            <a:off x="530352" y="3159251"/>
+            <a:ext cx="3478682" cy="621792"/>
           </a:xfrm>
           <a:prstGeom prst="rect">
             <a:avLst/>
@@ -6277,31 +6504,203 @@
           <a:noFill/>
         </p:spPr>
         <p:txBody>
-          <a:bodyPr wrap="square" anchor="ctr"/>
-          <a:lstStyle/>
-          <a:p>
-            <a:r>
-              <a:rPr sz="1000" b="1" i="0">
-                <a:solidFill>
-                  <a:srgbClr val="269CCB"/>
-                </a:solidFill>
-                <a:latin typeface="Calibri"/>
-              </a:rPr>
-              <a:t>● ● ●</a:t>
-            </a:r>
-          </a:p>
-        </p:txBody>
-      </p:sp>
-      <p:sp>
-        <p:nvSpPr>
-          <p:cNvPr id="8" name="TextBox 7"/>
+          <a:bodyPr wrap="square" anchor="t"/>
+          <a:lstStyle/>
+          <a:p>
+            <a:pPr algn="ctr"/>
+            <a:r>
+              <a:rPr sz="1300" b="1" i="0">
+                <a:solidFill>
+                  <a:srgbClr val="095292"/>
+                </a:solidFill>
+                <a:latin typeface="Calibri"/>
+              </a:rPr>
+              <a:t>Google Docs</a:t>
+            </a:r>
+          </a:p>
+          <a:p>
+            <a:pPr algn="ctr">
+              <a:spcBef>
+                <a:spcPts val="200"/>
+              </a:spcBef>
+            </a:pPr>
+            <a:r>
+              <a:rPr sz="1000" b="0" i="0">
+                <a:solidFill>
+                  <a:srgbClr val="666666"/>
+                </a:solidFill>
+                <a:latin typeface="Calibri"/>
+              </a:rPr>
+              <a:t>Politica de escalado</a:t>
+            </a:r>
+          </a:p>
+        </p:txBody>
+      </p:sp>
+      <p:sp>
+        <p:nvSpPr>
+          <p:cNvPr id="11" name="Rounded Rectangle 10"/>
+          <p:cNvSpPr/>
+          <p:nvPr/>
+        </p:nvSpPr>
+        <p:spPr>
+          <a:xfrm>
+            <a:off x="4283354" y="1591056"/>
+            <a:ext cx="3624986" cy="2299716"/>
+          </a:xfrm>
+          <a:prstGeom prst="roundRect">
+            <a:avLst>
+              <a:gd name="adj" fmla="val 12000"/>
+            </a:avLst>
+          </a:prstGeom>
+          <a:solidFill>
+            <a:srgbClr val="F2F2F2"/>
+          </a:solidFill>
+          <a:ln>
+            <a:noFill/>
+          </a:ln>
+        </p:spPr>
+        <p:style>
+          <a:lnRef idx="1">
+            <a:schemeClr val="accent1"/>
+          </a:lnRef>
+          <a:fillRef idx="3">
+            <a:schemeClr val="accent1"/>
+          </a:fillRef>
+          <a:effectRef idx="2">
+            <a:schemeClr val="accent1"/>
+          </a:effectRef>
+          <a:fontRef idx="minor">
+            <a:schemeClr val="lt1"/>
+          </a:fontRef>
+        </p:style>
+        <p:txBody>
+          <a:bodyPr rtlCol="0" anchor="ctr"/>
+          <a:lstStyle/>
+          <a:p>
+            <a:pPr algn="ctr"/>
+          </a:p>
+        </p:txBody>
+      </p:sp>
+      <p:sp>
+        <p:nvSpPr>
+          <p:cNvPr id="12" name="Rectangle 11"/>
+          <p:cNvSpPr/>
+          <p:nvPr/>
+        </p:nvSpPr>
+        <p:spPr>
+          <a:xfrm>
+            <a:off x="4283354" y="1591056"/>
+            <a:ext cx="3624986" cy="64008"/>
+          </a:xfrm>
+          <a:prstGeom prst="rect">
+            <a:avLst/>
+          </a:prstGeom>
+          <a:solidFill>
+            <a:srgbClr val="095292"/>
+          </a:solidFill>
+          <a:ln>
+            <a:noFill/>
+          </a:ln>
+        </p:spPr>
+        <p:style>
+          <a:lnRef idx="1">
+            <a:schemeClr val="accent1"/>
+          </a:lnRef>
+          <a:fillRef idx="3">
+            <a:schemeClr val="accent1"/>
+          </a:fillRef>
+          <a:effectRef idx="2">
+            <a:schemeClr val="accent1"/>
+          </a:effectRef>
+          <a:fontRef idx="minor">
+            <a:schemeClr val="lt1"/>
+          </a:fontRef>
+        </p:style>
+        <p:txBody>
+          <a:bodyPr rtlCol="0" anchor="ctr"/>
+          <a:lstStyle/>
+          <a:p>
+            <a:pPr algn="ctr"/>
+          </a:p>
+        </p:txBody>
+      </p:sp>
+      <p:sp>
+        <p:nvSpPr>
+          <p:cNvPr id="13" name="Rectangle 12"/>
+          <p:cNvSpPr/>
+          <p:nvPr/>
+        </p:nvSpPr>
+        <p:spPr>
+          <a:xfrm>
+            <a:off x="4283354" y="1655064"/>
+            <a:ext cx="3624986" cy="27432"/>
+          </a:xfrm>
+          <a:prstGeom prst="rect">
+            <a:avLst/>
+          </a:prstGeom>
+          <a:solidFill>
+            <a:srgbClr val="FFD000"/>
+          </a:solidFill>
+          <a:ln>
+            <a:noFill/>
+          </a:ln>
+        </p:spPr>
+        <p:style>
+          <a:lnRef idx="1">
+            <a:schemeClr val="accent1"/>
+          </a:lnRef>
+          <a:fillRef idx="3">
+            <a:schemeClr val="accent1"/>
+          </a:fillRef>
+          <a:effectRef idx="2">
+            <a:schemeClr val="accent1"/>
+          </a:effectRef>
+          <a:fontRef idx="minor">
+            <a:schemeClr val="lt1"/>
+          </a:fontRef>
+        </p:style>
+        <p:txBody>
+          <a:bodyPr rtlCol="0" anchor="ctr"/>
+          <a:lstStyle/>
+          <a:p>
+            <a:pPr algn="ctr"/>
+          </a:p>
+        </p:txBody>
+      </p:sp>
+      <p:pic>
+        <p:nvPicPr>
+          <p:cNvPr id="14" name="Picture 13" descr="drawio.png"/>
+          <p:cNvPicPr>
+            <a:picLocks noChangeAspect="1"/>
+          </p:cNvPicPr>
+          <p:nvPr/>
+        </p:nvPicPr>
+        <p:blipFill>
+          <a:blip r:embed="rId3"/>
+          <a:stretch>
+            <a:fillRect/>
+          </a:stretch>
+        </p:blipFill>
+        <p:spPr>
+          <a:xfrm>
+            <a:off x="5485485" y="1847087"/>
+            <a:ext cx="1220724" cy="1220724"/>
+          </a:xfrm>
+          <a:prstGeom prst="rect">
+            <a:avLst/>
+          </a:prstGeom>
+        </p:spPr>
+      </p:pic>
+      <p:sp>
+        <p:nvSpPr>
+          <p:cNvPr id="15" name="TextBox 14"/>
           <p:cNvSpPr txBox="1"/>
           <p:nvPr/>
         </p:nvSpPr>
         <p:spPr>
           <a:xfrm>
-            <a:off x="777240" y="1719072"/>
-            <a:ext cx="10637215" cy="4133087"/>
+            <a:off x="4356506" y="3159251"/>
+            <a:ext cx="3478682" cy="621792"/>
           </a:xfrm>
           <a:prstGeom prst="rect">
             <a:avLst/>
@@ -6309,130 +6708,449 @@
           <a:noFill/>
         </p:spPr>
         <p:txBody>
-          <a:bodyPr wrap="square">
-            <a:spAutoFit/>
-          </a:bodyPr>
-          <a:lstStyle/>
-          <a:p>
-            <a:pPr>
-              <a:spcAft>
-                <a:spcPts val="400"/>
-              </a:spcAft>
+          <a:bodyPr wrap="square" anchor="t"/>
+          <a:lstStyle/>
+          <a:p>
+            <a:pPr algn="ctr"/>
+            <a:r>
+              <a:rPr sz="1300" b="1" i="0">
+                <a:solidFill>
+                  <a:srgbClr val="095292"/>
+                </a:solidFill>
+                <a:latin typeface="Calibri"/>
+              </a:rPr>
+              <a:t>draw.io</a:t>
+            </a:r>
+          </a:p>
+          <a:p>
+            <a:pPr algn="ctr">
+              <a:spcBef>
+                <a:spcPts val="200"/>
+              </a:spcBef>
             </a:pPr>
             <a:r>
-              <a:rPr sz="1400" b="0" i="0">
-                <a:solidFill>
-                  <a:srgbClr val="FFFFFF"/>
-                </a:solidFill>
-                <a:latin typeface="Calibri"/>
-              </a:rPr>
-              <a:t>Componente   | Tipo        | Trigger up      | Min | Max | Cooldown</a:t>
-            </a:r>
-          </a:p>
-          <a:p>
-            <a:pPr>
-              <a:spcAft>
-                <a:spcPts val="400"/>
-              </a:spcAft>
+              <a:rPr sz="1000" b="0" i="0">
+                <a:solidFill>
+                  <a:srgbClr val="666666"/>
+                </a:solidFill>
+                <a:latin typeface="Calibri"/>
+              </a:rPr>
+              <a:t>Nota en Deployment</a:t>
+            </a:r>
+          </a:p>
+        </p:txBody>
+      </p:sp>
+      <p:sp>
+        <p:nvSpPr>
+          <p:cNvPr id="16" name="Rounded Rectangle 15"/>
+          <p:cNvSpPr/>
+          <p:nvPr/>
+        </p:nvSpPr>
+        <p:spPr>
+          <a:xfrm>
+            <a:off x="8109508" y="1591056"/>
+            <a:ext cx="3624986" cy="2299716"/>
+          </a:xfrm>
+          <a:prstGeom prst="roundRect">
+            <a:avLst>
+              <a:gd name="adj" fmla="val 12000"/>
+            </a:avLst>
+          </a:prstGeom>
+          <a:solidFill>
+            <a:srgbClr val="F2F2F2"/>
+          </a:solidFill>
+          <a:ln>
+            <a:noFill/>
+          </a:ln>
+        </p:spPr>
+        <p:style>
+          <a:lnRef idx="1">
+            <a:schemeClr val="accent1"/>
+          </a:lnRef>
+          <a:fillRef idx="3">
+            <a:schemeClr val="accent1"/>
+          </a:fillRef>
+          <a:effectRef idx="2">
+            <a:schemeClr val="accent1"/>
+          </a:effectRef>
+          <a:fontRef idx="minor">
+            <a:schemeClr val="lt1"/>
+          </a:fontRef>
+        </p:style>
+        <p:txBody>
+          <a:bodyPr rtlCol="0" anchor="ctr"/>
+          <a:lstStyle/>
+          <a:p>
+            <a:pPr algn="ctr"/>
+          </a:p>
+        </p:txBody>
+      </p:sp>
+      <p:sp>
+        <p:nvSpPr>
+          <p:cNvPr id="17" name="Rectangle 16"/>
+          <p:cNvSpPr/>
+          <p:nvPr/>
+        </p:nvSpPr>
+        <p:spPr>
+          <a:xfrm>
+            <a:off x="8109508" y="1591056"/>
+            <a:ext cx="3624986" cy="64008"/>
+          </a:xfrm>
+          <a:prstGeom prst="rect">
+            <a:avLst/>
+          </a:prstGeom>
+          <a:solidFill>
+            <a:srgbClr val="095292"/>
+          </a:solidFill>
+          <a:ln>
+            <a:noFill/>
+          </a:ln>
+        </p:spPr>
+        <p:style>
+          <a:lnRef idx="1">
+            <a:schemeClr val="accent1"/>
+          </a:lnRef>
+          <a:fillRef idx="3">
+            <a:schemeClr val="accent1"/>
+          </a:fillRef>
+          <a:effectRef idx="2">
+            <a:schemeClr val="accent1"/>
+          </a:effectRef>
+          <a:fontRef idx="minor">
+            <a:schemeClr val="lt1"/>
+          </a:fontRef>
+        </p:style>
+        <p:txBody>
+          <a:bodyPr rtlCol="0" anchor="ctr"/>
+          <a:lstStyle/>
+          <a:p>
+            <a:pPr algn="ctr"/>
+          </a:p>
+        </p:txBody>
+      </p:sp>
+      <p:sp>
+        <p:nvSpPr>
+          <p:cNvPr id="18" name="Rectangle 17"/>
+          <p:cNvSpPr/>
+          <p:nvPr/>
+        </p:nvSpPr>
+        <p:spPr>
+          <a:xfrm>
+            <a:off x="8109508" y="1655064"/>
+            <a:ext cx="3624986" cy="27432"/>
+          </a:xfrm>
+          <a:prstGeom prst="rect">
+            <a:avLst/>
+          </a:prstGeom>
+          <a:solidFill>
+            <a:srgbClr val="FFD000"/>
+          </a:solidFill>
+          <a:ln>
+            <a:noFill/>
+          </a:ln>
+        </p:spPr>
+        <p:style>
+          <a:lnRef idx="1">
+            <a:schemeClr val="accent1"/>
+          </a:lnRef>
+          <a:fillRef idx="3">
+            <a:schemeClr val="accent1"/>
+          </a:fillRef>
+          <a:effectRef idx="2">
+            <a:schemeClr val="accent1"/>
+          </a:effectRef>
+          <a:fontRef idx="minor">
+            <a:schemeClr val="lt1"/>
+          </a:fontRef>
+        </p:style>
+        <p:txBody>
+          <a:bodyPr rtlCol="0" anchor="ctr"/>
+          <a:lstStyle/>
+          <a:p>
+            <a:pPr algn="ctr"/>
+          </a:p>
+        </p:txBody>
+      </p:sp>
+      <p:pic>
+        <p:nvPicPr>
+          <p:cNvPr id="19" name="Picture 18" descr="mermaid.png"/>
+          <p:cNvPicPr>
+            <a:picLocks noChangeAspect="1"/>
+          </p:cNvPicPr>
+          <p:nvPr/>
+        </p:nvPicPr>
+        <p:blipFill>
+          <a:blip r:embed="rId4"/>
+          <a:stretch>
+            <a:fillRect/>
+          </a:stretch>
+        </p:blipFill>
+        <p:spPr>
+          <a:xfrm>
+            <a:off x="9311640" y="1847087"/>
+            <a:ext cx="1220724" cy="1220724"/>
+          </a:xfrm>
+          <a:prstGeom prst="rect">
+            <a:avLst/>
+          </a:prstGeom>
+        </p:spPr>
+      </p:pic>
+      <p:sp>
+        <p:nvSpPr>
+          <p:cNvPr id="20" name="TextBox 19"/>
+          <p:cNvSpPr txBox="1"/>
+          <p:nvPr/>
+        </p:nvSpPr>
+        <p:spPr>
+          <a:xfrm>
+            <a:off x="8182660" y="3159251"/>
+            <a:ext cx="3478682" cy="621792"/>
+          </a:xfrm>
+          <a:prstGeom prst="rect">
+            <a:avLst/>
+          </a:prstGeom>
+          <a:noFill/>
+        </p:spPr>
+        <p:txBody>
+          <a:bodyPr wrap="square" anchor="t"/>
+          <a:lstStyle/>
+          <a:p>
+            <a:pPr algn="ctr"/>
+            <a:r>
+              <a:rPr sz="1300" b="1" i="0">
+                <a:solidFill>
+                  <a:srgbClr val="095292"/>
+                </a:solidFill>
+                <a:latin typeface="Calibri"/>
+              </a:rPr>
+              <a:t>Mermaid</a:t>
+            </a:r>
+          </a:p>
+          <a:p>
+            <a:pPr algn="ctr">
+              <a:spcBef>
+                <a:spcPts val="200"/>
+              </a:spcBef>
             </a:pPr>
             <a:r>
-              <a:rPr sz="1400" b="0" i="0">
-                <a:solidFill>
-                  <a:srgbClr val="FFFFFF"/>
-                </a:solidFill>
-                <a:latin typeface="Calibri"/>
-              </a:rPr>
-              <a:t>-------------|-------------|-----------------|-----|-----|---------</a:t>
-            </a:r>
-          </a:p>
-          <a:p>
-            <a:pPr>
-              <a:spcAft>
-                <a:spcPts val="400"/>
-              </a:spcAft>
+              <a:rPr sz="1000" b="0" i="0">
+                <a:solidFill>
+                  <a:srgbClr val="666666"/>
+                </a:solidFill>
+                <a:latin typeface="Calibri"/>
+              </a:rPr>
+              <a:t>Codigo del diagrama</a:t>
+            </a:r>
+          </a:p>
+        </p:txBody>
+      </p:sp>
+      <p:sp>
+        <p:nvSpPr>
+          <p:cNvPr id="21" name="Rounded Rectangle 20"/>
+          <p:cNvSpPr/>
+          <p:nvPr/>
+        </p:nvSpPr>
+        <p:spPr>
+          <a:xfrm>
+            <a:off x="4283354" y="4055364"/>
+            <a:ext cx="3624986" cy="2299716"/>
+          </a:xfrm>
+          <a:prstGeom prst="roundRect">
+            <a:avLst>
+              <a:gd name="adj" fmla="val 12000"/>
+            </a:avLst>
+          </a:prstGeom>
+          <a:solidFill>
+            <a:srgbClr val="F2F2F2"/>
+          </a:solidFill>
+          <a:ln>
+            <a:noFill/>
+          </a:ln>
+        </p:spPr>
+        <p:style>
+          <a:lnRef idx="1">
+            <a:schemeClr val="accent1"/>
+          </a:lnRef>
+          <a:fillRef idx="3">
+            <a:schemeClr val="accent1"/>
+          </a:fillRef>
+          <a:effectRef idx="2">
+            <a:schemeClr val="accent1"/>
+          </a:effectRef>
+          <a:fontRef idx="minor">
+            <a:schemeClr val="lt1"/>
+          </a:fontRef>
+        </p:style>
+        <p:txBody>
+          <a:bodyPr rtlCol="0" anchor="ctr"/>
+          <a:lstStyle/>
+          <a:p>
+            <a:pPr algn="ctr"/>
+          </a:p>
+        </p:txBody>
+      </p:sp>
+      <p:sp>
+        <p:nvSpPr>
+          <p:cNvPr id="22" name="Rectangle 21"/>
+          <p:cNvSpPr/>
+          <p:nvPr/>
+        </p:nvSpPr>
+        <p:spPr>
+          <a:xfrm>
+            <a:off x="4283354" y="4055364"/>
+            <a:ext cx="3624986" cy="64008"/>
+          </a:xfrm>
+          <a:prstGeom prst="rect">
+            <a:avLst/>
+          </a:prstGeom>
+          <a:solidFill>
+            <a:srgbClr val="095292"/>
+          </a:solidFill>
+          <a:ln>
+            <a:noFill/>
+          </a:ln>
+        </p:spPr>
+        <p:style>
+          <a:lnRef idx="1">
+            <a:schemeClr val="accent1"/>
+          </a:lnRef>
+          <a:fillRef idx="3">
+            <a:schemeClr val="accent1"/>
+          </a:fillRef>
+          <a:effectRef idx="2">
+            <a:schemeClr val="accent1"/>
+          </a:effectRef>
+          <a:fontRef idx="minor">
+            <a:schemeClr val="lt1"/>
+          </a:fontRef>
+        </p:style>
+        <p:txBody>
+          <a:bodyPr rtlCol="0" anchor="ctr"/>
+          <a:lstStyle/>
+          <a:p>
+            <a:pPr algn="ctr"/>
+          </a:p>
+        </p:txBody>
+      </p:sp>
+      <p:sp>
+        <p:nvSpPr>
+          <p:cNvPr id="23" name="Rectangle 22"/>
+          <p:cNvSpPr/>
+          <p:nvPr/>
+        </p:nvSpPr>
+        <p:spPr>
+          <a:xfrm>
+            <a:off x="4283354" y="4119372"/>
+            <a:ext cx="3624986" cy="27432"/>
+          </a:xfrm>
+          <a:prstGeom prst="rect">
+            <a:avLst/>
+          </a:prstGeom>
+          <a:solidFill>
+            <a:srgbClr val="FFD000"/>
+          </a:solidFill>
+          <a:ln>
+            <a:noFill/>
+          </a:ln>
+        </p:spPr>
+        <p:style>
+          <a:lnRef idx="1">
+            <a:schemeClr val="accent1"/>
+          </a:lnRef>
+          <a:fillRef idx="3">
+            <a:schemeClr val="accent1"/>
+          </a:fillRef>
+          <a:effectRef idx="2">
+            <a:schemeClr val="accent1"/>
+          </a:effectRef>
+          <a:fontRef idx="minor">
+            <a:schemeClr val="lt1"/>
+          </a:fontRef>
+        </p:style>
+        <p:txBody>
+          <a:bodyPr rtlCol="0" anchor="ctr"/>
+          <a:lstStyle/>
+          <a:p>
+            <a:pPr algn="ctr"/>
+          </a:p>
+        </p:txBody>
+      </p:sp>
+      <p:pic>
+        <p:nvPicPr>
+          <p:cNvPr id="24" name="Picture 23" descr="examlab.png"/>
+          <p:cNvPicPr>
+            <a:picLocks noChangeAspect="1"/>
+          </p:cNvPicPr>
+          <p:nvPr/>
+        </p:nvPicPr>
+        <p:blipFill>
+          <a:blip r:embed="rId5"/>
+          <a:stretch>
+            <a:fillRect/>
+          </a:stretch>
+        </p:blipFill>
+        <p:spPr>
+          <a:xfrm>
+            <a:off x="5485485" y="4311396"/>
+            <a:ext cx="1220724" cy="1220724"/>
+          </a:xfrm>
+          <a:prstGeom prst="rect">
+            <a:avLst/>
+          </a:prstGeom>
+        </p:spPr>
+      </p:pic>
+      <p:sp>
+        <p:nvSpPr>
+          <p:cNvPr id="25" name="TextBox 24"/>
+          <p:cNvSpPr txBox="1"/>
+          <p:nvPr/>
+        </p:nvSpPr>
+        <p:spPr>
+          <a:xfrm>
+            <a:off x="4356506" y="5623560"/>
+            <a:ext cx="3478682" cy="621792"/>
+          </a:xfrm>
+          <a:prstGeom prst="rect">
+            <a:avLst/>
+          </a:prstGeom>
+          <a:noFill/>
+        </p:spPr>
+        <p:txBody>
+          <a:bodyPr wrap="square" anchor="t"/>
+          <a:lstStyle/>
+          <a:p>
+            <a:pPr algn="ctr"/>
+            <a:r>
+              <a:rPr sz="1300" b="1" i="0">
+                <a:solidFill>
+                  <a:srgbClr val="095292"/>
+                </a:solidFill>
+                <a:latin typeface="Calibri"/>
+              </a:rPr>
+              <a:t>la plataforma del curso</a:t>
+            </a:r>
+          </a:p>
+          <a:p>
+            <a:pPr algn="ctr">
+              <a:spcBef>
+                <a:spcPts val="200"/>
+              </a:spcBef>
             </a:pPr>
             <a:r>
-              <a:rPr sz="1400" b="0" i="0">
-                <a:solidFill>
-                  <a:srgbClr val="FFFFFF"/>
-                </a:solidFill>
-                <a:latin typeface="Calibri"/>
-              </a:rPr>
-              <a:t>API          | Horizontal  | CPU &gt; 70% / 5m  |  2  |  6  | 5 min</a:t>
-            </a:r>
-          </a:p>
-          <a:p>
-            <a:pPr>
-              <a:spcAft>
-                <a:spcPts val="400"/>
-              </a:spcAft>
-            </a:pPr>
-            <a:r>
-              <a:rPr sz="1400" b="0" i="0">
-                <a:solidFill>
-                  <a:srgbClr val="FFFFFF"/>
-                </a:solidFill>
-                <a:latin typeface="Calibri"/>
-              </a:rPr>
-              <a:t>Worker cola  | Horizontal  | cola &gt; 100 msg  |  1  |  4  | 3 min</a:t>
-            </a:r>
-          </a:p>
-          <a:p>
-            <a:pPr>
-              <a:spcAft>
-                <a:spcPts val="400"/>
-              </a:spcAft>
-            </a:pPr>
-            <a:r>
-              <a:rPr sz="1400" b="0" i="0">
-                <a:solidFill>
-                  <a:srgbClr val="FFFFFF"/>
-                </a:solidFill>
-                <a:latin typeface="Calibri"/>
-              </a:rPr>
-              <a:t>BD primaria  | NO escala   | -               |  1  |  1  | -</a:t>
-            </a:r>
-          </a:p>
-        </p:txBody>
-      </p:sp>
-      <p:sp>
-        <p:nvSpPr>
-          <p:cNvPr id="9" name="TextBox 8"/>
-          <p:cNvSpPr txBox="1"/>
-          <p:nvPr/>
-        </p:nvSpPr>
-        <p:spPr>
-          <a:xfrm>
-            <a:off x="457200" y="6080760"/>
-            <a:ext cx="11277295" cy="320040"/>
-          </a:xfrm>
-          <a:prstGeom prst="rect">
-            <a:avLst/>
-          </a:prstGeom>
-          <a:noFill/>
-        </p:spPr>
-        <p:txBody>
-          <a:bodyPr wrap="square">
-            <a:spAutoFit/>
-          </a:bodyPr>
-          <a:lstStyle/>
-          <a:p>
-            <a:pPr algn="ctr"/>
-            <a:r>
-              <a:rPr sz="1200" b="0" i="1">
+              <a:rPr sz="1000" b="0" i="0">
                 <a:solidFill>
                   <a:srgbClr val="666666"/>
                 </a:solidFill>
                 <a:latin typeface="Calibri"/>
               </a:rPr>
-              <a:t>El 'max' es lo que evita que la factura escale sola. La BD primaria casi nunca escala horizontal.</a:t>
-            </a:r>
-          </a:p>
-        </p:txBody>
-      </p:sp>
-      <p:sp>
-        <p:nvSpPr>
-          <p:cNvPr id="10" name="TextBox 9"/>
+              <a:t>Donde se entrega</a:t>
+            </a:r>
+          </a:p>
+        </p:txBody>
+      </p:sp>
+      <p:sp>
+        <p:nvSpPr>
+          <p:cNvPr id="26" name="TextBox 25"/>
           <p:cNvSpPr txBox="1"/>
           <p:nvPr/>
         </p:nvSpPr>
@@ -6606,7 +7324,7 @@
                 </a:solidFill>
                 <a:latin typeface="Calibri"/>
               </a:rPr>
-              <a:t>Herramientas de hoy</a:t>
+              <a:t>Del boceto a la plataforma del curso (diagrama)</a:t>
             </a:r>
           </a:p>
         </p:txBody>
@@ -6640,7 +7358,7 @@
                 </a:solidFill>
                 <a:latin typeface="Calibri"/>
               </a:rPr>
-              <a:t>Gratis · navegador o free tier · sin cuenta de pago</a:t>
+              <a:t>El diagrama se entrega como código Mermaid dentro de la plataforma del curso, no como imagen</a:t>
             </a:r>
           </a:p>
         </p:txBody>
@@ -6653,8 +7371,8 @@
         </p:nvSpPr>
         <p:spPr>
           <a:xfrm>
-            <a:off x="457200" y="1591056"/>
-            <a:ext cx="3624986" cy="2299716"/>
+            <a:off x="457200" y="1659636"/>
+            <a:ext cx="11277295" cy="1051560"/>
           </a:xfrm>
           <a:prstGeom prst="roundRect">
             <a:avLst>
@@ -6692,17 +7410,19 @@
       </p:sp>
       <p:sp>
         <p:nvSpPr>
-          <p:cNvPr id="7" name="Rectangle 6"/>
+          <p:cNvPr id="7" name="Rounded Rectangle 6"/>
           <p:cNvSpPr/>
           <p:nvPr/>
         </p:nvSpPr>
         <p:spPr>
           <a:xfrm>
-            <a:off x="457200" y="1591056"/>
-            <a:ext cx="3624986" cy="64008"/>
-          </a:xfrm>
-          <a:prstGeom prst="rect">
-            <a:avLst/>
+            <a:off x="594360" y="1965960"/>
+            <a:ext cx="438912" cy="438912"/>
+          </a:xfrm>
+          <a:prstGeom prst="roundRect">
+            <a:avLst>
+              <a:gd name="adj" fmla="val 12000"/>
+            </a:avLst>
           </a:prstGeom>
           <a:solidFill>
             <a:srgbClr val="095292"/>
@@ -6735,20 +7455,103 @@
       </p:sp>
       <p:sp>
         <p:nvSpPr>
-          <p:cNvPr id="8" name="Rectangle 7"/>
+          <p:cNvPr id="8" name="TextBox 7"/>
+          <p:cNvSpPr txBox="1"/>
+          <p:nvPr/>
+        </p:nvSpPr>
+        <p:spPr>
+          <a:xfrm>
+            <a:off x="594360" y="1965960"/>
+            <a:ext cx="438912" cy="438912"/>
+          </a:xfrm>
+          <a:prstGeom prst="rect">
+            <a:avLst/>
+          </a:prstGeom>
+          <a:noFill/>
+        </p:spPr>
+        <p:txBody>
+          <a:bodyPr wrap="square" anchor="ctr"/>
+          <a:lstStyle/>
+          <a:p>
+            <a:pPr algn="ctr"/>
+            <a:r>
+              <a:rPr sz="1600" b="1" i="0">
+                <a:solidFill>
+                  <a:srgbClr val="FFFFFF"/>
+                </a:solidFill>
+                <a:latin typeface="Calibri"/>
+              </a:rPr>
+              <a:t>1</a:t>
+            </a:r>
+          </a:p>
+        </p:txBody>
+      </p:sp>
+      <p:sp>
+        <p:nvSpPr>
+          <p:cNvPr id="9" name="TextBox 8"/>
+          <p:cNvSpPr txBox="1"/>
+          <p:nvPr/>
+        </p:nvSpPr>
+        <p:spPr>
+          <a:xfrm>
+            <a:off x="1188720" y="1751076"/>
+            <a:ext cx="10271455" cy="886968"/>
+          </a:xfrm>
+          <a:prstGeom prst="rect">
+            <a:avLst/>
+          </a:prstGeom>
+          <a:noFill/>
+        </p:spPr>
+        <p:txBody>
+          <a:bodyPr wrap="square" anchor="ctr"/>
+          <a:lstStyle/>
+          <a:p>
+            <a:r>
+              <a:rPr sz="1500" b="1" i="0">
+                <a:solidFill>
+                  <a:srgbClr val="095292"/>
+                </a:solidFill>
+                <a:latin typeface="Calibri"/>
+              </a:rPr>
+              <a:t>Disena visual</a:t>
+            </a:r>
+          </a:p>
+          <a:p>
+            <a:pPr>
+              <a:spcBef>
+                <a:spcPts val="200"/>
+              </a:spcBef>
+            </a:pPr>
+            <a:r>
+              <a:rPr sz="1300" b="0" i="0">
+                <a:solidFill>
+                  <a:srgbClr val="333333"/>
+                </a:solidFill>
+                <a:latin typeface="Calibri"/>
+              </a:rPr>
+              <a:t>Dibuja el diagrama como quieras en Excalidraw o draw.io: es mas rapido arrastrar cajas que escribir codigo, y ahi es donde piensas el modelo.</a:t>
+            </a:r>
+          </a:p>
+        </p:txBody>
+      </p:sp>
+      <p:sp>
+        <p:nvSpPr>
+          <p:cNvPr id="10" name="Rounded Rectangle 9"/>
           <p:cNvSpPr/>
           <p:nvPr/>
         </p:nvSpPr>
         <p:spPr>
           <a:xfrm>
-            <a:off x="457200" y="1655064"/>
-            <a:ext cx="3624986" cy="27432"/>
-          </a:xfrm>
-          <a:prstGeom prst="rect">
-            <a:avLst/>
+            <a:off x="457200" y="2802636"/>
+            <a:ext cx="11277295" cy="1051560"/>
+          </a:xfrm>
+          <a:prstGeom prst="roundRect">
+            <a:avLst>
+              <a:gd name="adj" fmla="val 12000"/>
+            </a:avLst>
           </a:prstGeom>
           <a:solidFill>
-            <a:srgbClr val="FFD000"/>
+            <a:srgbClr val="E8F4FA"/>
           </a:solidFill>
           <a:ln>
             <a:noFill/>
@@ -6776,40 +7579,61 @@
           </a:p>
         </p:txBody>
       </p:sp>
-      <p:pic>
-        <p:nvPicPr>
-          <p:cNvPr id="9" name="Picture 8" descr="google_docs.png"/>
-          <p:cNvPicPr>
-            <a:picLocks noChangeAspect="1"/>
-          </p:cNvPicPr>
-          <p:nvPr/>
-        </p:nvPicPr>
-        <p:blipFill>
-          <a:blip r:embed="rId2"/>
-          <a:stretch>
-            <a:fillRect/>
-          </a:stretch>
-        </p:blipFill>
-        <p:spPr>
-          <a:xfrm>
-            <a:off x="1659331" y="1847087"/>
-            <a:ext cx="1220724" cy="1220724"/>
-          </a:xfrm>
-          <a:prstGeom prst="rect">
-            <a:avLst/>
-          </a:prstGeom>
-        </p:spPr>
-      </p:pic>
-      <p:sp>
-        <p:nvSpPr>
-          <p:cNvPr id="10" name="TextBox 9"/>
+      <p:sp>
+        <p:nvSpPr>
+          <p:cNvPr id="11" name="Rounded Rectangle 10"/>
+          <p:cNvSpPr/>
+          <p:nvPr/>
+        </p:nvSpPr>
+        <p:spPr>
+          <a:xfrm>
+            <a:off x="594360" y="3108960"/>
+            <a:ext cx="438912" cy="438912"/>
+          </a:xfrm>
+          <a:prstGeom prst="roundRect">
+            <a:avLst>
+              <a:gd name="adj" fmla="val 12000"/>
+            </a:avLst>
+          </a:prstGeom>
+          <a:solidFill>
+            <a:srgbClr val="095292"/>
+          </a:solidFill>
+          <a:ln>
+            <a:noFill/>
+          </a:ln>
+        </p:spPr>
+        <p:style>
+          <a:lnRef idx="1">
+            <a:schemeClr val="accent1"/>
+          </a:lnRef>
+          <a:fillRef idx="3">
+            <a:schemeClr val="accent1"/>
+          </a:fillRef>
+          <a:effectRef idx="2">
+            <a:schemeClr val="accent1"/>
+          </a:effectRef>
+          <a:fontRef idx="minor">
+            <a:schemeClr val="lt1"/>
+          </a:fontRef>
+        </p:style>
+        <p:txBody>
+          <a:bodyPr rtlCol="0" anchor="ctr"/>
+          <a:lstStyle/>
+          <a:p>
+            <a:pPr algn="ctr"/>
+          </a:p>
+        </p:txBody>
+      </p:sp>
+      <p:sp>
+        <p:nvSpPr>
+          <p:cNvPr id="12" name="TextBox 11"/>
           <p:cNvSpPr txBox="1"/>
           <p:nvPr/>
         </p:nvSpPr>
         <p:spPr>
           <a:xfrm>
-            <a:off x="530352" y="3159251"/>
-            <a:ext cx="3478682" cy="621792"/>
+            <a:off x="594360" y="3108960"/>
+            <a:ext cx="438912" cy="438912"/>
           </a:xfrm>
           <a:prstGeom prst="rect">
             <a:avLst/>
@@ -6817,48 +7641,80 @@
           <a:noFill/>
         </p:spPr>
         <p:txBody>
-          <a:bodyPr wrap="square" anchor="t"/>
+          <a:bodyPr wrap="square" anchor="ctr"/>
           <a:lstStyle/>
           <a:p>
             <a:pPr algn="ctr"/>
             <a:r>
-              <a:rPr sz="1300" b="1" i="0">
+              <a:rPr sz="1600" b="1" i="0">
+                <a:solidFill>
+                  <a:srgbClr val="FFFFFF"/>
+                </a:solidFill>
+                <a:latin typeface="Calibri"/>
+              </a:rPr>
+              <a:t>2</a:t>
+            </a:r>
+          </a:p>
+        </p:txBody>
+      </p:sp>
+      <p:sp>
+        <p:nvSpPr>
+          <p:cNvPr id="13" name="TextBox 12"/>
+          <p:cNvSpPr txBox="1"/>
+          <p:nvPr/>
+        </p:nvSpPr>
+        <p:spPr>
+          <a:xfrm>
+            <a:off x="1188720" y="2894076"/>
+            <a:ext cx="10271455" cy="886968"/>
+          </a:xfrm>
+          <a:prstGeom prst="rect">
+            <a:avLst/>
+          </a:prstGeom>
+          <a:noFill/>
+        </p:spPr>
+        <p:txBody>
+          <a:bodyPr wrap="square" anchor="ctr"/>
+          <a:lstStyle/>
+          <a:p>
+            <a:r>
+              <a:rPr sz="1500" b="1" i="0">
                 <a:solidFill>
                   <a:srgbClr val="095292"/>
                 </a:solidFill>
                 <a:latin typeface="Calibri"/>
               </a:rPr>
-              <a:t>Google Docs</a:t>
-            </a:r>
-          </a:p>
-          <a:p>
-            <a:pPr algn="ctr">
+              <a:t>Traduce con IA</a:t>
+            </a:r>
+          </a:p>
+          <a:p>
+            <a:pPr>
               <a:spcBef>
                 <a:spcPts val="200"/>
               </a:spcBef>
             </a:pPr>
             <a:r>
-              <a:rPr sz="1000" b="0" i="0">
-                <a:solidFill>
-                  <a:srgbClr val="666666"/>
-                </a:solidFill>
-                <a:latin typeface="Calibri"/>
-              </a:rPr>
-              <a:t>Politica de escalado</a:t>
-            </a:r>
-          </a:p>
-        </p:txBody>
-      </p:sp>
-      <p:sp>
-        <p:nvSpPr>
-          <p:cNvPr id="11" name="Rounded Rectangle 10"/>
+              <a:rPr sz="1300" b="0" i="0">
+                <a:solidFill>
+                  <a:srgbClr val="333333"/>
+                </a:solidFill>
+                <a:latin typeface="Calibri"/>
+              </a:rPr>
+              <a:t>Copia o describe tu boceto a una IA y pidele el codigo Mermaid: «convierte este diagrama a Mermaid usando flowchart». Revisa el resultado: la IA acierta la sintaxis, no tu modelo.</a:t>
+            </a:r>
+          </a:p>
+        </p:txBody>
+      </p:sp>
+      <p:sp>
+        <p:nvSpPr>
+          <p:cNvPr id="14" name="Rounded Rectangle 13"/>
           <p:cNvSpPr/>
           <p:nvPr/>
         </p:nvSpPr>
         <p:spPr>
           <a:xfrm>
-            <a:off x="4283354" y="1591056"/>
-            <a:ext cx="3624986" cy="2299716"/>
+            <a:off x="457200" y="3945636"/>
+            <a:ext cx="11277295" cy="1051560"/>
           </a:xfrm>
           <a:prstGeom prst="roundRect">
             <a:avLst>
@@ -6896,17 +7752,19 @@
       </p:sp>
       <p:sp>
         <p:nvSpPr>
-          <p:cNvPr id="12" name="Rectangle 11"/>
+          <p:cNvPr id="15" name="Rounded Rectangle 14"/>
           <p:cNvSpPr/>
           <p:nvPr/>
         </p:nvSpPr>
         <p:spPr>
           <a:xfrm>
-            <a:off x="4283354" y="1591056"/>
-            <a:ext cx="3624986" cy="64008"/>
-          </a:xfrm>
-          <a:prstGeom prst="rect">
-            <a:avLst/>
+            <a:off x="594360" y="4251960"/>
+            <a:ext cx="438912" cy="438912"/>
+          </a:xfrm>
+          <a:prstGeom prst="roundRect">
+            <a:avLst>
+              <a:gd name="adj" fmla="val 12000"/>
+            </a:avLst>
           </a:prstGeom>
           <a:solidFill>
             <a:srgbClr val="095292"/>
@@ -6939,20 +7797,103 @@
       </p:sp>
       <p:sp>
         <p:nvSpPr>
-          <p:cNvPr id="13" name="Rectangle 12"/>
+          <p:cNvPr id="16" name="TextBox 15"/>
+          <p:cNvSpPr txBox="1"/>
+          <p:nvPr/>
+        </p:nvSpPr>
+        <p:spPr>
+          <a:xfrm>
+            <a:off x="594360" y="4251960"/>
+            <a:ext cx="438912" cy="438912"/>
+          </a:xfrm>
+          <a:prstGeom prst="rect">
+            <a:avLst/>
+          </a:prstGeom>
+          <a:noFill/>
+        </p:spPr>
+        <p:txBody>
+          <a:bodyPr wrap="square" anchor="ctr"/>
+          <a:lstStyle/>
+          <a:p>
+            <a:pPr algn="ctr"/>
+            <a:r>
+              <a:rPr sz="1600" b="1" i="0">
+                <a:solidFill>
+                  <a:srgbClr val="FFFFFF"/>
+                </a:solidFill>
+                <a:latin typeface="Calibri"/>
+              </a:rPr>
+              <a:t>3</a:t>
+            </a:r>
+          </a:p>
+        </p:txBody>
+      </p:sp>
+      <p:sp>
+        <p:nvSpPr>
+          <p:cNvPr id="17" name="TextBox 16"/>
+          <p:cNvSpPr txBox="1"/>
+          <p:nvPr/>
+        </p:nvSpPr>
+        <p:spPr>
+          <a:xfrm>
+            <a:off x="1188720" y="4037076"/>
+            <a:ext cx="10271455" cy="886968"/>
+          </a:xfrm>
+          <a:prstGeom prst="rect">
+            <a:avLst/>
+          </a:prstGeom>
+          <a:noFill/>
+        </p:spPr>
+        <p:txBody>
+          <a:bodyPr wrap="square" anchor="ctr"/>
+          <a:lstStyle/>
+          <a:p>
+            <a:r>
+              <a:rPr sz="1500" b="1" i="0">
+                <a:solidFill>
+                  <a:srgbClr val="095292"/>
+                </a:solidFill>
+                <a:latin typeface="Calibri"/>
+              </a:rPr>
+              <a:t>Pega y renderiza en la plataforma del curso</a:t>
+            </a:r>
+          </a:p>
+          <a:p>
+            <a:pPr>
+              <a:spcBef>
+                <a:spcPts val="200"/>
+              </a:spcBef>
+            </a:pPr>
+            <a:r>
+              <a:rPr sz="1300" b="0" i="0">
+                <a:solidFill>
+                  <a:srgbClr val="333333"/>
+                </a:solidFill>
+                <a:latin typeface="Calibri"/>
+              </a:rPr>
+              <a:t>Pega ese codigo en la caja de texto de la pregunta y mira como lo dibuja la plataforma. Si no renderiza, corrige ahi mismo: lo que se califica es el diagrama renderizado dentro de la plataforma del curso.</a:t>
+            </a:r>
+          </a:p>
+        </p:txBody>
+      </p:sp>
+      <p:sp>
+        <p:nvSpPr>
+          <p:cNvPr id="18" name="Rounded Rectangle 17"/>
           <p:cNvSpPr/>
           <p:nvPr/>
         </p:nvSpPr>
         <p:spPr>
           <a:xfrm>
-            <a:off x="4283354" y="1655064"/>
-            <a:ext cx="3624986" cy="27432"/>
-          </a:xfrm>
-          <a:prstGeom prst="rect">
-            <a:avLst/>
+            <a:off x="457200" y="5088636"/>
+            <a:ext cx="11277295" cy="1051560"/>
+          </a:xfrm>
+          <a:prstGeom prst="roundRect">
+            <a:avLst>
+              <a:gd name="adj" fmla="val 12000"/>
+            </a:avLst>
           </a:prstGeom>
           <a:solidFill>
-            <a:srgbClr val="FFD000"/>
+            <a:srgbClr val="E8F4FA"/>
           </a:solidFill>
           <a:ln>
             <a:noFill/>
@@ -6980,137 +7921,21 @@
           </a:p>
         </p:txBody>
       </p:sp>
-      <p:pic>
-        <p:nvPicPr>
-          <p:cNvPr id="14" name="Picture 13" descr="drawio.png"/>
-          <p:cNvPicPr>
-            <a:picLocks noChangeAspect="1"/>
-          </p:cNvPicPr>
-          <p:nvPr/>
-        </p:nvPicPr>
-        <p:blipFill>
-          <a:blip r:embed="rId3"/>
-          <a:stretch>
-            <a:fillRect/>
-          </a:stretch>
-        </p:blipFill>
-        <p:spPr>
-          <a:xfrm>
-            <a:off x="5485485" y="1847087"/>
-            <a:ext cx="1220724" cy="1220724"/>
-          </a:xfrm>
-          <a:prstGeom prst="rect">
-            <a:avLst/>
-          </a:prstGeom>
-        </p:spPr>
-      </p:pic>
-      <p:sp>
-        <p:nvSpPr>
-          <p:cNvPr id="15" name="TextBox 14"/>
-          <p:cNvSpPr txBox="1"/>
-          <p:nvPr/>
-        </p:nvSpPr>
-        <p:spPr>
-          <a:xfrm>
-            <a:off x="4356506" y="3159251"/>
-            <a:ext cx="3478682" cy="621792"/>
-          </a:xfrm>
-          <a:prstGeom prst="rect">
-            <a:avLst/>
-          </a:prstGeom>
-          <a:noFill/>
-        </p:spPr>
-        <p:txBody>
-          <a:bodyPr wrap="square" anchor="t"/>
-          <a:lstStyle/>
-          <a:p>
-            <a:pPr algn="ctr"/>
-            <a:r>
-              <a:rPr sz="1300" b="1" i="0">
-                <a:solidFill>
-                  <a:srgbClr val="095292"/>
-                </a:solidFill>
-                <a:latin typeface="Calibri"/>
-              </a:rPr>
-              <a:t>draw.io</a:t>
-            </a:r>
-          </a:p>
-          <a:p>
-            <a:pPr algn="ctr">
-              <a:spcBef>
-                <a:spcPts val="200"/>
-              </a:spcBef>
-            </a:pPr>
-            <a:r>
-              <a:rPr sz="1000" b="0" i="0">
-                <a:solidFill>
-                  <a:srgbClr val="666666"/>
-                </a:solidFill>
-                <a:latin typeface="Calibri"/>
-              </a:rPr>
-              <a:t>Nota en Deployment</a:t>
-            </a:r>
-          </a:p>
-        </p:txBody>
-      </p:sp>
-      <p:sp>
-        <p:nvSpPr>
-          <p:cNvPr id="16" name="Rounded Rectangle 15"/>
+      <p:sp>
+        <p:nvSpPr>
+          <p:cNvPr id="19" name="Rounded Rectangle 18"/>
           <p:cNvSpPr/>
           <p:nvPr/>
         </p:nvSpPr>
         <p:spPr>
           <a:xfrm>
-            <a:off x="8109508" y="1591056"/>
-            <a:ext cx="3624986" cy="2299716"/>
+            <a:off x="594360" y="5394960"/>
+            <a:ext cx="438912" cy="438912"/>
           </a:xfrm>
           <a:prstGeom prst="roundRect">
             <a:avLst>
               <a:gd name="adj" fmla="val 12000"/>
             </a:avLst>
-          </a:prstGeom>
-          <a:solidFill>
-            <a:srgbClr val="F2F2F2"/>
-          </a:solidFill>
-          <a:ln>
-            <a:noFill/>
-          </a:ln>
-        </p:spPr>
-        <p:style>
-          <a:lnRef idx="1">
-            <a:schemeClr val="accent1"/>
-          </a:lnRef>
-          <a:fillRef idx="3">
-            <a:schemeClr val="accent1"/>
-          </a:fillRef>
-          <a:effectRef idx="2">
-            <a:schemeClr val="accent1"/>
-          </a:effectRef>
-          <a:fontRef idx="minor">
-            <a:schemeClr val="lt1"/>
-          </a:fontRef>
-        </p:style>
-        <p:txBody>
-          <a:bodyPr rtlCol="0" anchor="ctr"/>
-          <a:lstStyle/>
-          <a:p>
-            <a:pPr algn="ctr"/>
-          </a:p>
-        </p:txBody>
-      </p:sp>
-      <p:sp>
-        <p:nvSpPr>
-          <p:cNvPr id="17" name="Rectangle 16"/>
-          <p:cNvSpPr/>
-          <p:nvPr/>
-        </p:nvSpPr>
-        <p:spPr>
-          <a:xfrm>
-            <a:off x="8109508" y="1591056"/>
-            <a:ext cx="3624986" cy="64008"/>
-          </a:xfrm>
-          <a:prstGeom prst="rect">
-            <a:avLst/>
           </a:prstGeom>
           <a:solidFill>
             <a:srgbClr val="095292"/>
@@ -7143,81 +7968,14 @@
       </p:sp>
       <p:sp>
         <p:nvSpPr>
-          <p:cNvPr id="18" name="Rectangle 17"/>
-          <p:cNvSpPr/>
-          <p:nvPr/>
-        </p:nvSpPr>
-        <p:spPr>
-          <a:xfrm>
-            <a:off x="8109508" y="1655064"/>
-            <a:ext cx="3624986" cy="27432"/>
-          </a:xfrm>
-          <a:prstGeom prst="rect">
-            <a:avLst/>
-          </a:prstGeom>
-          <a:solidFill>
-            <a:srgbClr val="FFD000"/>
-          </a:solidFill>
-          <a:ln>
-            <a:noFill/>
-          </a:ln>
-        </p:spPr>
-        <p:style>
-          <a:lnRef idx="1">
-            <a:schemeClr val="accent1"/>
-          </a:lnRef>
-          <a:fillRef idx="3">
-            <a:schemeClr val="accent1"/>
-          </a:fillRef>
-          <a:effectRef idx="2">
-            <a:schemeClr val="accent1"/>
-          </a:effectRef>
-          <a:fontRef idx="minor">
-            <a:schemeClr val="lt1"/>
-          </a:fontRef>
-        </p:style>
-        <p:txBody>
-          <a:bodyPr rtlCol="0" anchor="ctr"/>
-          <a:lstStyle/>
-          <a:p>
-            <a:pPr algn="ctr"/>
-          </a:p>
-        </p:txBody>
-      </p:sp>
-      <p:pic>
-        <p:nvPicPr>
-          <p:cNvPr id="19" name="Picture 18" descr="mermaid.png"/>
-          <p:cNvPicPr>
-            <a:picLocks noChangeAspect="1"/>
-          </p:cNvPicPr>
-          <p:nvPr/>
-        </p:nvPicPr>
-        <p:blipFill>
-          <a:blip r:embed="rId4"/>
-          <a:stretch>
-            <a:fillRect/>
-          </a:stretch>
-        </p:blipFill>
-        <p:spPr>
-          <a:xfrm>
-            <a:off x="9311640" y="1847087"/>
-            <a:ext cx="1220724" cy="1220724"/>
-          </a:xfrm>
-          <a:prstGeom prst="rect">
-            <a:avLst/>
-          </a:prstGeom>
-        </p:spPr>
-      </p:pic>
-      <p:sp>
-        <p:nvSpPr>
           <p:cNvPr id="20" name="TextBox 19"/>
           <p:cNvSpPr txBox="1"/>
           <p:nvPr/>
         </p:nvSpPr>
         <p:spPr>
           <a:xfrm>
-            <a:off x="8182660" y="3159251"/>
-            <a:ext cx="3478682" cy="621792"/>
+            <a:off x="594360" y="5394960"/>
+            <a:ext cx="438912" cy="438912"/>
           </a:xfrm>
           <a:prstGeom prst="rect">
             <a:avLst/>
@@ -7225,245 +7983,73 @@
           <a:noFill/>
         </p:spPr>
         <p:txBody>
-          <a:bodyPr wrap="square" anchor="t"/>
+          <a:bodyPr wrap="square" anchor="ctr"/>
           <a:lstStyle/>
           <a:p>
             <a:pPr algn="ctr"/>
             <a:r>
-              <a:rPr sz="1300" b="1" i="0">
+              <a:rPr sz="1600" b="1" i="0">
+                <a:solidFill>
+                  <a:srgbClr val="FFFFFF"/>
+                </a:solidFill>
+                <a:latin typeface="Calibri"/>
+              </a:rPr>
+              <a:t>4</a:t>
+            </a:r>
+          </a:p>
+        </p:txBody>
+      </p:sp>
+      <p:sp>
+        <p:nvSpPr>
+          <p:cNvPr id="21" name="TextBox 20"/>
+          <p:cNvSpPr txBox="1"/>
+          <p:nvPr/>
+        </p:nvSpPr>
+        <p:spPr>
+          <a:xfrm>
+            <a:off x="1188720" y="5180076"/>
+            <a:ext cx="10271455" cy="886968"/>
+          </a:xfrm>
+          <a:prstGeom prst="rect">
+            <a:avLst/>
+          </a:prstGeom>
+          <a:noFill/>
+        </p:spPr>
+        <p:txBody>
+          <a:bodyPr wrap="square" anchor="ctr"/>
+          <a:lstStyle/>
+          <a:p>
+            <a:r>
+              <a:rPr sz="1500" b="1" i="0">
                 <a:solidFill>
                   <a:srgbClr val="095292"/>
                 </a:solidFill>
                 <a:latin typeface="Calibri"/>
               </a:rPr>
-              <a:t>Mermaid</a:t>
-            </a:r>
-          </a:p>
-          <a:p>
-            <a:pPr algn="ctr">
+              <a:t>Guarda el PNG para tu PI</a:t>
+            </a:r>
+          </a:p>
+          <a:p>
+            <a:pPr>
               <a:spcBef>
                 <a:spcPts val="200"/>
               </a:spcBef>
             </a:pPr>
             <a:r>
-              <a:rPr sz="1000" b="0" i="0">
-                <a:solidFill>
-                  <a:srgbClr val="666666"/>
-                </a:solidFill>
-                <a:latin typeface="Calibri"/>
-              </a:rPr>
-              <a:t>Codigo del diagrama</a:t>
-            </a:r>
-          </a:p>
-        </p:txBody>
-      </p:sp>
-      <p:sp>
-        <p:nvSpPr>
-          <p:cNvPr id="21" name="Rounded Rectangle 20"/>
-          <p:cNvSpPr/>
-          <p:nvPr/>
-        </p:nvSpPr>
-        <p:spPr>
-          <a:xfrm>
-            <a:off x="4283354" y="4055364"/>
-            <a:ext cx="3624986" cy="2299716"/>
-          </a:xfrm>
-          <a:prstGeom prst="roundRect">
-            <a:avLst>
-              <a:gd name="adj" fmla="val 12000"/>
-            </a:avLst>
-          </a:prstGeom>
-          <a:solidFill>
-            <a:srgbClr val="F2F2F2"/>
-          </a:solidFill>
-          <a:ln>
-            <a:noFill/>
-          </a:ln>
-        </p:spPr>
-        <p:style>
-          <a:lnRef idx="1">
-            <a:schemeClr val="accent1"/>
-          </a:lnRef>
-          <a:fillRef idx="3">
-            <a:schemeClr val="accent1"/>
-          </a:fillRef>
-          <a:effectRef idx="2">
-            <a:schemeClr val="accent1"/>
-          </a:effectRef>
-          <a:fontRef idx="minor">
-            <a:schemeClr val="lt1"/>
-          </a:fontRef>
-        </p:style>
-        <p:txBody>
-          <a:bodyPr rtlCol="0" anchor="ctr"/>
-          <a:lstStyle/>
-          <a:p>
-            <a:pPr algn="ctr"/>
-          </a:p>
-        </p:txBody>
-      </p:sp>
-      <p:sp>
-        <p:nvSpPr>
-          <p:cNvPr id="22" name="Rectangle 21"/>
-          <p:cNvSpPr/>
-          <p:nvPr/>
-        </p:nvSpPr>
-        <p:spPr>
-          <a:xfrm>
-            <a:off x="4283354" y="4055364"/>
-            <a:ext cx="3624986" cy="64008"/>
-          </a:xfrm>
-          <a:prstGeom prst="rect">
-            <a:avLst/>
-          </a:prstGeom>
-          <a:solidFill>
-            <a:srgbClr val="095292"/>
-          </a:solidFill>
-          <a:ln>
-            <a:noFill/>
-          </a:ln>
-        </p:spPr>
-        <p:style>
-          <a:lnRef idx="1">
-            <a:schemeClr val="accent1"/>
-          </a:lnRef>
-          <a:fillRef idx="3">
-            <a:schemeClr val="accent1"/>
-          </a:fillRef>
-          <a:effectRef idx="2">
-            <a:schemeClr val="accent1"/>
-          </a:effectRef>
-          <a:fontRef idx="minor">
-            <a:schemeClr val="lt1"/>
-          </a:fontRef>
-        </p:style>
-        <p:txBody>
-          <a:bodyPr rtlCol="0" anchor="ctr"/>
-          <a:lstStyle/>
-          <a:p>
-            <a:pPr algn="ctr"/>
-          </a:p>
-        </p:txBody>
-      </p:sp>
-      <p:sp>
-        <p:nvSpPr>
-          <p:cNvPr id="23" name="Rectangle 22"/>
-          <p:cNvSpPr/>
-          <p:nvPr/>
-        </p:nvSpPr>
-        <p:spPr>
-          <a:xfrm>
-            <a:off x="4283354" y="4119372"/>
-            <a:ext cx="3624986" cy="27432"/>
-          </a:xfrm>
-          <a:prstGeom prst="rect">
-            <a:avLst/>
-          </a:prstGeom>
-          <a:solidFill>
-            <a:srgbClr val="FFD000"/>
-          </a:solidFill>
-          <a:ln>
-            <a:noFill/>
-          </a:ln>
-        </p:spPr>
-        <p:style>
-          <a:lnRef idx="1">
-            <a:schemeClr val="accent1"/>
-          </a:lnRef>
-          <a:fillRef idx="3">
-            <a:schemeClr val="accent1"/>
-          </a:fillRef>
-          <a:effectRef idx="2">
-            <a:schemeClr val="accent1"/>
-          </a:effectRef>
-          <a:fontRef idx="minor">
-            <a:schemeClr val="lt1"/>
-          </a:fontRef>
-        </p:style>
-        <p:txBody>
-          <a:bodyPr rtlCol="0" anchor="ctr"/>
-          <a:lstStyle/>
-          <a:p>
-            <a:pPr algn="ctr"/>
-          </a:p>
-        </p:txBody>
-      </p:sp>
-      <p:pic>
-        <p:nvPicPr>
-          <p:cNvPr id="24" name="Picture 23" descr="examlab.png"/>
-          <p:cNvPicPr>
-            <a:picLocks noChangeAspect="1"/>
-          </p:cNvPicPr>
-          <p:nvPr/>
-        </p:nvPicPr>
-        <p:blipFill>
-          <a:blip r:embed="rId5"/>
-          <a:stretch>
-            <a:fillRect/>
-          </a:stretch>
-        </p:blipFill>
-        <p:spPr>
-          <a:xfrm>
-            <a:off x="5485485" y="4311396"/>
-            <a:ext cx="1220724" cy="1220724"/>
-          </a:xfrm>
-          <a:prstGeom prst="rect">
-            <a:avLst/>
-          </a:prstGeom>
-        </p:spPr>
-      </p:pic>
-      <p:sp>
-        <p:nvSpPr>
-          <p:cNvPr id="25" name="TextBox 24"/>
-          <p:cNvSpPr txBox="1"/>
-          <p:nvPr/>
-        </p:nvSpPr>
-        <p:spPr>
-          <a:xfrm>
-            <a:off x="4356506" y="5623560"/>
-            <a:ext cx="3478682" cy="621792"/>
-          </a:xfrm>
-          <a:prstGeom prst="rect">
-            <a:avLst/>
-          </a:prstGeom>
-          <a:noFill/>
-        </p:spPr>
-        <p:txBody>
-          <a:bodyPr wrap="square" anchor="t"/>
-          <a:lstStyle/>
-          <a:p>
-            <a:pPr algn="ctr"/>
-            <a:r>
-              <a:rPr sz="1300" b="1" i="0">
-                <a:solidFill>
-                  <a:srgbClr val="095292"/>
-                </a:solidFill>
-                <a:latin typeface="Calibri"/>
-              </a:rPr>
-              <a:t>la plataforma del curso</a:t>
-            </a:r>
-          </a:p>
-          <a:p>
-            <a:pPr algn="ctr">
-              <a:spcBef>
-                <a:spcPts val="200"/>
-              </a:spcBef>
-            </a:pPr>
-            <a:r>
-              <a:rPr sz="1000" b="0" i="0">
-                <a:solidFill>
-                  <a:srgbClr val="666666"/>
-                </a:solidFill>
-                <a:latin typeface="Calibri"/>
-              </a:rPr>
-              <a:t>Donde se entrega</a:t>
-            </a:r>
-          </a:p>
-        </p:txBody>
-      </p:sp>
-      <p:sp>
-        <p:nvSpPr>
-          <p:cNvPr id="26" name="TextBox 25"/>
+              <a:rPr sz="1300" b="0" i="0">
+                <a:solidFill>
+                  <a:srgbClr val="333333"/>
+                </a:solidFill>
+                <a:latin typeface="Calibri"/>
+              </a:rPr>
+              <a:t>Exporta tambien la imagen a la carpeta de tu Proyecto Integrador. Esa copia es para tu informe; no reemplaza la respuesta en la plataforma.</a:t>
+            </a:r>
+          </a:p>
+        </p:txBody>
+      </p:sp>
+      <p:sp>
+        <p:nvSpPr>
+          <p:cNvPr id="22" name="TextBox 21"/>
           <p:cNvSpPr txBox="1"/>
           <p:nvPr/>
         </p:nvSpPr>
@@ -7531,7 +8117,7 @@
         <p:spPr>
           <a:xfrm>
             <a:off x="0" y="0"/>
-            <a:ext cx="12191695" cy="1170432"/>
+            <a:ext cx="12191695" cy="960120"/>
           </a:xfrm>
           <a:prstGeom prst="rect">
             <a:avLst/>
@@ -7573,7 +8159,7 @@
         </p:nvSpPr>
         <p:spPr>
           <a:xfrm>
-            <a:off x="0" y="1170432"/>
+            <a:off x="0" y="960120"/>
             <a:ext cx="12191695" cy="41148"/>
           </a:xfrm>
           <a:prstGeom prst="rect">
@@ -7617,7 +8203,7 @@
         <p:spPr>
           <a:xfrm>
             <a:off x="457200" y="164592"/>
-            <a:ext cx="11277295" cy="384048"/>
+            <a:ext cx="11277295" cy="502920"/>
           </a:xfrm>
           <a:prstGeom prst="rect">
             <a:avLst/>
@@ -7637,7 +8223,7 @@
                 </a:solidFill>
                 <a:latin typeface="Calibri"/>
               </a:rPr>
-              <a:t>Del boceto a la plataforma del curso (diagrama)</a:t>
+              <a:t>PI CloudLite — entregable de hoy</a:t>
             </a:r>
           </a:p>
         </p:txBody>
@@ -7650,8 +8236,8 @@
         </p:nvSpPr>
         <p:spPr>
           <a:xfrm>
-            <a:off x="457200" y="566928"/>
-            <a:ext cx="11277295" cy="411480"/>
+            <a:off x="457200" y="1170432"/>
+            <a:ext cx="11277295" cy="5230368"/>
           </a:xfrm>
           <a:prstGeom prst="rect">
             <a:avLst/>
@@ -7664,705 +8250,119 @@
           </a:bodyPr>
           <a:lstStyle/>
           <a:p>
-            <a:r>
-              <a:rPr sz="1400" b="0" i="0">
-                <a:solidFill>
-                  <a:srgbClr val="B8D8EE"/>
-                </a:solidFill>
-                <a:latin typeface="Calibri"/>
-              </a:rPr>
-              <a:t>El diagrama se entrega como código Mermaid dentro de la plataforma del curso, no como imagen</a:t>
-            </a:r>
-          </a:p>
-        </p:txBody>
-      </p:sp>
-      <p:sp>
-        <p:nvSpPr>
-          <p:cNvPr id="6" name="Rounded Rectangle 5"/>
-          <p:cNvSpPr/>
-          <p:nvPr/>
-        </p:nvSpPr>
-        <p:spPr>
-          <a:xfrm>
-            <a:off x="457200" y="1659636"/>
-            <a:ext cx="11277295" cy="1051560"/>
-          </a:xfrm>
-          <a:prstGeom prst="roundRect">
-            <a:avLst>
-              <a:gd name="adj" fmla="val 12000"/>
-            </a:avLst>
-          </a:prstGeom>
-          <a:solidFill>
-            <a:srgbClr val="F2F2F2"/>
-          </a:solidFill>
-          <a:ln>
-            <a:noFill/>
-          </a:ln>
-        </p:spPr>
-        <p:style>
-          <a:lnRef idx="1">
-            <a:schemeClr val="accent1"/>
-          </a:lnRef>
-          <a:fillRef idx="3">
-            <a:schemeClr val="accent1"/>
-          </a:fillRef>
-          <a:effectRef idx="2">
-            <a:schemeClr val="accent1"/>
-          </a:effectRef>
-          <a:fontRef idx="minor">
-            <a:schemeClr val="lt1"/>
-          </a:fontRef>
-        </p:style>
-        <p:txBody>
-          <a:bodyPr rtlCol="0" anchor="ctr"/>
-          <a:lstStyle/>
-          <a:p>
-            <a:pPr algn="ctr"/>
-          </a:p>
-        </p:txBody>
-      </p:sp>
-      <p:sp>
-        <p:nvSpPr>
-          <p:cNvPr id="7" name="Rounded Rectangle 6"/>
-          <p:cNvSpPr/>
-          <p:nvPr/>
-        </p:nvSpPr>
-        <p:spPr>
-          <a:xfrm>
-            <a:off x="594360" y="1965960"/>
-            <a:ext cx="438912" cy="438912"/>
-          </a:xfrm>
-          <a:prstGeom prst="roundRect">
-            <a:avLst>
-              <a:gd name="adj" fmla="val 12000"/>
-            </a:avLst>
-          </a:prstGeom>
-          <a:solidFill>
-            <a:srgbClr val="095292"/>
-          </a:solidFill>
-          <a:ln>
-            <a:noFill/>
-          </a:ln>
-        </p:spPr>
-        <p:style>
-          <a:lnRef idx="1">
-            <a:schemeClr val="accent1"/>
-          </a:lnRef>
-          <a:fillRef idx="3">
-            <a:schemeClr val="accent1"/>
-          </a:fillRef>
-          <a:effectRef idx="2">
-            <a:schemeClr val="accent1"/>
-          </a:effectRef>
-          <a:fontRef idx="minor">
-            <a:schemeClr val="lt1"/>
-          </a:fontRef>
-        </p:style>
-        <p:txBody>
-          <a:bodyPr rtlCol="0" anchor="ctr"/>
-          <a:lstStyle/>
-          <a:p>
-            <a:pPr algn="ctr"/>
-          </a:p>
-        </p:txBody>
-      </p:sp>
-      <p:sp>
-        <p:nvSpPr>
-          <p:cNvPr id="8" name="TextBox 7"/>
-          <p:cNvSpPr txBox="1"/>
-          <p:nvPr/>
-        </p:nvSpPr>
-        <p:spPr>
-          <a:xfrm>
-            <a:off x="594360" y="1965960"/>
-            <a:ext cx="438912" cy="438912"/>
-          </a:xfrm>
-          <a:prstGeom prst="rect">
-            <a:avLst/>
-          </a:prstGeom>
-          <a:noFill/>
-        </p:spPr>
-        <p:txBody>
-          <a:bodyPr wrap="square" anchor="ctr"/>
-          <a:lstStyle/>
-          <a:p>
-            <a:pPr algn="ctr"/>
-            <a:r>
-              <a:rPr sz="1600" b="1" i="0">
-                <a:solidFill>
-                  <a:srgbClr val="FFFFFF"/>
-                </a:solidFill>
-                <a:latin typeface="Calibri"/>
-              </a:rPr>
-              <a:t>1</a:t>
-            </a:r>
-          </a:p>
-        </p:txBody>
-      </p:sp>
-      <p:sp>
-        <p:nvSpPr>
-          <p:cNvPr id="9" name="TextBox 8"/>
-          <p:cNvSpPr txBox="1"/>
-          <p:nvPr/>
-        </p:nvSpPr>
-        <p:spPr>
-          <a:xfrm>
-            <a:off x="1188720" y="1751076"/>
-            <a:ext cx="10271455" cy="886968"/>
-          </a:xfrm>
-          <a:prstGeom prst="rect">
-            <a:avLst/>
-          </a:prstGeom>
-          <a:noFill/>
-        </p:spPr>
-        <p:txBody>
-          <a:bodyPr wrap="square" anchor="ctr"/>
-          <a:lstStyle/>
-          <a:p>
-            <a:r>
-              <a:rPr sz="1500" b="1" i="0">
-                <a:solidFill>
-                  <a:srgbClr val="095292"/>
-                </a:solidFill>
-                <a:latin typeface="Calibri"/>
-              </a:rPr>
-              <a:t>Disena visual</a:t>
-            </a:r>
-          </a:p>
-          <a:p>
             <a:pPr>
-              <a:spcBef>
-                <a:spcPts val="200"/>
-              </a:spcBef>
+              <a:spcAft>
+                <a:spcPts val="800"/>
+              </a:spcAft>
             </a:pPr>
             <a:r>
-              <a:rPr sz="1300" b="0" i="0">
+              <a:rPr sz="2000" b="0" i="0">
                 <a:solidFill>
                   <a:srgbClr val="333333"/>
                 </a:solidFill>
                 <a:latin typeface="Calibri"/>
               </a:rPr>
-              <a:t>Dibuja el diagrama como quieras en Excalidraw o draw.io: es mas rapido arrastrar cajas que escribir codigo, y ahi es donde piensas el modelo.</a:t>
-            </a:r>
-          </a:p>
-        </p:txBody>
-      </p:sp>
-      <p:sp>
-        <p:nvSpPr>
-          <p:cNvPr id="10" name="Rounded Rectangle 9"/>
-          <p:cNvSpPr/>
-          <p:nvPr/>
-        </p:nvSpPr>
-        <p:spPr>
-          <a:xfrm>
-            <a:off x="457200" y="2802636"/>
-            <a:ext cx="11277295" cy="1051560"/>
-          </a:xfrm>
-          <a:prstGeom prst="roundRect">
-            <a:avLst>
-              <a:gd name="adj" fmla="val 12000"/>
-            </a:avLst>
-          </a:prstGeom>
-          <a:solidFill>
-            <a:srgbClr val="E8F4FA"/>
-          </a:solidFill>
-          <a:ln>
-            <a:noFill/>
-          </a:ln>
-        </p:spPr>
-        <p:style>
-          <a:lnRef idx="1">
-            <a:schemeClr val="accent1"/>
-          </a:lnRef>
-          <a:fillRef idx="3">
-            <a:schemeClr val="accent1"/>
-          </a:fillRef>
-          <a:effectRef idx="2">
-            <a:schemeClr val="accent1"/>
-          </a:effectRef>
-          <a:fontRef idx="minor">
-            <a:schemeClr val="lt1"/>
-          </a:fontRef>
-        </p:style>
-        <p:txBody>
-          <a:bodyPr rtlCol="0" anchor="ctr"/>
-          <a:lstStyle/>
-          <a:p>
-            <a:pPr algn="ctr"/>
-          </a:p>
-        </p:txBody>
-      </p:sp>
-      <p:sp>
-        <p:nvSpPr>
-          <p:cNvPr id="11" name="Rounded Rectangle 10"/>
-          <p:cNvSpPr/>
-          <p:nvPr/>
-        </p:nvSpPr>
-        <p:spPr>
-          <a:xfrm>
-            <a:off x="594360" y="3108960"/>
-            <a:ext cx="438912" cy="438912"/>
-          </a:xfrm>
-          <a:prstGeom prst="roundRect">
-            <a:avLst>
-              <a:gd name="adj" fmla="val 12000"/>
-            </a:avLst>
-          </a:prstGeom>
-          <a:solidFill>
-            <a:srgbClr val="095292"/>
-          </a:solidFill>
-          <a:ln>
-            <a:noFill/>
-          </a:ln>
-        </p:spPr>
-        <p:style>
-          <a:lnRef idx="1">
-            <a:schemeClr val="accent1"/>
-          </a:lnRef>
-          <a:fillRef idx="3">
-            <a:schemeClr val="accent1"/>
-          </a:fillRef>
-          <a:effectRef idx="2">
-            <a:schemeClr val="accent1"/>
-          </a:effectRef>
-          <a:fontRef idx="minor">
-            <a:schemeClr val="lt1"/>
-          </a:fontRef>
-        </p:style>
-        <p:txBody>
-          <a:bodyPr rtlCol="0" anchor="ctr"/>
-          <a:lstStyle/>
-          <a:p>
-            <a:pPr algn="ctr"/>
-          </a:p>
-        </p:txBody>
-      </p:sp>
-      <p:sp>
-        <p:nvSpPr>
-          <p:cNvPr id="12" name="TextBox 11"/>
-          <p:cNvSpPr txBox="1"/>
-          <p:nvPr/>
-        </p:nvSpPr>
-        <p:spPr>
-          <a:xfrm>
-            <a:off x="594360" y="3108960"/>
-            <a:ext cx="438912" cy="438912"/>
-          </a:xfrm>
-          <a:prstGeom prst="rect">
-            <a:avLst/>
-          </a:prstGeom>
-          <a:noFill/>
-        </p:spPr>
-        <p:txBody>
-          <a:bodyPr wrap="square" anchor="ctr"/>
-          <a:lstStyle/>
-          <a:p>
-            <a:pPr algn="ctr"/>
-            <a:r>
-              <a:rPr sz="1600" b="1" i="0">
-                <a:solidFill>
-                  <a:srgbClr val="FFFFFF"/>
-                </a:solidFill>
-                <a:latin typeface="Calibri"/>
-              </a:rPr>
-              <a:t>2</a:t>
-            </a:r>
-          </a:p>
-        </p:txBody>
-      </p:sp>
-      <p:sp>
-        <p:nvSpPr>
-          <p:cNvPr id="13" name="TextBox 12"/>
-          <p:cNvSpPr txBox="1"/>
-          <p:nvPr/>
-        </p:nvSpPr>
-        <p:spPr>
-          <a:xfrm>
-            <a:off x="1188720" y="2894076"/>
-            <a:ext cx="10271455" cy="886968"/>
-          </a:xfrm>
-          <a:prstGeom prst="rect">
-            <a:avLst/>
-          </a:prstGeom>
-          <a:noFill/>
-        </p:spPr>
-        <p:txBody>
-          <a:bodyPr wrap="square" anchor="ctr"/>
-          <a:lstStyle/>
-          <a:p>
-            <a:r>
-              <a:rPr sz="1500" b="1" i="0">
-                <a:solidFill>
-                  <a:srgbClr val="095292"/>
-                </a:solidFill>
-                <a:latin typeface="Calibri"/>
-              </a:rPr>
-              <a:t>Traduce con IA</a:t>
+              <a:t>–   </a:t>
+            </a:r>
+            <a:r>
+              <a:rPr sz="2000" b="1" i="0">
+                <a:solidFill>
+                  <a:srgbClr val="333333"/>
+                </a:solidFill>
+                <a:latin typeface="Calibri"/>
+              </a:rPr>
+              <a:t>Entregable:</a:t>
+            </a:r>
+            <a:r>
+              <a:rPr sz="2000" b="0" i="0">
+                <a:solidFill>
+                  <a:srgbClr val="333333"/>
+                </a:solidFill>
+                <a:latin typeface="Calibri"/>
+              </a:rPr>
+              <a:t> Sección Escalabilidad: triggers, límites, qué escala y qué no</a:t>
             </a:r>
           </a:p>
           <a:p>
             <a:pPr>
-              <a:spcBef>
-                <a:spcPts val="200"/>
-              </a:spcBef>
+              <a:spcAft>
+                <a:spcPts val="800"/>
+              </a:spcAft>
             </a:pPr>
             <a:r>
-              <a:rPr sz="1300" b="0" i="0">
+              <a:rPr sz="2000" b="0" i="0">
                 <a:solidFill>
                   <a:srgbClr val="333333"/>
                 </a:solidFill>
                 <a:latin typeface="Calibri"/>
               </a:rPr>
-              <a:t>Copia o describe tu boceto a una IA y pidele el codigo Mermaid: «convierte este diagrama a Mermaid usando flowchart». Revisa el resultado: la IA acierta la sintaxis, no tu modelo.</a:t>
-            </a:r>
-          </a:p>
-        </p:txBody>
-      </p:sp>
-      <p:sp>
-        <p:nvSpPr>
-          <p:cNvPr id="14" name="Rounded Rectangle 13"/>
-          <p:cNvSpPr/>
-          <p:nvPr/>
-        </p:nvSpPr>
-        <p:spPr>
-          <a:xfrm>
-            <a:off x="457200" y="3945636"/>
-            <a:ext cx="11277295" cy="1051560"/>
-          </a:xfrm>
-          <a:prstGeom prst="roundRect">
-            <a:avLst>
-              <a:gd name="adj" fmla="val 12000"/>
-            </a:avLst>
-          </a:prstGeom>
-          <a:solidFill>
-            <a:srgbClr val="F2F2F2"/>
-          </a:solidFill>
-          <a:ln>
-            <a:noFill/>
-          </a:ln>
-        </p:spPr>
-        <p:style>
-          <a:lnRef idx="1">
-            <a:schemeClr val="accent1"/>
-          </a:lnRef>
-          <a:fillRef idx="3">
-            <a:schemeClr val="accent1"/>
-          </a:fillRef>
-          <a:effectRef idx="2">
-            <a:schemeClr val="accent1"/>
-          </a:effectRef>
-          <a:fontRef idx="minor">
-            <a:schemeClr val="lt1"/>
-          </a:fontRef>
-        </p:style>
-        <p:txBody>
-          <a:bodyPr rtlCol="0" anchor="ctr"/>
-          <a:lstStyle/>
-          <a:p>
-            <a:pPr algn="ctr"/>
-          </a:p>
-        </p:txBody>
-      </p:sp>
-      <p:sp>
-        <p:nvSpPr>
-          <p:cNvPr id="15" name="Rounded Rectangle 14"/>
-          <p:cNvSpPr/>
-          <p:nvPr/>
-        </p:nvSpPr>
-        <p:spPr>
-          <a:xfrm>
-            <a:off x="594360" y="4251960"/>
-            <a:ext cx="438912" cy="438912"/>
-          </a:xfrm>
-          <a:prstGeom prst="roundRect">
-            <a:avLst>
-              <a:gd name="adj" fmla="val 12000"/>
-            </a:avLst>
-          </a:prstGeom>
-          <a:solidFill>
-            <a:srgbClr val="095292"/>
-          </a:solidFill>
-          <a:ln>
-            <a:noFill/>
-          </a:ln>
-        </p:spPr>
-        <p:style>
-          <a:lnRef idx="1">
-            <a:schemeClr val="accent1"/>
-          </a:lnRef>
-          <a:fillRef idx="3">
-            <a:schemeClr val="accent1"/>
-          </a:fillRef>
-          <a:effectRef idx="2">
-            <a:schemeClr val="accent1"/>
-          </a:effectRef>
-          <a:fontRef idx="minor">
-            <a:schemeClr val="lt1"/>
-          </a:fontRef>
-        </p:style>
-        <p:txBody>
-          <a:bodyPr rtlCol="0" anchor="ctr"/>
-          <a:lstStyle/>
-          <a:p>
-            <a:pPr algn="ctr"/>
-          </a:p>
-        </p:txBody>
-      </p:sp>
-      <p:sp>
-        <p:nvSpPr>
-          <p:cNvPr id="16" name="TextBox 15"/>
-          <p:cNvSpPr txBox="1"/>
-          <p:nvPr/>
-        </p:nvSpPr>
-        <p:spPr>
-          <a:xfrm>
-            <a:off x="594360" y="4251960"/>
-            <a:ext cx="438912" cy="438912"/>
-          </a:xfrm>
-          <a:prstGeom prst="rect">
-            <a:avLst/>
-          </a:prstGeom>
-          <a:noFill/>
-        </p:spPr>
-        <p:txBody>
-          <a:bodyPr wrap="square" anchor="ctr"/>
-          <a:lstStyle/>
-          <a:p>
-            <a:pPr algn="ctr"/>
-            <a:r>
-              <a:rPr sz="1600" b="1" i="0">
-                <a:solidFill>
-                  <a:srgbClr val="FFFFFF"/>
-                </a:solidFill>
-                <a:latin typeface="Calibri"/>
-              </a:rPr>
-              <a:t>3</a:t>
-            </a:r>
-          </a:p>
-        </p:txBody>
-      </p:sp>
-      <p:sp>
-        <p:nvSpPr>
-          <p:cNvPr id="17" name="TextBox 16"/>
-          <p:cNvSpPr txBox="1"/>
-          <p:nvPr/>
-        </p:nvSpPr>
-        <p:spPr>
-          <a:xfrm>
-            <a:off x="1188720" y="4037076"/>
-            <a:ext cx="10271455" cy="886968"/>
-          </a:xfrm>
-          <a:prstGeom prst="rect">
-            <a:avLst/>
-          </a:prstGeom>
-          <a:noFill/>
-        </p:spPr>
-        <p:txBody>
-          <a:bodyPr wrap="square" anchor="ctr"/>
-          <a:lstStyle/>
-          <a:p>
-            <a:r>
-              <a:rPr sz="1500" b="1" i="0">
-                <a:solidFill>
-                  <a:srgbClr val="095292"/>
-                </a:solidFill>
-                <a:latin typeface="Calibri"/>
-              </a:rPr>
-              <a:t>Pega y renderiza en la plataforma del curso</a:t>
+              <a:t>–   Herramienta: </a:t>
+            </a:r>
+            <a:r>
+              <a:rPr sz="2000" b="1" i="0">
+                <a:solidFill>
+                  <a:srgbClr val="333333"/>
+                </a:solidFill>
+                <a:latin typeface="Calibri"/>
+              </a:rPr>
+              <a:t>Google Docs · draw.io (opcional nota en Deployment)</a:t>
             </a:r>
           </a:p>
           <a:p>
             <a:pPr>
-              <a:spcBef>
-                <a:spcPts val="200"/>
-              </a:spcBef>
+              <a:spcAft>
+                <a:spcPts val="800"/>
+              </a:spcAft>
             </a:pPr>
             <a:r>
-              <a:rPr sz="1300" b="0" i="0">
+              <a:rPr sz="2000" b="0" i="0">
                 <a:solidFill>
                   <a:srgbClr val="333333"/>
                 </a:solidFill>
                 <a:latin typeface="Calibri"/>
               </a:rPr>
-              <a:t>Pega ese codigo en la caja de texto de la pregunta y mira como lo dibuja la plataforma. Si no renderiza, corrige ahi mismo: lo que se califica es el diagrama renderizado dentro de la plataforma del curso.</a:t>
-            </a:r>
-          </a:p>
-        </p:txBody>
-      </p:sp>
-      <p:sp>
-        <p:nvSpPr>
-          <p:cNvPr id="18" name="Rounded Rectangle 17"/>
-          <p:cNvSpPr/>
-          <p:nvPr/>
-        </p:nvSpPr>
-        <p:spPr>
-          <a:xfrm>
-            <a:off x="457200" y="5088636"/>
-            <a:ext cx="11277295" cy="1051560"/>
-          </a:xfrm>
-          <a:prstGeom prst="roundRect">
-            <a:avLst>
-              <a:gd name="adj" fmla="val 12000"/>
-            </a:avLst>
-          </a:prstGeom>
-          <a:solidFill>
-            <a:srgbClr val="E8F4FA"/>
-          </a:solidFill>
-          <a:ln>
-            <a:noFill/>
-          </a:ln>
-        </p:spPr>
-        <p:style>
-          <a:lnRef idx="1">
-            <a:schemeClr val="accent1"/>
-          </a:lnRef>
-          <a:fillRef idx="3">
-            <a:schemeClr val="accent1"/>
-          </a:fillRef>
-          <a:effectRef idx="2">
-            <a:schemeClr val="accent1"/>
-          </a:effectRef>
-          <a:fontRef idx="minor">
-            <a:schemeClr val="lt1"/>
-          </a:fontRef>
-        </p:style>
-        <p:txBody>
-          <a:bodyPr rtlCol="0" anchor="ctr"/>
-          <a:lstStyle/>
-          <a:p>
-            <a:pPr algn="ctr"/>
-          </a:p>
-        </p:txBody>
-      </p:sp>
-      <p:sp>
-        <p:nvSpPr>
-          <p:cNvPr id="19" name="Rounded Rectangle 18"/>
-          <p:cNvSpPr/>
-          <p:nvPr/>
-        </p:nvSpPr>
-        <p:spPr>
-          <a:xfrm>
-            <a:off x="594360" y="5394960"/>
-            <a:ext cx="438912" cy="438912"/>
-          </a:xfrm>
-          <a:prstGeom prst="roundRect">
-            <a:avLst>
-              <a:gd name="adj" fmla="val 12000"/>
-            </a:avLst>
-          </a:prstGeom>
-          <a:solidFill>
-            <a:srgbClr val="095292"/>
-          </a:solidFill>
-          <a:ln>
-            <a:noFill/>
-          </a:ln>
-        </p:spPr>
-        <p:style>
-          <a:lnRef idx="1">
-            <a:schemeClr val="accent1"/>
-          </a:lnRef>
-          <a:fillRef idx="3">
-            <a:schemeClr val="accent1"/>
-          </a:fillRef>
-          <a:effectRef idx="2">
-            <a:schemeClr val="accent1"/>
-          </a:effectRef>
-          <a:fontRef idx="minor">
-            <a:schemeClr val="lt1"/>
-          </a:fontRef>
-        </p:style>
-        <p:txBody>
-          <a:bodyPr rtlCol="0" anchor="ctr"/>
-          <a:lstStyle/>
-          <a:p>
-            <a:pPr algn="ctr"/>
-          </a:p>
-        </p:txBody>
-      </p:sp>
-      <p:sp>
-        <p:nvSpPr>
-          <p:cNvPr id="20" name="TextBox 19"/>
-          <p:cNvSpPr txBox="1"/>
-          <p:nvPr/>
-        </p:nvSpPr>
-        <p:spPr>
-          <a:xfrm>
-            <a:off x="594360" y="5394960"/>
-            <a:ext cx="438912" cy="438912"/>
-          </a:xfrm>
-          <a:prstGeom prst="rect">
-            <a:avLst/>
-          </a:prstGeom>
-          <a:noFill/>
-        </p:spPr>
-        <p:txBody>
-          <a:bodyPr wrap="square" anchor="ctr"/>
-          <a:lstStyle/>
-          <a:p>
-            <a:pPr algn="ctr"/>
-            <a:r>
-              <a:rPr sz="1600" b="1" i="0">
-                <a:solidFill>
-                  <a:srgbClr val="FFFFFF"/>
-                </a:solidFill>
-                <a:latin typeface="Calibri"/>
-              </a:rPr>
-              <a:t>4</a:t>
-            </a:r>
-          </a:p>
-        </p:txBody>
-      </p:sp>
-      <p:sp>
-        <p:nvSpPr>
-          <p:cNvPr id="21" name="TextBox 20"/>
-          <p:cNvSpPr txBox="1"/>
-          <p:nvPr/>
-        </p:nvSpPr>
-        <p:spPr>
-          <a:xfrm>
-            <a:off x="1188720" y="5180076"/>
-            <a:ext cx="10271455" cy="886968"/>
-          </a:xfrm>
-          <a:prstGeom prst="rect">
-            <a:avLst/>
-          </a:prstGeom>
-          <a:noFill/>
-        </p:spPr>
-        <p:txBody>
-          <a:bodyPr wrap="square" anchor="ctr"/>
-          <a:lstStyle/>
-          <a:p>
-            <a:r>
-              <a:rPr sz="1500" b="1" i="0">
-                <a:solidFill>
-                  <a:srgbClr val="095292"/>
-                </a:solidFill>
-                <a:latin typeface="Calibri"/>
-              </a:rPr>
-              <a:t>Guarda el PNG para tu PI</a:t>
+              <a:t>–   Todo lo que construyan hoy entra al </a:t>
+            </a:r>
+            <a:r>
+              <a:rPr sz="2000" b="1" i="0">
+                <a:solidFill>
+                  <a:srgbClr val="333333"/>
+                </a:solidFill>
+                <a:latin typeface="Calibri"/>
+              </a:rPr>
+              <a:t>informe/repo del PI</a:t>
+            </a:r>
+            <a:r>
+              <a:rPr sz="2000" b="0" i="0">
+                <a:solidFill>
+                  <a:srgbClr val="333333"/>
+                </a:solidFill>
+                <a:latin typeface="Calibri"/>
+              </a:rPr>
+              <a:t> (no es lab suelto).</a:t>
             </a:r>
           </a:p>
           <a:p>
             <a:pPr>
-              <a:spcBef>
-                <a:spcPts val="200"/>
-              </a:spcBef>
+              <a:spcAft>
+                <a:spcPts val="800"/>
+              </a:spcAft>
             </a:pPr>
             <a:r>
-              <a:rPr sz="1300" b="0" i="0">
+              <a:rPr sz="2000" b="0" i="0">
                 <a:solidFill>
                   <a:srgbClr val="333333"/>
                 </a:solidFill>
                 <a:latin typeface="Calibri"/>
               </a:rPr>
-              <a:t>Exporta tambien la imagen a la carpeta de tu Proyecto Integrador. Esa copia es para tu informe; no reemplaza la respuesta en la plataforma.</a:t>
-            </a:r>
-          </a:p>
-        </p:txBody>
-      </p:sp>
-      <p:sp>
-        <p:nvSpPr>
-          <p:cNvPr id="22" name="TextBox 21"/>
+              <a:t>–   Individual por defecto · el docente puede autorizar equipos de 2–3; la entrega en la plataforma del curso siempre es individual.</a:t>
+            </a:r>
+          </a:p>
+        </p:txBody>
+      </p:sp>
+      <p:sp>
+        <p:nvSpPr>
+          <p:cNvPr id="6" name="TextBox 5"/>
           <p:cNvSpPr txBox="1"/>
           <p:nvPr/>
         </p:nvSpPr>
